--- a/folien/04-virtualisierung.pptx
+++ b/folien/04-virtualisierung.pptx
@@ -22,9 +22,10 @@
     <p:sldId id="270" r:id="rId16"/>
     <p:sldId id="271" r:id="rId17"/>
     <p:sldId id="272" r:id="rId18"/>
+    <p:sldId id="273" r:id="rId19"/>
   </p:sldIdLst>
   <p:notesMasterIdLst>
-    <p:notesMasterId r:id="rId19"/>
+    <p:notesMasterId r:id="rId20"/>
   </p:notesMasterIdLst>
   <p:sldSz cx="9144000" cy="5143500"/>
   <p:notesSz cx="5143500" cy="9144000"/>
@@ -1246,6 +1247,94 @@
             <a:fld id="{F7021451-1387-4CA6-816F-3879F97B5CBC}" type="slidenum">
               <a:rPr lang="en-US"/>
               <a:t>17</a:t>
+            </a:fld>
+            <a:endParaRPr lang="en-US"/>
+          </a:p>
+        </p:txBody>
+      </p:sp>
+    </p:spTree>
+    <p:extLst>
+      <p:ext uri="{BB962C8B-B14F-4D97-AF65-F5344CB8AC3E}">
+        <p14:creationId xmlns:p14="http://schemas.microsoft.com/office/powerpoint/2010/main" val="1024086991"/>
+      </p:ext>
+    </p:extLst>
+  </p:cSld>
+  <p:clrMapOvr>
+    <a:masterClrMapping/>
+  </p:clrMapOvr>
+</p:notes>
+</file>
+
+<file path=ppt/notesSlides/notesSlide18.xml><?xml version="1.0" encoding="utf-8"?>
+<p:notes xmlns:a="http://schemas.openxmlformats.org/drawingml/2006/main" xmlns:r="http://schemas.openxmlformats.org/officeDocument/2006/relationships" xmlns:p="http://schemas.openxmlformats.org/presentationml/2006/main">
+  <p:cSld>
+    <p:spTree>
+      <p:nvGrpSpPr>
+        <p:cNvPr id="1" name=""/>
+        <p:cNvGrpSpPr/>
+        <p:nvPr/>
+      </p:nvGrpSpPr>
+      <p:grpSpPr>
+        <a:xfrm>
+          <a:off x="0" y="0"/>
+          <a:ext cx="0" cy="0"/>
+          <a:chOff x="0" y="0"/>
+          <a:chExt cx="0" cy="0"/>
+        </a:xfrm>
+      </p:grpSpPr>
+      <p:sp>
+        <p:nvSpPr>
+          <p:cNvPr id="2" name="Slide Image Placeholder 1"/>
+          <p:cNvSpPr>
+            <a:spLocks noGrp="1" noRot="1" noChangeAspect="1"/>
+          </p:cNvSpPr>
+          <p:nvPr>
+            <p:ph type="sldImg"/>
+          </p:nvPr>
+        </p:nvSpPr>
+        <p:spPr/>
+      </p:sp>
+      <p:sp>
+        <p:nvSpPr>
+          <p:cNvPr id="3" name="Notes Placeholder 2"/>
+          <p:cNvSpPr>
+            <a:spLocks noGrp="1"/>
+          </p:cNvSpPr>
+          <p:nvPr>
+            <p:ph type="body" idx="1"/>
+          </p:nvPr>
+        </p:nvSpPr>
+        <p:spPr/>
+        <p:txBody>
+          <a:bodyPr/>
+          <a:lstStyle/>
+          <a:p>
+            <a:r>
+              <a:rPr lang="en-US" dirty="0"/>
+              <a:t/>
+            </a:r>
+            <a:endParaRPr lang="en-US" dirty="0"/>
+          </a:p>
+        </p:txBody>
+      </p:sp>
+      <p:sp>
+        <p:nvSpPr>
+          <p:cNvPr id="4" name="Slide Number Placeholder 3"/>
+          <p:cNvSpPr>
+            <a:spLocks noGrp="1"/>
+          </p:cNvSpPr>
+          <p:nvPr>
+            <p:ph type="sldNum" sz="quarter" idx="10"/>
+          </p:nvPr>
+        </p:nvSpPr>
+        <p:spPr/>
+        <p:txBody>
+          <a:bodyPr/>
+          <a:lstStyle/>
+          <a:p>
+            <a:fld id="{F7021451-1387-4CA6-816F-3879F97B5CBC}" type="slidenum">
+              <a:rPr lang="en-US"/>
+              <a:t>18</a:t>
             </a:fld>
             <a:endParaRPr lang="en-US"/>
           </a:p>
@@ -2454,7 +2543,7 @@
                 <a:ea typeface="Arial" pitchFamily="34" charset="-122"/>
                 <a:cs typeface="Arial" pitchFamily="34" charset="-120"/>
               </a:rPr>
-              <a:t>Heute startet ihr eure erste eigene virtuelle Maschine</a:t>
+              <a:t>Das ganze Bild an einem Abend – und eine echte Cloud-VM für jeden von euch</a:t>
             </a:r>
             <a:endParaRPr lang="en-US" sz="1700" dirty="0"/>
           </a:p>
@@ -2607,7 +2696,7 @@
                 <a:ea typeface="Arial" pitchFamily="34" charset="-122"/>
                 <a:cs typeface="Arial" pitchFamily="34" charset="-120"/>
               </a:rPr>
-              <a:t>ALLE ZUSAMMEN, JETZT</a:t>
+              <a:t>NAT UND BRIDGED</a:t>
             </a:r>
             <a:endParaRPr lang="en-US" sz="1150" dirty="0"/>
           </a:p>
@@ -2646,81 +2735,46 @@
                 <a:ea typeface="Arial" pitchFamily="34" charset="-122"/>
                 <a:cs typeface="Arial" pitchFamily="34" charset="-120"/>
               </a:rPr>
-              <a:t>Multipass einrichten – gemeinsam</a:t>
+              <a:t>Das Netz der VM</a:t>
             </a:r>
             <a:endParaRPr lang="en-US" sz="2600" dirty="0"/>
           </a:p>
         </p:txBody>
       </p:sp>
-      <p:sp>
-        <p:nvSpPr>
-          <p:cNvPr id="5" name="Text 3"/>
-          <p:cNvSpPr/>
-          <p:nvPr/>
-        </p:nvSpPr>
-        <p:spPr>
-          <a:xfrm>
-            <a:off x="566928" y="1444752"/>
-            <a:ext cx="8010144" cy="274320"/>
-          </a:xfrm>
-          <a:prstGeom prst="rect">
-            <a:avLst/>
-          </a:prstGeom>
-          <a:noFill/>
-          <a:ln/>
-        </p:spPr>
-        <p:txBody>
-          <a:bodyPr wrap="square" lIns="0" tIns="0" rIns="0" bIns="0" rtlCol="0" anchor="t"/>
-          <a:lstStyle/>
-          <a:p>
-            <a:pPr indent="0" marL="0">
-              <a:buNone/>
-            </a:pPr>
-            <a:r>
-              <a:rPr lang="en-US" sz="1300" dirty="0">
-                <a:solidFill>
-                  <a:srgbClr val="5C6377"/>
-                </a:solidFill>
-                <a:latin typeface="Arial" pitchFamily="34" charset="0"/>
-                <a:ea typeface="Arial" pitchFamily="34" charset="-122"/>
-                <a:cs typeface="Arial" pitchFamily="34" charset="-120"/>
-              </a:rPr>
-              <a:t>Wir installieren jetzt gemeinsam – die Anleitung führt euch je Betriebssystem durch:</a:t>
-            </a:r>
-            <a:endParaRPr lang="en-US" sz="1300" dirty="0"/>
-          </a:p>
-        </p:txBody>
-      </p:sp>
-      <p:sp>
-        <p:nvSpPr>
-          <p:cNvPr id="6" name="Shape 4"/>
-          <p:cNvSpPr/>
-          <p:nvPr/>
-        </p:nvSpPr>
-        <p:spPr>
-          <a:xfrm>
-            <a:off x="566928" y="1920240"/>
-            <a:ext cx="8010144" cy="713232"/>
-          </a:xfrm>
-          <a:prstGeom prst="rect">
-            <a:avLst/>
-          </a:prstGeom>
-          <a:solidFill>
-            <a:srgbClr val="EEF0FB"/>
-          </a:solidFill>
-          <a:ln/>
-        </p:spPr>
-      </p:sp>
-      <p:sp>
-        <p:nvSpPr>
-          <p:cNvPr id="7" name="Shape 5"/>
-          <p:cNvSpPr/>
-          <p:nvPr/>
-        </p:nvSpPr>
-        <p:spPr>
-          <a:xfrm>
-            <a:off x="566928" y="1920240"/>
-            <a:ext cx="41148" cy="713232"/>
+      <p:pic>
+        <p:nvPicPr>
+          <p:cNvPr id="5" name="Image 0" descr="/Users/jacobmenge/Desktop/kurs-26.2b-orga/folienwerkstatt/assets/diagramme/vm-netz.png">    </p:cNvPr>
+          <p:cNvPicPr>
+            <a:picLocks noChangeAspect="1"/>
+          </p:cNvPicPr>
+          <p:nvPr/>
+        </p:nvPicPr>
+        <p:blipFill>
+          <a:blip r:embed="rId1"/>
+          <a:stretch>
+            <a:fillRect/>
+          </a:stretch>
+        </p:blipFill>
+        <p:spPr>
+          <a:xfrm>
+            <a:off x="566928" y="1463040"/>
+            <a:ext cx="8010144" cy="2450592"/>
+          </a:xfrm>
+          <a:prstGeom prst="rect">
+            <a:avLst/>
+          </a:prstGeom>
+        </p:spPr>
+      </p:pic>
+      <p:sp>
+        <p:nvSpPr>
+          <p:cNvPr id="6" name="Shape 3"/>
+          <p:cNvSpPr/>
+          <p:nvPr/>
+        </p:nvSpPr>
+        <p:spPr>
+          <a:xfrm>
+            <a:off x="566928" y="4114800"/>
+            <a:ext cx="32004" cy="256032"/>
           </a:xfrm>
           <a:prstGeom prst="rect">
             <a:avLst/>
@@ -2733,72 +2787,30 @@
       </p:sp>
       <p:sp>
         <p:nvSpPr>
-          <p:cNvPr id="8" name="Text 6"/>
-          <p:cNvSpPr/>
-          <p:nvPr/>
-        </p:nvSpPr>
-        <p:spPr>
-          <a:xfrm>
-            <a:off x="804672" y="2066544"/>
-            <a:ext cx="7607808" cy="242062"/>
-          </a:xfrm>
-          <a:prstGeom prst="rect">
-            <a:avLst/>
-          </a:prstGeom>
-          <a:noFill/>
-          <a:ln/>
-        </p:spPr>
-        <p:txBody>
-          <a:bodyPr wrap="square" lIns="0" tIns="0" rIns="0" bIns="0" rtlCol="0" anchor="t"/>
-          <a:lstStyle/>
-          <a:p>
-            <a:pPr indent="0" marL="0">
-              <a:buNone/>
-            </a:pPr>
-            <a:r>
-              <a:rPr lang="en-US" sz="1300" b="1" dirty="0">
-                <a:solidFill>
-                  <a:srgbClr val="272E52"/>
-                </a:solidFill>
-                <a:latin typeface="Arial" pitchFamily="34" charset="0"/>
-                <a:ea typeface="Arial" pitchFamily="34" charset="-122"/>
-                <a:cs typeface="Arial" pitchFamily="34" charset="-120"/>
-              </a:rPr>
-              <a:t>Anleitung öffnen</a:t>
-            </a:r>
-            <a:endParaRPr lang="en-US" sz="1300" dirty="0"/>
-          </a:p>
-        </p:txBody>
-      </p:sp>
-      <p:sp>
-        <p:nvSpPr>
-          <p:cNvPr id="9" name="Text 7"/>
-          <p:cNvSpPr/>
-          <p:nvPr/>
-        </p:nvSpPr>
-        <p:spPr>
-          <a:xfrm>
-            <a:off x="804672" y="2354326"/>
-            <a:ext cx="7607808" cy="160274"/>
-          </a:xfrm>
-          <a:prstGeom prst="rect">
-            <a:avLst/>
-          </a:prstGeom>
-          <a:noFill/>
-          <a:ln/>
-        </p:spPr>
-        <p:txBody>
-          <a:bodyPr wrap="square" lIns="0" tIns="0" rIns="0" bIns="0" rtlCol="0" anchor="t"/>
-          <a:lstStyle/>
-          <a:p>
-            <a:pPr indent="0" marL="0">
-              <a:lnSpc>
-                <a:spcPct val="92000"/>
-              </a:lnSpc>
-              <a:buNone/>
-            </a:pPr>
-            <a:r>
-              <a:rPr lang="en-US" sz="1200" dirty="0">
+          <p:cNvPr id="7" name="Text 4"/>
+          <p:cNvSpPr/>
+          <p:nvPr/>
+        </p:nvSpPr>
+        <p:spPr>
+          <a:xfrm>
+            <a:off x="749808" y="4069080"/>
+            <a:ext cx="7827264" cy="402336"/>
+          </a:xfrm>
+          <a:prstGeom prst="rect">
+            <a:avLst/>
+          </a:prstGeom>
+          <a:noFill/>
+          <a:ln/>
+        </p:spPr>
+        <p:txBody>
+          <a:bodyPr wrap="square" lIns="0" tIns="0" rIns="0" bIns="0" rtlCol="0" anchor="ctr"/>
+          <a:lstStyle/>
+          <a:p>
+            <a:pPr indent="0" marL="0">
+              <a:buNone/>
+            </a:pPr>
+            <a:r>
+              <a:rPr lang="en-US" sz="1200" b="1" dirty="0">
                 <a:solidFill>
                   <a:srgbClr val="434A63"/>
                 </a:solidFill>
@@ -2806,7 +2818,7 @@
                 <a:ea typeface="Arial" pitchFamily="34" charset="-122"/>
                 <a:cs typeface="Arial" pitchFamily="34" charset="-120"/>
               </a:rPr>
-              <a:t>jacobmenge.github.io/kurs-unterlagen/virtualisierung/multipass-einstieg/</a:t>
+              <a:t>Euer Netzwerk-Wissen, eine Etage tiefer – gleich prüft ihr genau das an eurer Cloud-VM nach.</a:t>
             </a:r>
             <a:endParaRPr lang="en-US" sz="1200" dirty="0"/>
           </a:p>
@@ -2814,248 +2826,7 @@
       </p:sp>
       <p:sp>
         <p:nvSpPr>
-          <p:cNvPr id="10" name="Text 8"/>
-          <p:cNvSpPr/>
-          <p:nvPr/>
-        </p:nvSpPr>
-        <p:spPr>
-          <a:xfrm>
-            <a:off x="566928" y="2834640"/>
-            <a:ext cx="8010144" cy="1188720"/>
-          </a:xfrm>
-          <a:prstGeom prst="rect">
-            <a:avLst/>
-          </a:prstGeom>
-          <a:noFill/>
-          <a:ln/>
-        </p:spPr>
-        <p:txBody>
-          <a:bodyPr wrap="square" lIns="0" tIns="0" rIns="0" bIns="0" rtlCol="0" anchor="t"/>
-          <a:lstStyle/>
-          <a:p>
-            <a:pPr indent="0" marL="0">
-              <a:lnSpc>
-                <a:spcPct val="92000"/>
-              </a:lnSpc>
-              <a:buNone/>
-            </a:pPr>
-            <a:r>
-              <a:rPr lang="en-US" sz="1150" b="1" dirty="0">
-                <a:solidFill>
-                  <a:srgbClr val="0F7C86"/>
-                </a:solidFill>
-                <a:latin typeface="Arial" pitchFamily="34" charset="0"/>
-                <a:ea typeface="Arial" pitchFamily="34" charset="-122"/>
-                <a:cs typeface="Arial" pitchFamily="34" charset="-120"/>
-              </a:rPr>
-              <a:t>▸   </a:t>
-            </a:r>
-            <a:pPr indent="0" marL="0">
-              <a:lnSpc>
-                <a:spcPct val="92000"/>
-              </a:lnSpc>
-              <a:spcAft>
-                <a:spcPts val="900"/>
-              </a:spcAft>
-              <a:buNone/>
-            </a:pPr>
-            <a:r>
-              <a:rPr lang="en-US" sz="1150" dirty="0">
-                <a:solidFill>
-                  <a:srgbClr val="434A63"/>
-                </a:solidFill>
-                <a:latin typeface="Arial" pitchFamily="34" charset="0"/>
-                <a:ea typeface="Arial" pitchFamily="34" charset="-122"/>
-                <a:cs typeface="Arial" pitchFamily="34" charset="-120"/>
-              </a:rPr>
-              <a:t>Windows: Installer laden, durchklicken – Hyper-V oder VirtualBox als Unterbau.</a:t>
-            </a:r>
-            <a:endParaRPr lang="en-US" sz="1150" dirty="0"/>
-          </a:p>
-          <a:p>
-            <a:pPr indent="0" marL="0">
-              <a:lnSpc>
-                <a:spcPct val="92000"/>
-              </a:lnSpc>
-              <a:buNone/>
-            </a:pPr>
-            <a:r>
-              <a:rPr lang="en-US" sz="1150" b="1" dirty="0">
-                <a:solidFill>
-                  <a:srgbClr val="0F7C86"/>
-                </a:solidFill>
-                <a:latin typeface="Arial" pitchFamily="34" charset="0"/>
-                <a:ea typeface="Arial" pitchFamily="34" charset="-122"/>
-                <a:cs typeface="Arial" pitchFamily="34" charset="-120"/>
-              </a:rPr>
-              <a:t>▸   </a:t>
-            </a:r>
-            <a:pPr indent="0" marL="0">
-              <a:lnSpc>
-                <a:spcPct val="92000"/>
-              </a:lnSpc>
-              <a:spcAft>
-                <a:spcPts val="900"/>
-              </a:spcAft>
-              <a:buNone/>
-            </a:pPr>
-            <a:r>
-              <a:rPr lang="en-US" sz="1150" dirty="0">
-                <a:solidFill>
-                  <a:srgbClr val="434A63"/>
-                </a:solidFill>
-                <a:latin typeface="Arial" pitchFamily="34" charset="0"/>
-                <a:ea typeface="Arial" pitchFamily="34" charset="-122"/>
-                <a:cs typeface="Arial" pitchFamily="34" charset="-120"/>
-              </a:rPr>
-              <a:t>macOS: Installer oder „brew install --cask multipass“.</a:t>
-            </a:r>
-            <a:endParaRPr lang="en-US" sz="1150" dirty="0"/>
-          </a:p>
-          <a:p>
-            <a:pPr indent="0" marL="0">
-              <a:lnSpc>
-                <a:spcPct val="92000"/>
-              </a:lnSpc>
-              <a:buNone/>
-            </a:pPr>
-            <a:r>
-              <a:rPr lang="en-US" sz="1150" b="1" dirty="0">
-                <a:solidFill>
-                  <a:srgbClr val="0F7C86"/>
-                </a:solidFill>
-                <a:latin typeface="Arial" pitchFamily="34" charset="0"/>
-                <a:ea typeface="Arial" pitchFamily="34" charset="-122"/>
-                <a:cs typeface="Arial" pitchFamily="34" charset="-120"/>
-              </a:rPr>
-              <a:t>▸   </a:t>
-            </a:r>
-            <a:pPr indent="0" marL="0">
-              <a:lnSpc>
-                <a:spcPct val="92000"/>
-              </a:lnSpc>
-              <a:spcAft>
-                <a:spcPts val="900"/>
-              </a:spcAft>
-              <a:buNone/>
-            </a:pPr>
-            <a:r>
-              <a:rPr lang="en-US" sz="1150" dirty="0">
-                <a:solidFill>
-                  <a:srgbClr val="434A63"/>
-                </a:solidFill>
-                <a:latin typeface="Arial" pitchFamily="34" charset="0"/>
-                <a:ea typeface="Arial" pitchFamily="34" charset="-122"/>
-                <a:cs typeface="Arial" pitchFamily="34" charset="-120"/>
-              </a:rPr>
-              <a:t>Linux: „sudo snap install multipass“.</a:t>
-            </a:r>
-            <a:endParaRPr lang="en-US" sz="1150" dirty="0"/>
-          </a:p>
-          <a:p>
-            <a:pPr indent="0" marL="0">
-              <a:lnSpc>
-                <a:spcPct val="92000"/>
-              </a:lnSpc>
-              <a:buNone/>
-            </a:pPr>
-            <a:r>
-              <a:rPr lang="en-US" sz="1150" b="1" dirty="0">
-                <a:solidFill>
-                  <a:srgbClr val="0F7C86"/>
-                </a:solidFill>
-                <a:latin typeface="Arial" pitchFamily="34" charset="0"/>
-                <a:ea typeface="Arial" pitchFamily="34" charset="-122"/>
-                <a:cs typeface="Arial" pitchFamily="34" charset="-120"/>
-              </a:rPr>
-              <a:t>▸   </a:t>
-            </a:r>
-            <a:pPr indent="0" marL="0">
-              <a:lnSpc>
-                <a:spcPct val="92000"/>
-              </a:lnSpc>
-              <a:spcAft>
-                <a:spcPts val="900"/>
-              </a:spcAft>
-              <a:buNone/>
-            </a:pPr>
-            <a:r>
-              <a:rPr lang="en-US" sz="1150" dirty="0">
-                <a:solidFill>
-                  <a:srgbClr val="434A63"/>
-                </a:solidFill>
-                <a:latin typeface="Arial" pitchFamily="34" charset="0"/>
-                <a:ea typeface="Arial" pitchFamily="34" charset="-122"/>
-                <a:cs typeface="Arial" pitchFamily="34" charset="-120"/>
-              </a:rPr>
-              <a:t>Test danach bei allen gleich: „multipass version“ meldet sich.</a:t>
-            </a:r>
-            <a:endParaRPr lang="en-US" sz="1150" dirty="0"/>
-          </a:p>
-        </p:txBody>
-      </p:sp>
-      <p:sp>
-        <p:nvSpPr>
-          <p:cNvPr id="11" name="Shape 9"/>
-          <p:cNvSpPr/>
-          <p:nvPr/>
-        </p:nvSpPr>
-        <p:spPr>
-          <a:xfrm>
-            <a:off x="566928" y="4206240"/>
-            <a:ext cx="32004" cy="256032"/>
-          </a:xfrm>
-          <a:prstGeom prst="rect">
-            <a:avLst/>
-          </a:prstGeom>
-          <a:solidFill>
-            <a:srgbClr val="0F7C86"/>
-          </a:solidFill>
-          <a:ln/>
-        </p:spPr>
-      </p:sp>
-      <p:sp>
-        <p:nvSpPr>
-          <p:cNvPr id="12" name="Text 10"/>
-          <p:cNvSpPr/>
-          <p:nvPr/>
-        </p:nvSpPr>
-        <p:spPr>
-          <a:xfrm>
-            <a:off x="749808" y="4160520"/>
-            <a:ext cx="7827264" cy="402336"/>
-          </a:xfrm>
-          <a:prstGeom prst="rect">
-            <a:avLst/>
-          </a:prstGeom>
-          <a:noFill/>
-          <a:ln/>
-        </p:spPr>
-        <p:txBody>
-          <a:bodyPr wrap="square" lIns="0" tIns="0" rIns="0" bIns="0" rtlCol="0" anchor="ctr"/>
-          <a:lstStyle/>
-          <a:p>
-            <a:pPr indent="0" marL="0">
-              <a:buNone/>
-            </a:pPr>
-            <a:r>
-              <a:rPr lang="en-US" sz="1200" b="1" dirty="0">
-                <a:solidFill>
-                  <a:srgbClr val="434A63"/>
-                </a:solidFill>
-                <a:latin typeface="Arial" pitchFamily="34" charset="0"/>
-                <a:ea typeface="Arial" pitchFamily="34" charset="-122"/>
-                <a:cs typeface="Arial" pitchFamily="34" charset="-120"/>
-              </a:rPr>
-              <a:t>Wer fertig ist, hilft den Nachbarn im Chat – wir starten erst, wenn alle eine Version sehen.</a:t>
-            </a:r>
-            <a:endParaRPr lang="en-US" sz="1200" dirty="0"/>
-          </a:p>
-        </p:txBody>
-      </p:sp>
-      <p:sp>
-        <p:nvSpPr>
-          <p:cNvPr id="13" name="Shape 11"/>
+          <p:cNvPr id="8" name="Shape 5"/>
           <p:cNvSpPr/>
           <p:nvPr/>
         </p:nvSpPr>
@@ -3078,7 +2849,7 @@
       </p:sp>
       <p:sp>
         <p:nvSpPr>
-          <p:cNvPr id="14" name="Text 12"/>
+          <p:cNvPr id="9" name="Text 6"/>
           <p:cNvSpPr/>
           <p:nvPr/>
         </p:nvSpPr>
@@ -3109,7 +2880,7 @@
                 <a:ea typeface="Arial" pitchFamily="34" charset="-122"/>
                 <a:cs typeface="Arial" pitchFamily="34" charset="-120"/>
               </a:rPr>
-              <a:t>Werkzeug</a:t>
+              <a:t>In der VM</a:t>
             </a:r>
             <a:endParaRPr lang="en-US" sz="1050" dirty="0"/>
           </a:p>
@@ -3117,7 +2888,7 @@
       </p:sp>
       <p:sp>
         <p:nvSpPr>
-          <p:cNvPr id="15" name="Text 13"/>
+          <p:cNvPr id="10" name="Text 7"/>
           <p:cNvSpPr/>
           <p:nvPr/>
         </p:nvSpPr>
@@ -3148,7 +2919,7 @@
                 <a:ea typeface="Arial" pitchFamily="34" charset="-122"/>
                 <a:cs typeface="Arial" pitchFamily="34" charset="-120"/>
               </a:rPr>
-              <a:t>7/12</a:t>
+              <a:t>7/13</a:t>
             </a:r>
             <a:endParaRPr lang="en-US" sz="1050" dirty="0"/>
           </a:p>
@@ -3194,48 +2965,150 @@
         </p:nvSpPr>
         <p:spPr>
           <a:xfrm>
-            <a:off x="6355080" y="0"/>
-            <a:ext cx="2788920" cy="5143500"/>
+            <a:off x="566928" y="201168"/>
+            <a:ext cx="475488" cy="50292"/>
           </a:xfrm>
           <a:prstGeom prst="rect">
             <a:avLst/>
           </a:prstGeom>
           <a:solidFill>
-            <a:srgbClr val="FBF2E3"/>
+            <a:srgbClr val="0F7C86"/>
           </a:solidFill>
           <a:ln/>
         </p:spPr>
       </p:sp>
       <p:sp>
         <p:nvSpPr>
-          <p:cNvPr id="3" name="Shape 1"/>
-          <p:cNvSpPr/>
-          <p:nvPr/>
-        </p:nvSpPr>
-        <p:spPr>
-          <a:xfrm>
-            <a:off x="6355080" y="0"/>
-            <a:ext cx="45720" cy="5143500"/>
+          <p:cNvPr id="3" name="Text 1"/>
+          <p:cNvSpPr/>
+          <p:nvPr/>
+        </p:nvSpPr>
+        <p:spPr>
+          <a:xfrm>
+            <a:off x="566928" y="384048"/>
+            <a:ext cx="8010144" cy="237744"/>
+          </a:xfrm>
+          <a:prstGeom prst="rect">
+            <a:avLst/>
+          </a:prstGeom>
+          <a:noFill/>
+          <a:ln/>
+        </p:spPr>
+        <p:txBody>
+          <a:bodyPr wrap="square" lIns="0" tIns="0" rIns="0" bIns="0" rtlCol="0" anchor="ctr"/>
+          <a:lstStyle/>
+          <a:p>
+            <a:pPr indent="0" marL="0">
+              <a:buNone/>
+            </a:pPr>
+            <a:r>
+              <a:rPr lang="en-US" sz="1150" b="1" spc="180" kern="0" dirty="0">
+                <a:solidFill>
+                  <a:srgbClr val="0F7C86"/>
+                </a:solidFill>
+                <a:latin typeface="Arial" pitchFamily="34" charset="0"/>
+                <a:ea typeface="Arial" pitchFamily="34" charset="-122"/>
+                <a:cs typeface="Arial" pitchFamily="34" charset="-120"/>
+              </a:rPr>
+              <a:t>SNAPSHOTS – GLEICH ALS LIVE-DEMO</a:t>
+            </a:r>
+            <a:endParaRPr lang="en-US" sz="1150" dirty="0"/>
+          </a:p>
+        </p:txBody>
+      </p:sp>
+      <p:sp>
+        <p:nvSpPr>
+          <p:cNvPr id="4" name="Text 2"/>
+          <p:cNvSpPr/>
+          <p:nvPr/>
+        </p:nvSpPr>
+        <p:spPr>
+          <a:xfrm>
+            <a:off x="566928" y="731520"/>
+            <a:ext cx="8010144" cy="603504"/>
+          </a:xfrm>
+          <a:prstGeom prst="rect">
+            <a:avLst/>
+          </a:prstGeom>
+          <a:noFill/>
+          <a:ln/>
+        </p:spPr>
+        <p:txBody>
+          <a:bodyPr wrap="square" lIns="0" tIns="0" rIns="0" bIns="0" rtlCol="0" anchor="t"/>
+          <a:lstStyle/>
+          <a:p>
+            <a:pPr indent="0" marL="0">
+              <a:buNone/>
+            </a:pPr>
+            <a:r>
+              <a:rPr lang="en-US" sz="2600" b="1" dirty="0">
+                <a:solidFill>
+                  <a:srgbClr val="272E52"/>
+                </a:solidFill>
+                <a:latin typeface="Arial" pitchFamily="34" charset="0"/>
+                <a:ea typeface="Arial" pitchFamily="34" charset="-122"/>
+                <a:cs typeface="Arial" pitchFamily="34" charset="-120"/>
+              </a:rPr>
+              <a:t>Das Lesezeichen im VM-Zustand</a:t>
+            </a:r>
+            <a:endParaRPr lang="en-US" sz="2600" dirty="0"/>
+          </a:p>
+        </p:txBody>
+      </p:sp>
+      <p:pic>
+        <p:nvPicPr>
+          <p:cNvPr id="5" name="Image 0" descr="/Users/jacobmenge/Desktop/kurs-26.2b-orga/folienwerkstatt/assets/diagramme/snapshot-strahl.png">    </p:cNvPr>
+          <p:cNvPicPr>
+            <a:picLocks noChangeAspect="1"/>
+          </p:cNvPicPr>
+          <p:nvPr/>
+        </p:nvPicPr>
+        <p:blipFill>
+          <a:blip r:embed="rId1"/>
+          <a:stretch>
+            <a:fillRect/>
+          </a:stretch>
+        </p:blipFill>
+        <p:spPr>
+          <a:xfrm>
+            <a:off x="566928" y="1554480"/>
+            <a:ext cx="8010144" cy="2249424"/>
+          </a:xfrm>
+          <a:prstGeom prst="rect">
+            <a:avLst/>
+          </a:prstGeom>
+        </p:spPr>
+      </p:pic>
+      <p:sp>
+        <p:nvSpPr>
+          <p:cNvPr id="6" name="Shape 3"/>
+          <p:cNvSpPr/>
+          <p:nvPr/>
+        </p:nvSpPr>
+        <p:spPr>
+          <a:xfrm>
+            <a:off x="566928" y="4206240"/>
+            <a:ext cx="32004" cy="256032"/>
           </a:xfrm>
           <a:prstGeom prst="rect">
             <a:avLst/>
           </a:prstGeom>
           <a:solidFill>
-            <a:srgbClr val="9A6310"/>
+            <a:srgbClr val="0F7C86"/>
           </a:solidFill>
           <a:ln/>
         </p:spPr>
       </p:sp>
       <p:sp>
         <p:nvSpPr>
-          <p:cNvPr id="4" name="Text 2"/>
-          <p:cNvSpPr/>
-          <p:nvPr/>
-        </p:nvSpPr>
-        <p:spPr>
-          <a:xfrm>
-            <a:off x="6629400" y="1463040"/>
-            <a:ext cx="2194560" cy="1737360"/>
+          <p:cNvPr id="7" name="Text 4"/>
+          <p:cNvSpPr/>
+          <p:nvPr/>
+        </p:nvSpPr>
+        <p:spPr>
+          <a:xfrm>
+            <a:off x="749808" y="4160520"/>
+            <a:ext cx="7827264" cy="402336"/>
           </a:xfrm>
           <a:prstGeom prst="rect">
             <a:avLst/>
@@ -3247,109 +3120,73 @@
           <a:bodyPr wrap="square" lIns="0" tIns="0" rIns="0" bIns="0" rtlCol="0" anchor="ctr"/>
           <a:lstStyle/>
           <a:p>
-            <a:pPr algn="ctr" indent="0" marL="0">
-              <a:buNone/>
-            </a:pPr>
-            <a:r>
-              <a:rPr lang="en-US" sz="8400" b="1" dirty="0">
-                <a:solidFill>
-                  <a:srgbClr val="9A6310"/>
-                </a:solidFill>
-                <a:latin typeface="Arial" pitchFamily="34" charset="0"/>
-                <a:ea typeface="Arial" pitchFamily="34" charset="-122"/>
-                <a:cs typeface="Arial" pitchFamily="34" charset="-120"/>
-              </a:rPr>
-              <a:t>03</a:t>
-            </a:r>
-            <a:endParaRPr lang="en-US" sz="8400" dirty="0"/>
-          </a:p>
-        </p:txBody>
-      </p:sp>
-      <p:sp>
-        <p:nvSpPr>
-          <p:cNvPr id="5" name="Shape 3"/>
-          <p:cNvSpPr/>
-          <p:nvPr/>
-        </p:nvSpPr>
-        <p:spPr>
-          <a:xfrm>
-            <a:off x="566928" y="1883664"/>
-            <a:ext cx="475488" cy="50292"/>
-          </a:xfrm>
-          <a:prstGeom prst="rect">
-            <a:avLst/>
-          </a:prstGeom>
-          <a:solidFill>
-            <a:srgbClr val="9A6310"/>
-          </a:solidFill>
-          <a:ln/>
-        </p:spPr>
-      </p:sp>
-      <p:sp>
-        <p:nvSpPr>
-          <p:cNvPr id="6" name="Text 4"/>
-          <p:cNvSpPr/>
-          <p:nvPr/>
-        </p:nvSpPr>
-        <p:spPr>
-          <a:xfrm>
-            <a:off x="566928" y="2084832"/>
-            <a:ext cx="5394960" cy="868680"/>
-          </a:xfrm>
-          <a:prstGeom prst="rect">
-            <a:avLst/>
-          </a:prstGeom>
-          <a:noFill/>
-          <a:ln/>
-        </p:spPr>
-        <p:txBody>
-          <a:bodyPr wrap="square" lIns="0" tIns="0" rIns="0" bIns="0" rtlCol="0" anchor="t"/>
-          <a:lstStyle/>
-          <a:p>
-            <a:pPr indent="0" marL="0">
-              <a:buNone/>
-            </a:pPr>
-            <a:r>
-              <a:rPr lang="en-US" sz="3000" b="1" dirty="0">
-                <a:solidFill>
-                  <a:srgbClr val="272E52"/>
-                </a:solidFill>
-                <a:latin typeface="Arial" pitchFamily="34" charset="0"/>
-                <a:ea typeface="Arial" pitchFamily="34" charset="-122"/>
-                <a:cs typeface="Arial" pitchFamily="34" charset="-120"/>
-              </a:rPr>
-              <a:t>Eure erste VM</a:t>
-            </a:r>
-            <a:endParaRPr lang="en-US" sz="3000" dirty="0"/>
-          </a:p>
-        </p:txBody>
-      </p:sp>
-      <p:sp>
-        <p:nvSpPr>
-          <p:cNvPr id="7" name="Text 5"/>
-          <p:cNvSpPr/>
-          <p:nvPr/>
-        </p:nvSpPr>
-        <p:spPr>
-          <a:xfrm>
-            <a:off x="566928" y="3017520"/>
-            <a:ext cx="5394960" cy="548640"/>
-          </a:xfrm>
-          <a:prstGeom prst="rect">
-            <a:avLst/>
-          </a:prstGeom>
-          <a:noFill/>
-          <a:ln/>
-        </p:spPr>
-        <p:txBody>
-          <a:bodyPr wrap="square" lIns="0" tIns="0" rIns="0" bIns="0" rtlCol="0" anchor="t"/>
-          <a:lstStyle/>
-          <a:p>
-            <a:pPr indent="0" marL="0">
-              <a:buNone/>
-            </a:pPr>
-            <a:r>
-              <a:rPr lang="en-US" sz="1350" dirty="0">
+            <a:pPr indent="0" marL="0">
+              <a:buNone/>
+            </a:pPr>
+            <a:r>
+              <a:rPr lang="en-US" sz="1200" b="1" dirty="0">
+                <a:solidFill>
+                  <a:srgbClr val="434A63"/>
+                </a:solidFill>
+                <a:latin typeface="Arial" pitchFamily="34" charset="0"/>
+                <a:ea typeface="Arial" pitchFamily="34" charset="-122"/>
+                <a:cs typeface="Arial" pitchFamily="34" charset="-120"/>
+              </a:rPr>
+              <a:t>Ich mache das jetzt einmal live kaputt und wieder heil – wer es selbst will: Kür-Teil der Übungsseite, zehn Minuten.</a:t>
+            </a:r>
+            <a:endParaRPr lang="en-US" sz="1200" dirty="0"/>
+          </a:p>
+        </p:txBody>
+      </p:sp>
+      <p:sp>
+        <p:nvSpPr>
+          <p:cNvPr id="8" name="Shape 5"/>
+          <p:cNvSpPr/>
+          <p:nvPr/>
+        </p:nvSpPr>
+        <p:spPr>
+          <a:xfrm>
+            <a:off x="566928" y="4631436"/>
+            <a:ext cx="8010144" cy="0"/>
+          </a:xfrm>
+          <a:prstGeom prst="line">
+            <a:avLst/>
+          </a:prstGeom>
+          <a:noFill/>
+          <a:ln w="9525">
+            <a:solidFill>
+              <a:srgbClr val="DFE3F0"/>
+            </a:solidFill>
+            <a:prstDash val="solid"/>
+          </a:ln>
+        </p:spPr>
+      </p:sp>
+      <p:sp>
+        <p:nvSpPr>
+          <p:cNvPr id="9" name="Text 6"/>
+          <p:cNvSpPr/>
+          <p:nvPr/>
+        </p:nvSpPr>
+        <p:spPr>
+          <a:xfrm>
+            <a:off x="566928" y="4722876"/>
+            <a:ext cx="5029200" cy="237744"/>
+          </a:xfrm>
+          <a:prstGeom prst="rect">
+            <a:avLst/>
+          </a:prstGeom>
+          <a:noFill/>
+          <a:ln/>
+        </p:spPr>
+        <p:txBody>
+          <a:bodyPr wrap="square" lIns="0" tIns="0" rIns="0" bIns="0" rtlCol="0" anchor="ctr"/>
+          <a:lstStyle/>
+          <a:p>
+            <a:pPr indent="0" marL="0">
+              <a:buNone/>
+            </a:pPr>
+            <a:r>
+              <a:rPr lang="en-US" sz="1050" spc="30" kern="0" dirty="0">
                 <a:solidFill>
                   <a:srgbClr val="5C6377"/>
                 </a:solidFill>
@@ -3357,9 +3194,48 @@
                 <a:ea typeface="Arial" pitchFamily="34" charset="-122"/>
                 <a:cs typeface="Arial" pitchFamily="34" charset="-120"/>
               </a:rPr>
-              <a:t>50 Minuten in Gruppen – bauen, hineinschauen, aufräumen</a:t>
-            </a:r>
-            <a:endParaRPr lang="en-US" sz="1350" dirty="0"/>
+              <a:t>In der VM</a:t>
+            </a:r>
+            <a:endParaRPr lang="en-US" sz="1050" dirty="0"/>
+          </a:p>
+        </p:txBody>
+      </p:sp>
+      <p:sp>
+        <p:nvSpPr>
+          <p:cNvPr id="10" name="Text 7"/>
+          <p:cNvSpPr/>
+          <p:nvPr/>
+        </p:nvSpPr>
+        <p:spPr>
+          <a:xfrm>
+            <a:off x="8028432" y="4722876"/>
+            <a:ext cx="548640" cy="237744"/>
+          </a:xfrm>
+          <a:prstGeom prst="rect">
+            <a:avLst/>
+          </a:prstGeom>
+          <a:noFill/>
+          <a:ln/>
+        </p:spPr>
+        <p:txBody>
+          <a:bodyPr wrap="square" lIns="0" tIns="0" rIns="0" bIns="0" rtlCol="0" anchor="ctr"/>
+          <a:lstStyle/>
+          <a:p>
+            <a:pPr algn="r" indent="0" marL="0">
+              <a:buNone/>
+            </a:pPr>
+            <a:r>
+              <a:rPr lang="en-US" sz="1050" dirty="0">
+                <a:solidFill>
+                  <a:srgbClr val="5C6377"/>
+                </a:solidFill>
+                <a:latin typeface="Arial" pitchFamily="34" charset="0"/>
+                <a:ea typeface="Arial" pitchFamily="34" charset="-122"/>
+                <a:cs typeface="Arial" pitchFamily="34" charset="-120"/>
+              </a:rPr>
+              <a:t>8/13</a:t>
+            </a:r>
+            <a:endParaRPr lang="en-US" sz="1050" dirty="0"/>
           </a:p>
         </p:txBody>
       </p:sp>
@@ -3403,8 +3279,28 @@
         </p:nvSpPr>
         <p:spPr>
           <a:xfrm>
-            <a:off x="566928" y="201168"/>
-            <a:ext cx="475488" cy="50292"/>
+            <a:off x="6355080" y="0"/>
+            <a:ext cx="2788920" cy="5143500"/>
+          </a:xfrm>
+          <a:prstGeom prst="rect">
+            <a:avLst/>
+          </a:prstGeom>
+          <a:solidFill>
+            <a:srgbClr val="FBF2E3"/>
+          </a:solidFill>
+          <a:ln/>
+        </p:spPr>
+      </p:sp>
+      <p:sp>
+        <p:nvSpPr>
+          <p:cNvPr id="3" name="Shape 1"/>
+          <p:cNvSpPr/>
+          <p:nvPr/>
+        </p:nvSpPr>
+        <p:spPr>
+          <a:xfrm>
+            <a:off x="6355080" y="0"/>
+            <a:ext cx="45720" cy="5143500"/>
           </a:xfrm>
           <a:prstGeom prst="rect">
             <a:avLst/>
@@ -3417,14 +3313,14 @@
       </p:sp>
       <p:sp>
         <p:nvSpPr>
-          <p:cNvPr id="3" name="Text 1"/>
-          <p:cNvSpPr/>
-          <p:nvPr/>
-        </p:nvSpPr>
-        <p:spPr>
-          <a:xfrm>
-            <a:off x="566928" y="384048"/>
-            <a:ext cx="8010144" cy="237744"/>
+          <p:cNvPr id="4" name="Text 2"/>
+          <p:cNvSpPr/>
+          <p:nvPr/>
+        </p:nvSpPr>
+        <p:spPr>
+          <a:xfrm>
+            <a:off x="6629400" y="1463040"/>
+            <a:ext cx="2194560" cy="1737360"/>
           </a:xfrm>
           <a:prstGeom prst="rect">
             <a:avLst/>
@@ -3436,11 +3332,11 @@
           <a:bodyPr wrap="square" lIns="0" tIns="0" rIns="0" bIns="0" rtlCol="0" anchor="ctr"/>
           <a:lstStyle/>
           <a:p>
-            <a:pPr indent="0" marL="0">
-              <a:buNone/>
-            </a:pPr>
-            <a:r>
-              <a:rPr lang="en-US" sz="1150" b="1" spc="180" kern="0" dirty="0">
+            <a:pPr algn="ctr" indent="0" marL="0">
+              <a:buNone/>
+            </a:pPr>
+            <a:r>
+              <a:rPr lang="en-US" sz="8400" b="1" dirty="0">
                 <a:solidFill>
                   <a:srgbClr val="9A6310"/>
                 </a:solidFill>
@@ -3448,48 +3344,9 @@
                 <a:ea typeface="Arial" pitchFamily="34" charset="-122"/>
                 <a:cs typeface="Arial" pitchFamily="34" charset="-120"/>
               </a:rPr>
-              <a:t>BREAKOUT · 50 MINUTEN</a:t>
-            </a:r>
-            <a:endParaRPr lang="en-US" sz="1150" dirty="0"/>
-          </a:p>
-        </p:txBody>
-      </p:sp>
-      <p:sp>
-        <p:nvSpPr>
-          <p:cNvPr id="4" name="Text 2"/>
-          <p:cNvSpPr/>
-          <p:nvPr/>
-        </p:nvSpPr>
-        <p:spPr>
-          <a:xfrm>
-            <a:off x="566928" y="731520"/>
-            <a:ext cx="8010144" cy="603504"/>
-          </a:xfrm>
-          <a:prstGeom prst="rect">
-            <a:avLst/>
-          </a:prstGeom>
-          <a:noFill/>
-          <a:ln/>
-        </p:spPr>
-        <p:txBody>
-          <a:bodyPr wrap="square" lIns="0" tIns="0" rIns="0" bIns="0" rtlCol="0" anchor="t"/>
-          <a:lstStyle/>
-          <a:p>
-            <a:pPr indent="0" marL="0">
-              <a:buNone/>
-            </a:pPr>
-            <a:r>
-              <a:rPr lang="en-US" sz="2600" b="1" dirty="0">
-                <a:solidFill>
-                  <a:srgbClr val="272E52"/>
-                </a:solidFill>
-                <a:latin typeface="Arial" pitchFamily="34" charset="0"/>
-                <a:ea typeface="Arial" pitchFamily="34" charset="-122"/>
-                <a:cs typeface="Arial" pitchFamily="34" charset="-120"/>
-              </a:rPr>
-              <a:t>Der Auftrag</a:t>
-            </a:r>
-            <a:endParaRPr lang="en-US" sz="2600" dirty="0"/>
+              <a:t>03</a:t>
+            </a:r>
+            <a:endParaRPr lang="en-US" sz="8400" dirty="0"/>
           </a:p>
         </p:txBody>
       </p:sp>
@@ -3501,478 +3358,8 @@
         </p:nvSpPr>
         <p:spPr>
           <a:xfrm>
-            <a:off x="438912" y="1810512"/>
-            <a:ext cx="8266176" cy="292608"/>
-          </a:xfrm>
-          <a:prstGeom prst="rect">
-            <a:avLst/>
-          </a:prstGeom>
-          <a:solidFill>
-            <a:srgbClr val="F5F6FC"/>
-          </a:solidFill>
-          <a:ln/>
-        </p:spPr>
-      </p:sp>
-      <p:sp>
-        <p:nvSpPr>
-          <p:cNvPr id="6" name="Text 4"/>
-          <p:cNvSpPr/>
-          <p:nvPr/>
-        </p:nvSpPr>
-        <p:spPr>
-          <a:xfrm>
-            <a:off x="566928" y="1810512"/>
-            <a:ext cx="1005840" cy="292608"/>
-          </a:xfrm>
-          <a:prstGeom prst="rect">
-            <a:avLst/>
-          </a:prstGeom>
-          <a:noFill/>
-          <a:ln/>
-        </p:spPr>
-        <p:txBody>
-          <a:bodyPr wrap="square" lIns="0" tIns="0" rIns="0" bIns="0" rtlCol="0" anchor="ctr"/>
-          <a:lstStyle/>
-          <a:p>
-            <a:pPr indent="0" marL="0">
-              <a:buNone/>
-            </a:pPr>
-            <a:r>
-              <a:rPr lang="en-US" sz="1150" b="1" dirty="0">
-                <a:solidFill>
-                  <a:srgbClr val="9A6310"/>
-                </a:solidFill>
-                <a:latin typeface="Courier New" pitchFamily="34" charset="0"/>
-                <a:ea typeface="Courier New" pitchFamily="34" charset="-122"/>
-                <a:cs typeface="Courier New" pitchFamily="34" charset="-120"/>
-              </a:rPr>
-              <a:t>Schritt 1–3</a:t>
-            </a:r>
-            <a:endParaRPr lang="en-US" sz="1150" dirty="0"/>
-          </a:p>
-        </p:txBody>
-      </p:sp>
-      <p:sp>
-        <p:nvSpPr>
-          <p:cNvPr id="7" name="Text 5"/>
-          <p:cNvSpPr/>
-          <p:nvPr/>
-        </p:nvSpPr>
-        <p:spPr>
-          <a:xfrm>
-            <a:off x="1572768" y="1810512"/>
-            <a:ext cx="7004304" cy="292608"/>
-          </a:xfrm>
-          <a:prstGeom prst="rect">
-            <a:avLst/>
-          </a:prstGeom>
-          <a:noFill/>
-          <a:ln/>
-        </p:spPr>
-        <p:txBody>
-          <a:bodyPr wrap="square" lIns="0" tIns="0" rIns="0" bIns="0" rtlCol="0" anchor="ctr"/>
-          <a:lstStyle/>
-          <a:p>
-            <a:pPr indent="0" marL="0">
-              <a:buNone/>
-            </a:pPr>
-            <a:r>
-              <a:rPr lang="en-US" sz="1150" dirty="0">
-                <a:solidFill>
-                  <a:srgbClr val="434A63"/>
-                </a:solidFill>
-                <a:latin typeface="Arial" pitchFamily="34" charset="0"/>
-                <a:ea typeface="Arial" pitchFamily="34" charset="-122"/>
-                <a:cs typeface="Arial" pitchFamily="34" charset="-120"/>
-              </a:rPr>
-              <a:t>Multipass prüfen, VM „demo“ starten, in der Übersicht wiederfinden</a:t>
-            </a:r>
-            <a:endParaRPr lang="en-US" sz="1150" dirty="0"/>
-          </a:p>
-        </p:txBody>
-      </p:sp>
-      <p:sp>
-        <p:nvSpPr>
-          <p:cNvPr id="8" name="Text 6"/>
-          <p:cNvSpPr/>
-          <p:nvPr/>
-        </p:nvSpPr>
-        <p:spPr>
-          <a:xfrm>
-            <a:off x="566928" y="2103120"/>
-            <a:ext cx="1005840" cy="292608"/>
-          </a:xfrm>
-          <a:prstGeom prst="rect">
-            <a:avLst/>
-          </a:prstGeom>
-          <a:noFill/>
-          <a:ln/>
-        </p:spPr>
-        <p:txBody>
-          <a:bodyPr wrap="square" lIns="0" tIns="0" rIns="0" bIns="0" rtlCol="0" anchor="ctr"/>
-          <a:lstStyle/>
-          <a:p>
-            <a:pPr indent="0" marL="0">
-              <a:buNone/>
-            </a:pPr>
-            <a:r>
-              <a:rPr lang="en-US" sz="1150" b="1" dirty="0">
-                <a:solidFill>
-                  <a:srgbClr val="9A6310"/>
-                </a:solidFill>
-                <a:latin typeface="Courier New" pitchFamily="34" charset="0"/>
-                <a:ea typeface="Courier New" pitchFamily="34" charset="-122"/>
-                <a:cs typeface="Courier New" pitchFamily="34" charset="-120"/>
-              </a:rPr>
-              <a:t>Schritt 4</a:t>
-            </a:r>
-            <a:endParaRPr lang="en-US" sz="1150" dirty="0"/>
-          </a:p>
-        </p:txBody>
-      </p:sp>
-      <p:sp>
-        <p:nvSpPr>
-          <p:cNvPr id="9" name="Text 7"/>
-          <p:cNvSpPr/>
-          <p:nvPr/>
-        </p:nvSpPr>
-        <p:spPr>
-          <a:xfrm>
-            <a:off x="1572768" y="2103120"/>
-            <a:ext cx="7004304" cy="292608"/>
-          </a:xfrm>
-          <a:prstGeom prst="rect">
-            <a:avLst/>
-          </a:prstGeom>
-          <a:noFill/>
-          <a:ln/>
-        </p:spPr>
-        <p:txBody>
-          <a:bodyPr wrap="square" lIns="0" tIns="0" rIns="0" bIns="0" rtlCol="0" anchor="ctr"/>
-          <a:lstStyle/>
-          <a:p>
-            <a:pPr indent="0" marL="0">
-              <a:buNone/>
-            </a:pPr>
-            <a:r>
-              <a:rPr lang="en-US" sz="1150" dirty="0">
-                <a:solidFill>
-                  <a:srgbClr val="434A63"/>
-                </a:solidFill>
-                <a:latin typeface="Arial" pitchFamily="34" charset="0"/>
-                <a:ea typeface="Arial" pitchFamily="34" charset="-122"/>
-                <a:cs typeface="Arial" pitchFamily="34" charset="-120"/>
-              </a:rPr>
-              <a:t>In die VM wechseln: Wer bin ich, wo bin ich, welche Adresse habe ich?</a:t>
-            </a:r>
-            <a:endParaRPr lang="en-US" sz="1150" dirty="0"/>
-          </a:p>
-        </p:txBody>
-      </p:sp>
-      <p:sp>
-        <p:nvSpPr>
-          <p:cNvPr id="10" name="Shape 8"/>
-          <p:cNvSpPr/>
-          <p:nvPr/>
-        </p:nvSpPr>
-        <p:spPr>
-          <a:xfrm>
-            <a:off x="438912" y="2395728"/>
-            <a:ext cx="8266176" cy="292608"/>
-          </a:xfrm>
-          <a:prstGeom prst="rect">
-            <a:avLst/>
-          </a:prstGeom>
-          <a:solidFill>
-            <a:srgbClr val="F5F6FC"/>
-          </a:solidFill>
-          <a:ln/>
-        </p:spPr>
-      </p:sp>
-      <p:sp>
-        <p:nvSpPr>
-          <p:cNvPr id="11" name="Text 9"/>
-          <p:cNvSpPr/>
-          <p:nvPr/>
-        </p:nvSpPr>
-        <p:spPr>
-          <a:xfrm>
-            <a:off x="566928" y="2395728"/>
-            <a:ext cx="1005840" cy="292608"/>
-          </a:xfrm>
-          <a:prstGeom prst="rect">
-            <a:avLst/>
-          </a:prstGeom>
-          <a:noFill/>
-          <a:ln/>
-        </p:spPr>
-        <p:txBody>
-          <a:bodyPr wrap="square" lIns="0" tIns="0" rIns="0" bIns="0" rtlCol="0" anchor="ctr"/>
-          <a:lstStyle/>
-          <a:p>
-            <a:pPr indent="0" marL="0">
-              <a:buNone/>
-            </a:pPr>
-            <a:r>
-              <a:rPr lang="en-US" sz="1150" b="1" dirty="0">
-                <a:solidFill>
-                  <a:srgbClr val="9A6310"/>
-                </a:solidFill>
-                <a:latin typeface="Courier New" pitchFamily="34" charset="0"/>
-                <a:ea typeface="Courier New" pitchFamily="34" charset="-122"/>
-                <a:cs typeface="Courier New" pitchFamily="34" charset="-120"/>
-              </a:rPr>
-              <a:t>Schritt 5</a:t>
-            </a:r>
-            <a:endParaRPr lang="en-US" sz="1150" dirty="0"/>
-          </a:p>
-        </p:txBody>
-      </p:sp>
-      <p:sp>
-        <p:nvSpPr>
-          <p:cNvPr id="12" name="Text 10"/>
-          <p:cNvSpPr/>
-          <p:nvPr/>
-        </p:nvSpPr>
-        <p:spPr>
-          <a:xfrm>
-            <a:off x="1572768" y="2395728"/>
-            <a:ext cx="7004304" cy="292608"/>
-          </a:xfrm>
-          <a:prstGeom prst="rect">
-            <a:avLst/>
-          </a:prstGeom>
-          <a:noFill/>
-          <a:ln/>
-        </p:spPr>
-        <p:txBody>
-          <a:bodyPr wrap="square" lIns="0" tIns="0" rIns="0" bIns="0" rtlCol="0" anchor="ctr"/>
-          <a:lstStyle/>
-          <a:p>
-            <a:pPr indent="0" marL="0">
-              <a:buNone/>
-            </a:pPr>
-            <a:r>
-              <a:rPr lang="en-US" sz="1150" dirty="0">
-                <a:solidFill>
-                  <a:srgbClr val="434A63"/>
-                </a:solidFill>
-                <a:latin typeface="Arial" pitchFamily="34" charset="0"/>
-                <a:ea typeface="Arial" pitchFamily="34" charset="-122"/>
-                <a:cs typeface="Arial" pitchFamily="34" charset="-120"/>
-              </a:rPr>
-              <a:t>Stoppen, wieder starten – was bleibt erhalten?</a:t>
-            </a:r>
-            <a:endParaRPr lang="en-US" sz="1150" dirty="0"/>
-          </a:p>
-        </p:txBody>
-      </p:sp>
-      <p:sp>
-        <p:nvSpPr>
-          <p:cNvPr id="13" name="Text 11"/>
-          <p:cNvSpPr/>
-          <p:nvPr/>
-        </p:nvSpPr>
-        <p:spPr>
-          <a:xfrm>
-            <a:off x="566928" y="2688336"/>
-            <a:ext cx="1005840" cy="292608"/>
-          </a:xfrm>
-          <a:prstGeom prst="rect">
-            <a:avLst/>
-          </a:prstGeom>
-          <a:noFill/>
-          <a:ln/>
-        </p:spPr>
-        <p:txBody>
-          <a:bodyPr wrap="square" lIns="0" tIns="0" rIns="0" bIns="0" rtlCol="0" anchor="ctr"/>
-          <a:lstStyle/>
-          <a:p>
-            <a:pPr indent="0" marL="0">
-              <a:buNone/>
-            </a:pPr>
-            <a:r>
-              <a:rPr lang="en-US" sz="1150" b="1" dirty="0">
-                <a:solidFill>
-                  <a:srgbClr val="9A6310"/>
-                </a:solidFill>
-                <a:latin typeface="Courier New" pitchFamily="34" charset="0"/>
-                <a:ea typeface="Courier New" pitchFamily="34" charset="-122"/>
-                <a:cs typeface="Courier New" pitchFamily="34" charset="-120"/>
-              </a:rPr>
-              <a:t>Schritt 6</a:t>
-            </a:r>
-            <a:endParaRPr lang="en-US" sz="1150" dirty="0"/>
-          </a:p>
-        </p:txBody>
-      </p:sp>
-      <p:sp>
-        <p:nvSpPr>
-          <p:cNvPr id="14" name="Text 12"/>
-          <p:cNvSpPr/>
-          <p:nvPr/>
-        </p:nvSpPr>
-        <p:spPr>
-          <a:xfrm>
-            <a:off x="1572768" y="2688336"/>
-            <a:ext cx="7004304" cy="292608"/>
-          </a:xfrm>
-          <a:prstGeom prst="rect">
-            <a:avLst/>
-          </a:prstGeom>
-          <a:noFill/>
-          <a:ln/>
-        </p:spPr>
-        <p:txBody>
-          <a:bodyPr wrap="square" lIns="0" tIns="0" rIns="0" bIns="0" rtlCol="0" anchor="ctr"/>
-          <a:lstStyle/>
-          <a:p>
-            <a:pPr indent="0" marL="0">
-              <a:buNone/>
-            </a:pPr>
-            <a:r>
-              <a:rPr lang="en-US" sz="1150" dirty="0">
-                <a:solidFill>
-                  <a:srgbClr val="434A63"/>
-                </a:solidFill>
-                <a:latin typeface="Arial" pitchFamily="34" charset="0"/>
-                <a:ea typeface="Arial" pitchFamily="34" charset="-122"/>
-                <a:cs typeface="Arial" pitchFamily="34" charset="-120"/>
-              </a:rPr>
-              <a:t>Kür: eine größere VM („gross“) mit eigenen Werten</a:t>
-            </a:r>
-            <a:endParaRPr lang="en-US" sz="1150" dirty="0"/>
-          </a:p>
-        </p:txBody>
-      </p:sp>
-      <p:sp>
-        <p:nvSpPr>
-          <p:cNvPr id="15" name="Shape 13"/>
-          <p:cNvSpPr/>
-          <p:nvPr/>
-        </p:nvSpPr>
-        <p:spPr>
-          <a:xfrm>
-            <a:off x="438912" y="2980944"/>
-            <a:ext cx="8266176" cy="292608"/>
-          </a:xfrm>
-          <a:prstGeom prst="rect">
-            <a:avLst/>
-          </a:prstGeom>
-          <a:solidFill>
-            <a:srgbClr val="F5F6FC"/>
-          </a:solidFill>
-          <a:ln/>
-        </p:spPr>
-      </p:sp>
-      <p:sp>
-        <p:nvSpPr>
-          <p:cNvPr id="16" name="Text 14"/>
-          <p:cNvSpPr/>
-          <p:nvPr/>
-        </p:nvSpPr>
-        <p:spPr>
-          <a:xfrm>
-            <a:off x="566928" y="2980944"/>
-            <a:ext cx="1005840" cy="292608"/>
-          </a:xfrm>
-          <a:prstGeom prst="rect">
-            <a:avLst/>
-          </a:prstGeom>
-          <a:noFill/>
-          <a:ln/>
-        </p:spPr>
-        <p:txBody>
-          <a:bodyPr wrap="square" lIns="0" tIns="0" rIns="0" bIns="0" rtlCol="0" anchor="ctr"/>
-          <a:lstStyle/>
-          <a:p>
-            <a:pPr indent="0" marL="0">
-              <a:buNone/>
-            </a:pPr>
-            <a:r>
-              <a:rPr lang="en-US" sz="1150" b="1" dirty="0">
-                <a:solidFill>
-                  <a:srgbClr val="9A6310"/>
-                </a:solidFill>
-                <a:latin typeface="Courier New" pitchFamily="34" charset="0"/>
-                <a:ea typeface="Courier New" pitchFamily="34" charset="-122"/>
-                <a:cs typeface="Courier New" pitchFamily="34" charset="-120"/>
-              </a:rPr>
-              <a:t>Schritt 7</a:t>
-            </a:r>
-            <a:endParaRPr lang="en-US" sz="1150" dirty="0"/>
-          </a:p>
-        </p:txBody>
-      </p:sp>
-      <p:sp>
-        <p:nvSpPr>
-          <p:cNvPr id="17" name="Text 15"/>
-          <p:cNvSpPr/>
-          <p:nvPr/>
-        </p:nvSpPr>
-        <p:spPr>
-          <a:xfrm>
-            <a:off x="1572768" y="2980944"/>
-            <a:ext cx="7004304" cy="292608"/>
-          </a:xfrm>
-          <a:prstGeom prst="rect">
-            <a:avLst/>
-          </a:prstGeom>
-          <a:noFill/>
-          <a:ln/>
-        </p:spPr>
-        <p:txBody>
-          <a:bodyPr wrap="square" lIns="0" tIns="0" rIns="0" bIns="0" rtlCol="0" anchor="ctr"/>
-          <a:lstStyle/>
-          <a:p>
-            <a:pPr indent="0" marL="0">
-              <a:buNone/>
-            </a:pPr>
-            <a:r>
-              <a:rPr lang="en-US" sz="1150" dirty="0">
-                <a:solidFill>
-                  <a:srgbClr val="434A63"/>
-                </a:solidFill>
-                <a:latin typeface="Arial" pitchFamily="34" charset="0"/>
-                <a:ea typeface="Arial" pitchFamily="34" charset="-122"/>
-                <a:cs typeface="Arial" pitchFamily="34" charset="-120"/>
-              </a:rPr>
-              <a:t>Aufräumen – aber nur die Kür-VM! „demo“ bleibt für Mittwoch</a:t>
-            </a:r>
-            <a:endParaRPr lang="en-US" sz="1150" dirty="0"/>
-          </a:p>
-        </p:txBody>
-      </p:sp>
-      <p:sp>
-        <p:nvSpPr>
-          <p:cNvPr id="18" name="Shape 16"/>
-          <p:cNvSpPr/>
-          <p:nvPr/>
-        </p:nvSpPr>
-        <p:spPr>
-          <a:xfrm>
-            <a:off x="566928" y="3621024"/>
-            <a:ext cx="8010144" cy="841248"/>
-          </a:xfrm>
-          <a:prstGeom prst="rect">
-            <a:avLst/>
-          </a:prstGeom>
-          <a:solidFill>
-            <a:srgbClr val="EEF0FB"/>
-          </a:solidFill>
-          <a:ln/>
-        </p:spPr>
-      </p:sp>
-      <p:sp>
-        <p:nvSpPr>
-          <p:cNvPr id="19" name="Shape 17"/>
-          <p:cNvSpPr/>
-          <p:nvPr/>
-        </p:nvSpPr>
-        <p:spPr>
-          <a:xfrm>
-            <a:off x="566928" y="3621024"/>
-            <a:ext cx="41148" cy="841248"/>
+            <a:off x="566928" y="1883664"/>
+            <a:ext cx="475488" cy="50292"/>
           </a:xfrm>
           <a:prstGeom prst="rect">
             <a:avLst/>
@@ -3985,14 +3372,14 @@
       </p:sp>
       <p:sp>
         <p:nvSpPr>
-          <p:cNvPr id="20" name="Text 18"/>
-          <p:cNvSpPr/>
-          <p:nvPr/>
-        </p:nvSpPr>
-        <p:spPr>
-          <a:xfrm>
-            <a:off x="804672" y="3767328"/>
-            <a:ext cx="7607808" cy="242062"/>
+          <p:cNvPr id="6" name="Text 4"/>
+          <p:cNvSpPr/>
+          <p:nvPr/>
+        </p:nvSpPr>
+        <p:spPr>
+          <a:xfrm>
+            <a:off x="566928" y="2084832"/>
+            <a:ext cx="5394960" cy="868680"/>
           </a:xfrm>
           <a:prstGeom prst="rect">
             <a:avLst/>
@@ -4008,7 +3395,7 @@
               <a:buNone/>
             </a:pPr>
             <a:r>
-              <a:rPr lang="en-US" sz="1300" b="1" dirty="0">
+              <a:rPr lang="en-US" sz="3000" b="1" dirty="0">
                 <a:solidFill>
                   <a:srgbClr val="272E52"/>
                 </a:solidFill>
@@ -4016,22 +3403,22 @@
                 <a:ea typeface="Arial" pitchFamily="34" charset="-122"/>
                 <a:cs typeface="Arial" pitchFamily="34" charset="-120"/>
               </a:rPr>
-              <a:t>Jetzt öffnen – beides braucht ihr gleich im Raum</a:t>
-            </a:r>
-            <a:endParaRPr lang="en-US" sz="1300" dirty="0"/>
-          </a:p>
-        </p:txBody>
-      </p:sp>
-      <p:sp>
-        <p:nvSpPr>
-          <p:cNvPr id="21" name="Text 19"/>
-          <p:cNvSpPr/>
-          <p:nvPr/>
-        </p:nvSpPr>
-        <p:spPr>
-          <a:xfrm>
-            <a:off x="804672" y="4055110"/>
-            <a:ext cx="7607808" cy="288290"/>
+              <a:t>VM-Detektiv</a:t>
+            </a:r>
+            <a:endParaRPr lang="en-US" sz="3000" dirty="0"/>
+          </a:p>
+        </p:txBody>
+      </p:sp>
+      <p:sp>
+        <p:nvSpPr>
+          <p:cNvPr id="7" name="Text 5"/>
+          <p:cNvSpPr/>
+          <p:nvPr/>
+        </p:nvSpPr>
+        <p:spPr>
+          <a:xfrm>
+            <a:off x="566928" y="3017520"/>
+            <a:ext cx="5394960" cy="548640"/>
           </a:xfrm>
           <a:prstGeom prst="rect">
             <a:avLst/>
@@ -4044,101 +3431,10 @@
           <a:lstStyle/>
           <a:p>
             <a:pPr indent="0" marL="0">
-              <a:lnSpc>
-                <a:spcPct val="92000"/>
-              </a:lnSpc>
-              <a:spcAft>
-                <a:spcPts val="500"/>
-              </a:spcAft>
-              <a:buNone/>
-            </a:pPr>
-            <a:r>
-              <a:rPr lang="en-US" sz="1050" dirty="0">
-                <a:solidFill>
-                  <a:srgbClr val="434A63"/>
-                </a:solidFill>
-                <a:latin typeface="Arial" pitchFamily="34" charset="0"/>
-                <a:ea typeface="Arial" pitchFamily="34" charset="-122"/>
-                <a:cs typeface="Arial" pitchFamily="34" charset="-120"/>
-              </a:rPr>
-              <a:t>Anleitung mit allen Befehlen:  jacobmenge.github.io/kurs-unterlagen/virtualisierung/praxis-multipass/</a:t>
-            </a:r>
-            <a:endParaRPr lang="en-US" sz="1050" dirty="0"/>
-          </a:p>
-          <a:p>
-            <a:pPr indent="0" marL="0">
-              <a:lnSpc>
-                <a:spcPct val="92000"/>
-              </a:lnSpc>
-              <a:spcAft>
-                <a:spcPts val="500"/>
-              </a:spcAft>
-              <a:buNone/>
-            </a:pPr>
-            <a:r>
-              <a:rPr lang="en-US" sz="1050" dirty="0">
-                <a:solidFill>
-                  <a:srgbClr val="434A63"/>
-                </a:solidFill>
-                <a:latin typeface="Arial" pitchFamily="34" charset="0"/>
-                <a:ea typeface="Arial" pitchFamily="34" charset="-122"/>
-                <a:cs typeface="Arial" pitchFamily="34" charset="-120"/>
-              </a:rPr>
-              <a:t>Ergebnisse eintragen:  &lt;Link zum Ergebnis-Dokument hier eintragen&gt;</a:t>
-            </a:r>
-            <a:endParaRPr lang="en-US" sz="1050" dirty="0"/>
-          </a:p>
-        </p:txBody>
-      </p:sp>
-      <p:sp>
-        <p:nvSpPr>
-          <p:cNvPr id="22" name="Shape 20"/>
-          <p:cNvSpPr/>
-          <p:nvPr/>
-        </p:nvSpPr>
-        <p:spPr>
-          <a:xfrm>
-            <a:off x="566928" y="4631436"/>
-            <a:ext cx="8010144" cy="0"/>
-          </a:xfrm>
-          <a:prstGeom prst="line">
-            <a:avLst/>
-          </a:prstGeom>
-          <a:noFill/>
-          <a:ln w="9525">
-            <a:solidFill>
-              <a:srgbClr val="DFE3F0"/>
-            </a:solidFill>
-            <a:prstDash val="solid"/>
-          </a:ln>
-        </p:spPr>
-      </p:sp>
-      <p:sp>
-        <p:nvSpPr>
-          <p:cNvPr id="23" name="Text 21"/>
-          <p:cNvSpPr/>
-          <p:nvPr/>
-        </p:nvSpPr>
-        <p:spPr>
-          <a:xfrm>
-            <a:off x="566928" y="4722876"/>
-            <a:ext cx="5029200" cy="237744"/>
-          </a:xfrm>
-          <a:prstGeom prst="rect">
-            <a:avLst/>
-          </a:prstGeom>
-          <a:noFill/>
-          <a:ln/>
-        </p:spPr>
-        <p:txBody>
-          <a:bodyPr wrap="square" lIns="0" tIns="0" rIns="0" bIns="0" rtlCol="0" anchor="ctr"/>
-          <a:lstStyle/>
-          <a:p>
-            <a:pPr indent="0" marL="0">
-              <a:buNone/>
-            </a:pPr>
-            <a:r>
-              <a:rPr lang="en-US" sz="1050" spc="30" kern="0" dirty="0">
+              <a:buNone/>
+            </a:pPr>
+            <a:r>
+              <a:rPr lang="en-US" sz="1350" dirty="0">
                 <a:solidFill>
                   <a:srgbClr val="5C6377"/>
                 </a:solidFill>
@@ -4146,48 +3442,9 @@
                 <a:ea typeface="Arial" pitchFamily="34" charset="-122"/>
                 <a:cs typeface="Arial" pitchFamily="34" charset="-120"/>
               </a:rPr>
-              <a:t>Breakout</a:t>
-            </a:r>
-            <a:endParaRPr lang="en-US" sz="1050" dirty="0"/>
-          </a:p>
-        </p:txBody>
-      </p:sp>
-      <p:sp>
-        <p:nvSpPr>
-          <p:cNvPr id="24" name="Text 22"/>
-          <p:cNvSpPr/>
-          <p:nvPr/>
-        </p:nvSpPr>
-        <p:spPr>
-          <a:xfrm>
-            <a:off x="8028432" y="4722876"/>
-            <a:ext cx="548640" cy="237744"/>
-          </a:xfrm>
-          <a:prstGeom prst="rect">
-            <a:avLst/>
-          </a:prstGeom>
-          <a:noFill/>
-          <a:ln/>
-        </p:spPr>
-        <p:txBody>
-          <a:bodyPr wrap="square" lIns="0" tIns="0" rIns="0" bIns="0" rtlCol="0" anchor="ctr"/>
-          <a:lstStyle/>
-          <a:p>
-            <a:pPr algn="r" indent="0" marL="0">
-              <a:buNone/>
-            </a:pPr>
-            <a:r>
-              <a:rPr lang="en-US" sz="1050" dirty="0">
-                <a:solidFill>
-                  <a:srgbClr val="5C6377"/>
-                </a:solidFill>
-                <a:latin typeface="Arial" pitchFamily="34" charset="0"/>
-                <a:ea typeface="Arial" pitchFamily="34" charset="-122"/>
-                <a:cs typeface="Arial" pitchFamily="34" charset="-120"/>
-              </a:rPr>
-              <a:t>8/12</a:t>
-            </a:r>
-            <a:endParaRPr lang="en-US" sz="1050" dirty="0"/>
+              <a:t>50 Minuten in Gruppen – auf einer echten Cloud-VM</a:t>
+            </a:r>
+            <a:endParaRPr lang="en-US" sz="1350" dirty="0"/>
           </a:p>
         </p:txBody>
       </p:sp>
@@ -4276,7 +3533,7 @@
                 <a:ea typeface="Arial" pitchFamily="34" charset="-122"/>
                 <a:cs typeface="Arial" pitchFamily="34" charset="-120"/>
               </a:rPr>
-              <a:t>SPIELREGELN</a:t>
+              <a:t>BREAKOUT · 50 MINUTEN</a:t>
             </a:r>
             <a:endParaRPr lang="en-US" sz="1150" dirty="0"/>
           </a:p>
@@ -4315,7 +3572,7 @@
                 <a:ea typeface="Arial" pitchFamily="34" charset="-122"/>
                 <a:cs typeface="Arial" pitchFamily="34" charset="-120"/>
               </a:rPr>
-              <a:t>So arbeitet ihr</a:t>
+              <a:t>Der Auftrag</a:t>
             </a:r>
             <a:endParaRPr lang="en-US" sz="2600" dirty="0"/>
           </a:p>
@@ -4323,14 +3580,406 @@
       </p:sp>
       <p:sp>
         <p:nvSpPr>
-          <p:cNvPr id="5" name="Text 3"/>
-          <p:cNvSpPr/>
-          <p:nvPr/>
-        </p:nvSpPr>
-        <p:spPr>
-          <a:xfrm>
-            <a:off x="566928" y="1700784"/>
-            <a:ext cx="8010144" cy="2011680"/>
+          <p:cNvPr id="5" name="Shape 3"/>
+          <p:cNvSpPr/>
+          <p:nvPr/>
+        </p:nvSpPr>
+        <p:spPr>
+          <a:xfrm>
+            <a:off x="438912" y="1828800"/>
+            <a:ext cx="8266176" cy="365760"/>
+          </a:xfrm>
+          <a:prstGeom prst="rect">
+            <a:avLst/>
+          </a:prstGeom>
+          <a:solidFill>
+            <a:srgbClr val="F5F6FC"/>
+          </a:solidFill>
+          <a:ln/>
+        </p:spPr>
+      </p:sp>
+      <p:sp>
+        <p:nvSpPr>
+          <p:cNvPr id="6" name="Text 4"/>
+          <p:cNvSpPr/>
+          <p:nvPr/>
+        </p:nvSpPr>
+        <p:spPr>
+          <a:xfrm>
+            <a:off x="566928" y="1828800"/>
+            <a:ext cx="914400" cy="365760"/>
+          </a:xfrm>
+          <a:prstGeom prst="rect">
+            <a:avLst/>
+          </a:prstGeom>
+          <a:noFill/>
+          <a:ln/>
+        </p:spPr>
+        <p:txBody>
+          <a:bodyPr wrap="square" lIns="0" tIns="0" rIns="0" bIns="0" rtlCol="0" anchor="ctr"/>
+          <a:lstStyle/>
+          <a:p>
+            <a:pPr indent="0" marL="0">
+              <a:buNone/>
+            </a:pPr>
+            <a:r>
+              <a:rPr lang="en-US" sz="1150" b="1" dirty="0">
+                <a:solidFill>
+                  <a:srgbClr val="9A6310"/>
+                </a:solidFill>
+                <a:latin typeface="Courier New" pitchFamily="34" charset="0"/>
+                <a:ea typeface="Courier New" pitchFamily="34" charset="-122"/>
+                <a:cs typeface="Courier New" pitchFamily="34" charset="-120"/>
+              </a:rPr>
+              <a:t>Start</a:t>
+            </a:r>
+            <a:endParaRPr lang="en-US" sz="1150" dirty="0"/>
+          </a:p>
+        </p:txBody>
+      </p:sp>
+      <p:sp>
+        <p:nvSpPr>
+          <p:cNvPr id="7" name="Text 5"/>
+          <p:cNvSpPr/>
+          <p:nvPr/>
+        </p:nvSpPr>
+        <p:spPr>
+          <a:xfrm>
+            <a:off x="1481328" y="1828800"/>
+            <a:ext cx="7095744" cy="365760"/>
+          </a:xfrm>
+          <a:prstGeom prst="rect">
+            <a:avLst/>
+          </a:prstGeom>
+          <a:noFill/>
+          <a:ln/>
+        </p:spPr>
+        <p:txBody>
+          <a:bodyPr wrap="square" lIns="0" tIns="0" rIns="0" bIns="0" rtlCol="0" anchor="ctr"/>
+          <a:lstStyle/>
+          <a:p>
+            <a:pPr indent="0" marL="0">
+              <a:buNone/>
+            </a:pPr>
+            <a:r>
+              <a:rPr lang="en-US" sz="1150" dirty="0">
+                <a:solidFill>
+                  <a:srgbClr val="434A63"/>
+                </a:solidFill>
+                <a:latin typeface="Arial" pitchFamily="34" charset="0"/>
+                <a:ea typeface="Arial" pitchFamily="34" charset="-122"/>
+                <a:cs typeface="Arial" pitchFamily="34" charset="-120"/>
+              </a:rPr>
+              <a:t>Pluralsight → Cloud-Sandbox: einen Linux-Server starten, per Terminal verbinden</a:t>
+            </a:r>
+            <a:endParaRPr lang="en-US" sz="1150" dirty="0"/>
+          </a:p>
+        </p:txBody>
+      </p:sp>
+      <p:sp>
+        <p:nvSpPr>
+          <p:cNvPr id="8" name="Text 6"/>
+          <p:cNvSpPr/>
+          <p:nvPr/>
+        </p:nvSpPr>
+        <p:spPr>
+          <a:xfrm>
+            <a:off x="566928" y="2194560"/>
+            <a:ext cx="914400" cy="365760"/>
+          </a:xfrm>
+          <a:prstGeom prst="rect">
+            <a:avLst/>
+          </a:prstGeom>
+          <a:noFill/>
+          <a:ln/>
+        </p:spPr>
+        <p:txBody>
+          <a:bodyPr wrap="square" lIns="0" tIns="0" rIns="0" bIns="0" rtlCol="0" anchor="ctr"/>
+          <a:lstStyle/>
+          <a:p>
+            <a:pPr indent="0" marL="0">
+              <a:buNone/>
+            </a:pPr>
+            <a:r>
+              <a:rPr lang="en-US" sz="1150" b="1" dirty="0">
+                <a:solidFill>
+                  <a:srgbClr val="9A6310"/>
+                </a:solidFill>
+                <a:latin typeface="Courier New" pitchFamily="34" charset="0"/>
+                <a:ea typeface="Courier New" pitchFamily="34" charset="-122"/>
+                <a:cs typeface="Courier New" pitchFamily="34" charset="-120"/>
+              </a:rPr>
+              <a:t>Teil A</a:t>
+            </a:r>
+            <a:endParaRPr lang="en-US" sz="1150" dirty="0"/>
+          </a:p>
+        </p:txBody>
+      </p:sp>
+      <p:sp>
+        <p:nvSpPr>
+          <p:cNvPr id="9" name="Text 7"/>
+          <p:cNvSpPr/>
+          <p:nvPr/>
+        </p:nvSpPr>
+        <p:spPr>
+          <a:xfrm>
+            <a:off x="1481328" y="2194560"/>
+            <a:ext cx="7095744" cy="365760"/>
+          </a:xfrm>
+          <a:prstGeom prst="rect">
+            <a:avLst/>
+          </a:prstGeom>
+          <a:noFill/>
+          <a:ln/>
+        </p:spPr>
+        <p:txBody>
+          <a:bodyPr wrap="square" lIns="0" tIns="0" rIns="0" bIns="0" rtlCol="0" anchor="ctr"/>
+          <a:lstStyle/>
+          <a:p>
+            <a:pPr indent="0" marL="0">
+              <a:buNone/>
+            </a:pPr>
+            <a:r>
+              <a:rPr lang="en-US" sz="1150" dirty="0">
+                <a:solidFill>
+                  <a:srgbClr val="434A63"/>
+                </a:solidFill>
+                <a:latin typeface="Arial" pitchFamily="34" charset="0"/>
+                <a:ea typeface="Arial" pitchFamily="34" charset="-122"/>
+                <a:cs typeface="Arial" pitchFamily="34" charset="-120"/>
+              </a:rPr>
+              <a:t>Netz-Detektiv: Adresse, Netz, Gateway ermitteln – privates vs. öffentliches Gesicht der VM</a:t>
+            </a:r>
+            <a:endParaRPr lang="en-US" sz="1150" dirty="0"/>
+          </a:p>
+        </p:txBody>
+      </p:sp>
+      <p:sp>
+        <p:nvSpPr>
+          <p:cNvPr id="10" name="Shape 8"/>
+          <p:cNvSpPr/>
+          <p:nvPr/>
+        </p:nvSpPr>
+        <p:spPr>
+          <a:xfrm>
+            <a:off x="438912" y="2560320"/>
+            <a:ext cx="8266176" cy="365760"/>
+          </a:xfrm>
+          <a:prstGeom prst="rect">
+            <a:avLst/>
+          </a:prstGeom>
+          <a:solidFill>
+            <a:srgbClr val="F5F6FC"/>
+          </a:solidFill>
+          <a:ln/>
+        </p:spPr>
+      </p:sp>
+      <p:sp>
+        <p:nvSpPr>
+          <p:cNvPr id="11" name="Text 9"/>
+          <p:cNvSpPr/>
+          <p:nvPr/>
+        </p:nvSpPr>
+        <p:spPr>
+          <a:xfrm>
+            <a:off x="566928" y="2560320"/>
+            <a:ext cx="914400" cy="365760"/>
+          </a:xfrm>
+          <a:prstGeom prst="rect">
+            <a:avLst/>
+          </a:prstGeom>
+          <a:noFill/>
+          <a:ln/>
+        </p:spPr>
+        <p:txBody>
+          <a:bodyPr wrap="square" lIns="0" tIns="0" rIns="0" bIns="0" rtlCol="0" anchor="ctr"/>
+          <a:lstStyle/>
+          <a:p>
+            <a:pPr indent="0" marL="0">
+              <a:buNone/>
+            </a:pPr>
+            <a:r>
+              <a:rPr lang="en-US" sz="1150" b="1" dirty="0">
+                <a:solidFill>
+                  <a:srgbClr val="9A6310"/>
+                </a:solidFill>
+                <a:latin typeface="Courier New" pitchFamily="34" charset="0"/>
+                <a:ea typeface="Courier New" pitchFamily="34" charset="-122"/>
+                <a:cs typeface="Courier New" pitchFamily="34" charset="-120"/>
+              </a:rPr>
+              <a:t>Teil B</a:t>
+            </a:r>
+            <a:endParaRPr lang="en-US" sz="1150" dirty="0"/>
+          </a:p>
+        </p:txBody>
+      </p:sp>
+      <p:sp>
+        <p:nvSpPr>
+          <p:cNvPr id="12" name="Text 10"/>
+          <p:cNvSpPr/>
+          <p:nvPr/>
+        </p:nvSpPr>
+        <p:spPr>
+          <a:xfrm>
+            <a:off x="1481328" y="2560320"/>
+            <a:ext cx="7095744" cy="365760"/>
+          </a:xfrm>
+          <a:prstGeom prst="rect">
+            <a:avLst/>
+          </a:prstGeom>
+          <a:noFill/>
+          <a:ln/>
+        </p:spPr>
+        <p:txBody>
+          <a:bodyPr wrap="square" lIns="0" tIns="0" rIns="0" bIns="0" rtlCol="0" anchor="ctr"/>
+          <a:lstStyle/>
+          <a:p>
+            <a:pPr indent="0" marL="0">
+              <a:buNone/>
+            </a:pPr>
+            <a:r>
+              <a:rPr lang="en-US" sz="1150" dirty="0">
+                <a:solidFill>
+                  <a:srgbClr val="434A63"/>
+                </a:solidFill>
+                <a:latin typeface="Arial" pitchFamily="34" charset="0"/>
+                <a:ea typeface="Arial" pitchFamily="34" charset="-122"/>
+                <a:cs typeface="Arial" pitchFamily="34" charset="-120"/>
+              </a:rPr>
+              <a:t>Einordnung: Auf wessen Hardware läuft eure VM – und welcher Hypervisor-Typ ist das?</a:t>
+            </a:r>
+            <a:endParaRPr lang="en-US" sz="1150" dirty="0"/>
+          </a:p>
+        </p:txBody>
+      </p:sp>
+      <p:sp>
+        <p:nvSpPr>
+          <p:cNvPr id="13" name="Text 11"/>
+          <p:cNvSpPr/>
+          <p:nvPr/>
+        </p:nvSpPr>
+        <p:spPr>
+          <a:xfrm>
+            <a:off x="566928" y="2926080"/>
+            <a:ext cx="914400" cy="365760"/>
+          </a:xfrm>
+          <a:prstGeom prst="rect">
+            <a:avLst/>
+          </a:prstGeom>
+          <a:noFill/>
+          <a:ln/>
+        </p:spPr>
+        <p:txBody>
+          <a:bodyPr wrap="square" lIns="0" tIns="0" rIns="0" bIns="0" rtlCol="0" anchor="ctr"/>
+          <a:lstStyle/>
+          <a:p>
+            <a:pPr indent="0" marL="0">
+              <a:buNone/>
+            </a:pPr>
+            <a:r>
+              <a:rPr lang="en-US" sz="1150" b="1" dirty="0">
+                <a:solidFill>
+                  <a:srgbClr val="9A6310"/>
+                </a:solidFill>
+                <a:latin typeface="Courier New" pitchFamily="34" charset="0"/>
+                <a:ea typeface="Courier New" pitchFamily="34" charset="-122"/>
+                <a:cs typeface="Courier New" pitchFamily="34" charset="-120"/>
+              </a:rPr>
+              <a:t>Notieren</a:t>
+            </a:r>
+            <a:endParaRPr lang="en-US" sz="1150" dirty="0"/>
+          </a:p>
+        </p:txBody>
+      </p:sp>
+      <p:sp>
+        <p:nvSpPr>
+          <p:cNvPr id="14" name="Text 12"/>
+          <p:cNvSpPr/>
+          <p:nvPr/>
+        </p:nvSpPr>
+        <p:spPr>
+          <a:xfrm>
+            <a:off x="1481328" y="2926080"/>
+            <a:ext cx="7095744" cy="365760"/>
+          </a:xfrm>
+          <a:prstGeom prst="rect">
+            <a:avLst/>
+          </a:prstGeom>
+          <a:noFill/>
+          <a:ln/>
+        </p:spPr>
+        <p:txBody>
+          <a:bodyPr wrap="square" lIns="0" tIns="0" rIns="0" bIns="0" rtlCol="0" anchor="ctr"/>
+          <a:lstStyle/>
+          <a:p>
+            <a:pPr indent="0" marL="0">
+              <a:buNone/>
+            </a:pPr>
+            <a:r>
+              <a:rPr lang="en-US" sz="1150" dirty="0">
+                <a:solidFill>
+                  <a:srgbClr val="434A63"/>
+                </a:solidFill>
+                <a:latin typeface="Arial" pitchFamily="34" charset="0"/>
+                <a:ea typeface="Arial" pitchFamily="34" charset="-122"/>
+                <a:cs typeface="Arial" pitchFamily="34" charset="-120"/>
+              </a:rPr>
+              <a:t>Die drei Netz-Antworten und euren Einordnungs-Satz</a:t>
+            </a:r>
+            <a:endParaRPr lang="en-US" sz="1150" dirty="0"/>
+          </a:p>
+        </p:txBody>
+      </p:sp>
+      <p:sp>
+        <p:nvSpPr>
+          <p:cNvPr id="15" name="Shape 13"/>
+          <p:cNvSpPr/>
+          <p:nvPr/>
+        </p:nvSpPr>
+        <p:spPr>
+          <a:xfrm>
+            <a:off x="566928" y="3511296"/>
+            <a:ext cx="8010144" cy="969264"/>
+          </a:xfrm>
+          <a:prstGeom prst="rect">
+            <a:avLst/>
+          </a:prstGeom>
+          <a:solidFill>
+            <a:srgbClr val="EEF0FB"/>
+          </a:solidFill>
+          <a:ln/>
+        </p:spPr>
+      </p:sp>
+      <p:sp>
+        <p:nvSpPr>
+          <p:cNvPr id="16" name="Shape 14"/>
+          <p:cNvSpPr/>
+          <p:nvPr/>
+        </p:nvSpPr>
+        <p:spPr>
+          <a:xfrm>
+            <a:off x="566928" y="3511296"/>
+            <a:ext cx="41148" cy="969264"/>
+          </a:xfrm>
+          <a:prstGeom prst="rect">
+            <a:avLst/>
+          </a:prstGeom>
+          <a:solidFill>
+            <a:srgbClr val="9A6310"/>
+          </a:solidFill>
+          <a:ln/>
+        </p:spPr>
+      </p:sp>
+      <p:sp>
+        <p:nvSpPr>
+          <p:cNvPr id="17" name="Text 15"/>
+          <p:cNvSpPr/>
+          <p:nvPr/>
+        </p:nvSpPr>
+        <p:spPr>
+          <a:xfrm>
+            <a:off x="804672" y="3657600"/>
+            <a:ext cx="7607808" cy="242062"/>
           </a:xfrm>
           <a:prstGeom prst="rect">
             <a:avLst/>
@@ -4343,33 +3992,55 @@
           <a:lstStyle/>
           <a:p>
             <a:pPr indent="0" marL="0">
-              <a:lnSpc>
-                <a:spcPct val="92000"/>
-              </a:lnSpc>
-              <a:buNone/>
-            </a:pPr>
-            <a:r>
-              <a:rPr lang="en-US" sz="1250" b="1" dirty="0">
-                <a:solidFill>
-                  <a:srgbClr val="9A6310"/>
-                </a:solidFill>
-                <a:latin typeface="Arial" pitchFamily="34" charset="0"/>
-                <a:ea typeface="Arial" pitchFamily="34" charset="-122"/>
-                <a:cs typeface="Arial" pitchFamily="34" charset="-120"/>
-              </a:rPr>
-              <a:t>▸   </a:t>
-            </a:r>
+              <a:buNone/>
+            </a:pPr>
+            <a:r>
+              <a:rPr lang="en-US" sz="1300" b="1" dirty="0">
+                <a:solidFill>
+                  <a:srgbClr val="272E52"/>
+                </a:solidFill>
+                <a:latin typeface="Arial" pitchFamily="34" charset="0"/>
+                <a:ea typeface="Arial" pitchFamily="34" charset="-122"/>
+                <a:cs typeface="Arial" pitchFamily="34" charset="-120"/>
+              </a:rPr>
+              <a:t>Jetzt öffnen – beides braucht ihr gleich im Raum</a:t>
+            </a:r>
+            <a:endParaRPr lang="en-US" sz="1300" dirty="0"/>
+          </a:p>
+        </p:txBody>
+      </p:sp>
+      <p:sp>
+        <p:nvSpPr>
+          <p:cNvPr id="18" name="Text 16"/>
+          <p:cNvSpPr/>
+          <p:nvPr/>
+        </p:nvSpPr>
+        <p:spPr>
+          <a:xfrm>
+            <a:off x="804672" y="3945382"/>
+            <a:ext cx="7607808" cy="416306"/>
+          </a:xfrm>
+          <a:prstGeom prst="rect">
+            <a:avLst/>
+          </a:prstGeom>
+          <a:noFill/>
+          <a:ln/>
+        </p:spPr>
+        <p:txBody>
+          <a:bodyPr wrap="square" lIns="0" tIns="0" rIns="0" bIns="0" rtlCol="0" anchor="t"/>
+          <a:lstStyle/>
+          <a:p>
             <a:pPr indent="0" marL="0">
               <a:lnSpc>
                 <a:spcPct val="92000"/>
               </a:lnSpc>
               <a:spcAft>
-                <a:spcPts val="900"/>
+                <a:spcPts val="500"/>
               </a:spcAft>
               <a:buNone/>
             </a:pPr>
             <a:r>
-              <a:rPr lang="en-US" sz="1250" dirty="0">
+              <a:rPr lang="en-US" sz="1050" dirty="0">
                 <a:solidFill>
                   <a:srgbClr val="434A63"/>
                 </a:solidFill>
@@ -4377,39 +4048,22 @@
                 <a:ea typeface="Arial" pitchFamily="34" charset="-122"/>
                 <a:cs typeface="Arial" pitchFamily="34" charset="-120"/>
               </a:rPr>
-              <a:t>Gleiche Gruppen wie zuletzt. Eine Person teilt den Bildschirm – alle tippen mit.</a:t>
-            </a:r>
-            <a:endParaRPr lang="en-US" sz="1250" dirty="0"/>
-          </a:p>
-          <a:p>
-            <a:pPr indent="0" marL="0">
-              <a:lnSpc>
-                <a:spcPct val="92000"/>
-              </a:lnSpc>
-              <a:buNone/>
-            </a:pPr>
-            <a:r>
-              <a:rPr lang="en-US" sz="1250" b="1" dirty="0">
-                <a:solidFill>
-                  <a:srgbClr val="9A6310"/>
-                </a:solidFill>
-                <a:latin typeface="Arial" pitchFamily="34" charset="0"/>
-                <a:ea typeface="Arial" pitchFamily="34" charset="-122"/>
-                <a:cs typeface="Arial" pitchFamily="34" charset="-120"/>
-              </a:rPr>
-              <a:t>▸   </a:t>
-            </a:r>
+              <a:t>Anleitung mit allen Befehlen:  jacobmenge.github.io/kurs-unterlagen/virtualisierung/praxis-vm-experimente/</a:t>
+            </a:r>
+            <a:endParaRPr lang="en-US" sz="1050" dirty="0"/>
+          </a:p>
+          <a:p>
             <a:pPr indent="0" marL="0">
               <a:lnSpc>
                 <a:spcPct val="92000"/>
               </a:lnSpc>
               <a:spcAft>
-                <a:spcPts val="900"/>
+                <a:spcPts val="500"/>
               </a:spcAft>
               <a:buNone/>
             </a:pPr>
             <a:r>
-              <a:rPr lang="en-US" sz="1250" dirty="0">
+              <a:rPr lang="en-US" sz="1050" dirty="0">
                 <a:solidFill>
                   <a:srgbClr val="434A63"/>
                 </a:solidFill>
@@ -4417,256 +4071,15 @@
                 <a:ea typeface="Arial" pitchFamily="34" charset="-122"/>
                 <a:cs typeface="Arial" pitchFamily="34" charset="-120"/>
               </a:rPr>
-              <a:t>Die Anleitung zeigt jeden Befehl mit erwarteter Ausgabe – vergleicht, was bei euch anders ist.</a:t>
-            </a:r>
-            <a:endParaRPr lang="en-US" sz="1250" dirty="0"/>
-          </a:p>
-          <a:p>
-            <a:pPr indent="0" marL="0">
-              <a:lnSpc>
-                <a:spcPct val="92000"/>
-              </a:lnSpc>
-              <a:buNone/>
-            </a:pPr>
-            <a:r>
-              <a:rPr lang="en-US" sz="1250" b="1" dirty="0">
-                <a:solidFill>
-                  <a:srgbClr val="9A6310"/>
-                </a:solidFill>
-                <a:latin typeface="Arial" pitchFamily="34" charset="0"/>
-                <a:ea typeface="Arial" pitchFamily="34" charset="-122"/>
-                <a:cs typeface="Arial" pitchFamily="34" charset="-120"/>
-              </a:rPr>
-              <a:t>▸   </a:t>
-            </a:r>
-            <a:pPr indent="0" marL="0">
-              <a:lnSpc>
-                <a:spcPct val="92000"/>
-              </a:lnSpc>
-              <a:spcAft>
-                <a:spcPts val="900"/>
-              </a:spcAft>
-              <a:buNone/>
-            </a:pPr>
-            <a:r>
-              <a:rPr lang="en-US" sz="1250" dirty="0">
-                <a:solidFill>
-                  <a:srgbClr val="434A63"/>
-                </a:solidFill>
-                <a:latin typeface="Arial" pitchFamily="34" charset="0"/>
-                <a:ea typeface="Arial" pitchFamily="34" charset="-122"/>
-                <a:cs typeface="Arial" pitchFamily="34" charset="-120"/>
-              </a:rPr>
-              <a:t>Pro Gruppe festhalten: die Adresse eurer VM, und eine Sache, die euch überrascht hat.</a:t>
-            </a:r>
-            <a:endParaRPr lang="en-US" sz="1250" dirty="0"/>
-          </a:p>
-          <a:p>
-            <a:pPr indent="0" marL="0">
-              <a:lnSpc>
-                <a:spcPct val="92000"/>
-              </a:lnSpc>
-              <a:buNone/>
-            </a:pPr>
-            <a:r>
-              <a:rPr lang="en-US" sz="1250" b="1" dirty="0">
-                <a:solidFill>
-                  <a:srgbClr val="9A6310"/>
-                </a:solidFill>
-                <a:latin typeface="Arial" pitchFamily="34" charset="0"/>
-                <a:ea typeface="Arial" pitchFamily="34" charset="-122"/>
-                <a:cs typeface="Arial" pitchFamily="34" charset="-120"/>
-              </a:rPr>
-              <a:t>▸   </a:t>
-            </a:r>
-            <a:pPr indent="0" marL="0">
-              <a:lnSpc>
-                <a:spcPct val="92000"/>
-              </a:lnSpc>
-              <a:spcAft>
-                <a:spcPts val="900"/>
-              </a:spcAft>
-              <a:buNone/>
-            </a:pPr>
-            <a:r>
-              <a:rPr lang="en-US" sz="1250" dirty="0">
-                <a:solidFill>
-                  <a:srgbClr val="434A63"/>
-                </a:solidFill>
-                <a:latin typeface="Arial" pitchFamily="34" charset="0"/>
-                <a:ea typeface="Arial" pitchFamily="34" charset="-122"/>
-                <a:cs typeface="Arial" pitchFamily="34" charset="-120"/>
-              </a:rPr>
-              <a:t>Fehlermeldung? Erst die Stolpersteine-Seite, dann „Um Hilfe bitten“.</a:t>
-            </a:r>
-            <a:endParaRPr lang="en-US" sz="1250" dirty="0"/>
-          </a:p>
-          <a:p>
-            <a:pPr indent="0" marL="0">
-              <a:lnSpc>
-                <a:spcPct val="92000"/>
-              </a:lnSpc>
-              <a:buNone/>
-            </a:pPr>
-            <a:r>
-              <a:rPr lang="en-US" sz="1250" b="1" dirty="0">
-                <a:solidFill>
-                  <a:srgbClr val="9A6310"/>
-                </a:solidFill>
-                <a:latin typeface="Arial" pitchFamily="34" charset="0"/>
-                <a:ea typeface="Arial" pitchFamily="34" charset="-122"/>
-                <a:cs typeface="Arial" pitchFamily="34" charset="-120"/>
-              </a:rPr>
-              <a:t>▸   </a:t>
-            </a:r>
-            <a:pPr indent="0" marL="0">
-              <a:lnSpc>
-                <a:spcPct val="92000"/>
-              </a:lnSpc>
-              <a:spcAft>
-                <a:spcPts val="900"/>
-              </a:spcAft>
-              <a:buNone/>
-            </a:pPr>
-            <a:r>
-              <a:rPr lang="en-US" sz="1250" dirty="0">
-                <a:solidFill>
-                  <a:srgbClr val="434A63"/>
-                </a:solidFill>
-                <a:latin typeface="Arial" pitchFamily="34" charset="0"/>
-                <a:ea typeface="Arial" pitchFamily="34" charset="-122"/>
-                <a:cs typeface="Arial" pitchFamily="34" charset="-120"/>
-              </a:rPr>
-              <a:t>Nicht jede Gruppe muss gleich weit kommen – bis Schritt 5 ist Pflicht, 6 und 7 sind Kür.</a:t>
-            </a:r>
-            <a:endParaRPr lang="en-US" sz="1250" dirty="0"/>
-          </a:p>
-        </p:txBody>
-      </p:sp>
-      <p:sp>
-        <p:nvSpPr>
-          <p:cNvPr id="6" name="Shape 4"/>
-          <p:cNvSpPr/>
-          <p:nvPr/>
-        </p:nvSpPr>
-        <p:spPr>
-          <a:xfrm>
-            <a:off x="566928" y="3602736"/>
-            <a:ext cx="8010144" cy="822960"/>
-          </a:xfrm>
-          <a:prstGeom prst="rect">
-            <a:avLst/>
-          </a:prstGeom>
-          <a:solidFill>
-            <a:srgbClr val="F5F6FC"/>
-          </a:solidFill>
-          <a:ln/>
-        </p:spPr>
-      </p:sp>
-      <p:sp>
-        <p:nvSpPr>
-          <p:cNvPr id="7" name="Shape 5"/>
-          <p:cNvSpPr/>
-          <p:nvPr/>
-        </p:nvSpPr>
-        <p:spPr>
-          <a:xfrm>
-            <a:off x="566928" y="3602736"/>
-            <a:ext cx="41148" cy="822960"/>
-          </a:xfrm>
-          <a:prstGeom prst="rect">
-            <a:avLst/>
-          </a:prstGeom>
-          <a:solidFill>
-            <a:srgbClr val="9A6310"/>
-          </a:solidFill>
-          <a:ln/>
-        </p:spPr>
-      </p:sp>
-      <p:sp>
-        <p:nvSpPr>
-          <p:cNvPr id="8" name="Text 6"/>
-          <p:cNvSpPr/>
-          <p:nvPr/>
-        </p:nvSpPr>
-        <p:spPr>
-          <a:xfrm>
-            <a:off x="804672" y="3749040"/>
-            <a:ext cx="7607808" cy="242062"/>
-          </a:xfrm>
-          <a:prstGeom prst="rect">
-            <a:avLst/>
-          </a:prstGeom>
-          <a:noFill/>
-          <a:ln/>
-        </p:spPr>
-        <p:txBody>
-          <a:bodyPr wrap="square" lIns="0" tIns="0" rIns="0" bIns="0" rtlCol="0" anchor="t"/>
-          <a:lstStyle/>
-          <a:p>
-            <a:pPr indent="0" marL="0">
-              <a:buNone/>
-            </a:pPr>
-            <a:r>
-              <a:rPr lang="en-US" sz="1300" b="1" dirty="0">
-                <a:solidFill>
-                  <a:srgbClr val="272E52"/>
-                </a:solidFill>
-                <a:latin typeface="Arial" pitchFamily="34" charset="0"/>
-                <a:ea typeface="Arial" pitchFamily="34" charset="-122"/>
-                <a:cs typeface="Arial" pitchFamily="34" charset="-120"/>
-              </a:rPr>
-              <a:t>Um 20:15 sind alle wieder hier</a:t>
-            </a:r>
-            <a:endParaRPr lang="en-US" sz="1300" dirty="0"/>
-          </a:p>
-        </p:txBody>
-      </p:sp>
-      <p:sp>
-        <p:nvSpPr>
-          <p:cNvPr id="9" name="Text 7"/>
-          <p:cNvSpPr/>
-          <p:nvPr/>
-        </p:nvSpPr>
-        <p:spPr>
-          <a:xfrm>
-            <a:off x="804672" y="4036822"/>
-            <a:ext cx="7607808" cy="270002"/>
-          </a:xfrm>
-          <a:prstGeom prst="rect">
-            <a:avLst/>
-          </a:prstGeom>
-          <a:noFill/>
-          <a:ln/>
-        </p:spPr>
-        <p:txBody>
-          <a:bodyPr wrap="square" lIns="0" tIns="0" rIns="0" bIns="0" rtlCol="0" anchor="t"/>
-          <a:lstStyle/>
-          <a:p>
-            <a:pPr indent="0" marL="0">
-              <a:lnSpc>
-                <a:spcPct val="92000"/>
-              </a:lnSpc>
-              <a:buNone/>
-            </a:pPr>
-            <a:r>
-              <a:rPr lang="en-US" sz="1150" dirty="0">
-                <a:solidFill>
-                  <a:srgbClr val="434A63"/>
-                </a:solidFill>
-                <a:latin typeface="Arial" pitchFamily="34" charset="0"/>
-                <a:ea typeface="Arial" pitchFamily="34" charset="-122"/>
-                <a:cs typeface="Arial" pitchFamily="34" charset="-120"/>
-              </a:rPr>
-              <a:t>Jede Gruppe zeigt kurz ihre VM-Übersicht und nennt ihre überraschendste Erkenntnis.</a:t>
-            </a:r>
-            <a:endParaRPr lang="en-US" sz="1150" dirty="0"/>
-          </a:p>
-        </p:txBody>
-      </p:sp>
-      <p:sp>
-        <p:nvSpPr>
-          <p:cNvPr id="10" name="Shape 8"/>
+              <a:t>Ergebnisse eintragen:  &lt;Link zum Ergebnis-Dokument hier eintragen&gt;</a:t>
+            </a:r>
+            <a:endParaRPr lang="en-US" sz="1050" dirty="0"/>
+          </a:p>
+        </p:txBody>
+      </p:sp>
+      <p:sp>
+        <p:nvSpPr>
+          <p:cNvPr id="19" name="Shape 17"/>
           <p:cNvSpPr/>
           <p:nvPr/>
         </p:nvSpPr>
@@ -4689,7 +4102,7 @@
       </p:sp>
       <p:sp>
         <p:nvSpPr>
-          <p:cNvPr id="11" name="Text 9"/>
+          <p:cNvPr id="20" name="Text 18"/>
           <p:cNvSpPr/>
           <p:nvPr/>
         </p:nvSpPr>
@@ -4728,7 +4141,7 @@
       </p:sp>
       <p:sp>
         <p:nvSpPr>
-          <p:cNvPr id="12" name="Text 10"/>
+          <p:cNvPr id="21" name="Text 19"/>
           <p:cNvSpPr/>
           <p:nvPr/>
         </p:nvSpPr>
@@ -4759,7 +4172,7 @@
                 <a:ea typeface="Arial" pitchFamily="34" charset="-122"/>
                 <a:cs typeface="Arial" pitchFamily="34" charset="-120"/>
               </a:rPr>
-              <a:t>9/12</a:t>
+              <a:t>9/13</a:t>
             </a:r>
             <a:endParaRPr lang="en-US" sz="1050" dirty="0"/>
           </a:p>
@@ -4812,7 +4225,7 @@
             <a:avLst/>
           </a:prstGeom>
           <a:solidFill>
-            <a:srgbClr val="3843AF"/>
+            <a:srgbClr val="9A6310"/>
           </a:solidFill>
           <a:ln/>
         </p:spPr>
@@ -4844,13 +4257,13 @@
             <a:r>
               <a:rPr lang="en-US" sz="1150" b="1" spc="180" kern="0" dirty="0">
                 <a:solidFill>
-                  <a:srgbClr val="3843AF"/>
-                </a:solidFill>
-                <a:latin typeface="Arial" pitchFamily="34" charset="0"/>
-                <a:ea typeface="Arial" pitchFamily="34" charset="-122"/>
-                <a:cs typeface="Arial" pitchFamily="34" charset="-120"/>
-              </a:rPr>
-              <a:t>AUSWERTUNG · 25 MINUTEN</a:t>
+                  <a:srgbClr val="9A6310"/>
+                </a:solidFill>
+                <a:latin typeface="Arial" pitchFamily="34" charset="0"/>
+                <a:ea typeface="Arial" pitchFamily="34" charset="-122"/>
+                <a:cs typeface="Arial" pitchFamily="34" charset="-120"/>
+              </a:rPr>
+              <a:t>SPIELREGELN</a:t>
             </a:r>
             <a:endParaRPr lang="en-US" sz="1150" dirty="0"/>
           </a:p>
@@ -4889,7 +4302,7 @@
                 <a:ea typeface="Arial" pitchFamily="34" charset="-122"/>
                 <a:cs typeface="Arial" pitchFamily="34" charset="-120"/>
               </a:rPr>
-              <a:t>Was habt ihr gebaut?</a:t>
+              <a:t>So arbeitet ihr</a:t>
             </a:r>
             <a:endParaRPr lang="en-US" sz="2600" dirty="0"/>
           </a:p>
@@ -4897,14 +4310,236 @@
       </p:sp>
       <p:sp>
         <p:nvSpPr>
-          <p:cNvPr id="5" name="Shape 3"/>
-          <p:cNvSpPr/>
-          <p:nvPr/>
-        </p:nvSpPr>
-        <p:spPr>
-          <a:xfrm>
-            <a:off x="438912" y="1810512"/>
-            <a:ext cx="8266176" cy="365760"/>
+          <p:cNvPr id="5" name="Text 3"/>
+          <p:cNvSpPr/>
+          <p:nvPr/>
+        </p:nvSpPr>
+        <p:spPr>
+          <a:xfrm>
+            <a:off x="566928" y="1700784"/>
+            <a:ext cx="8010144" cy="2011680"/>
+          </a:xfrm>
+          <a:prstGeom prst="rect">
+            <a:avLst/>
+          </a:prstGeom>
+          <a:noFill/>
+          <a:ln/>
+        </p:spPr>
+        <p:txBody>
+          <a:bodyPr wrap="square" lIns="0" tIns="0" rIns="0" bIns="0" rtlCol="0" anchor="t"/>
+          <a:lstStyle/>
+          <a:p>
+            <a:pPr indent="0" marL="0">
+              <a:lnSpc>
+                <a:spcPct val="92000"/>
+              </a:lnSpc>
+              <a:buNone/>
+            </a:pPr>
+            <a:r>
+              <a:rPr lang="en-US" sz="1250" b="1" dirty="0">
+                <a:solidFill>
+                  <a:srgbClr val="9A6310"/>
+                </a:solidFill>
+                <a:latin typeface="Arial" pitchFamily="34" charset="0"/>
+                <a:ea typeface="Arial" pitchFamily="34" charset="-122"/>
+                <a:cs typeface="Arial" pitchFamily="34" charset="-120"/>
+              </a:rPr>
+              <a:t>▸   </a:t>
+            </a:r>
+            <a:pPr indent="0" marL="0">
+              <a:lnSpc>
+                <a:spcPct val="92000"/>
+              </a:lnSpc>
+              <a:spcAft>
+                <a:spcPts val="900"/>
+              </a:spcAft>
+              <a:buNone/>
+            </a:pPr>
+            <a:r>
+              <a:rPr lang="en-US" sz="1250" dirty="0">
+                <a:solidFill>
+                  <a:srgbClr val="434A63"/>
+                </a:solidFill>
+                <a:latin typeface="Arial" pitchFamily="34" charset="0"/>
+                <a:ea typeface="Arial" pitchFamily="34" charset="-122"/>
+                <a:cs typeface="Arial" pitchFamily="34" charset="-120"/>
+              </a:rPr>
+              <a:t>Gleiche Gruppen, eine Person teilt den Bildschirm – alle rechnen bei Teil A mit.</a:t>
+            </a:r>
+            <a:endParaRPr lang="en-US" sz="1250" dirty="0"/>
+          </a:p>
+          <a:p>
+            <a:pPr indent="0" marL="0">
+              <a:lnSpc>
+                <a:spcPct val="92000"/>
+              </a:lnSpc>
+              <a:buNone/>
+            </a:pPr>
+            <a:r>
+              <a:rPr lang="en-US" sz="1250" b="1" dirty="0">
+                <a:solidFill>
+                  <a:srgbClr val="9A6310"/>
+                </a:solidFill>
+                <a:latin typeface="Arial" pitchFamily="34" charset="0"/>
+                <a:ea typeface="Arial" pitchFamily="34" charset="-122"/>
+                <a:cs typeface="Arial" pitchFamily="34" charset="-120"/>
+              </a:rPr>
+              <a:t>▸   </a:t>
+            </a:r>
+            <a:pPr indent="0" marL="0">
+              <a:lnSpc>
+                <a:spcPct val="92000"/>
+              </a:lnSpc>
+              <a:spcAft>
+                <a:spcPts val="900"/>
+              </a:spcAft>
+              <a:buNone/>
+            </a:pPr>
+            <a:r>
+              <a:rPr lang="en-US" sz="1250" dirty="0">
+                <a:solidFill>
+                  <a:srgbClr val="434A63"/>
+                </a:solidFill>
+                <a:latin typeface="Arial" pitchFamily="34" charset="0"/>
+                <a:ea typeface="Arial" pitchFamily="34" charset="-122"/>
+                <a:cs typeface="Arial" pitchFamily="34" charset="-120"/>
+              </a:rPr>
+              <a:t>Jeder startet seine eigene Sandbox – kaputt machen ist ausdrücklich erlaubt, sie ist wegwerfbar.</a:t>
+            </a:r>
+            <a:endParaRPr lang="en-US" sz="1250" dirty="0"/>
+          </a:p>
+          <a:p>
+            <a:pPr indent="0" marL="0">
+              <a:lnSpc>
+                <a:spcPct val="92000"/>
+              </a:lnSpc>
+              <a:buNone/>
+            </a:pPr>
+            <a:r>
+              <a:rPr lang="en-US" sz="1250" b="1" dirty="0">
+                <a:solidFill>
+                  <a:srgbClr val="9A6310"/>
+                </a:solidFill>
+                <a:latin typeface="Arial" pitchFamily="34" charset="0"/>
+                <a:ea typeface="Arial" pitchFamily="34" charset="-122"/>
+                <a:cs typeface="Arial" pitchFamily="34" charset="-120"/>
+              </a:rPr>
+              <a:t>▸   </a:t>
+            </a:r>
+            <a:pPr indent="0" marL="0">
+              <a:lnSpc>
+                <a:spcPct val="92000"/>
+              </a:lnSpc>
+              <a:spcAft>
+                <a:spcPts val="900"/>
+              </a:spcAft>
+              <a:buNone/>
+            </a:pPr>
+            <a:r>
+              <a:rPr lang="en-US" sz="1250" dirty="0">
+                <a:solidFill>
+                  <a:srgbClr val="434A63"/>
+                </a:solidFill>
+                <a:latin typeface="Arial" pitchFamily="34" charset="0"/>
+                <a:ea typeface="Arial" pitchFamily="34" charset="-122"/>
+                <a:cs typeface="Arial" pitchFamily="34" charset="-120"/>
+              </a:rPr>
+              <a:t>Teil A ist Kopfarbeit mit Netzwerk-Wissen: erst rechnen, dann in den Lösungen nachsehen.</a:t>
+            </a:r>
+            <a:endParaRPr lang="en-US" sz="1250" dirty="0"/>
+          </a:p>
+          <a:p>
+            <a:pPr indent="0" marL="0">
+              <a:lnSpc>
+                <a:spcPct val="92000"/>
+              </a:lnSpc>
+              <a:buNone/>
+            </a:pPr>
+            <a:r>
+              <a:rPr lang="en-US" sz="1250" b="1" dirty="0">
+                <a:solidFill>
+                  <a:srgbClr val="9A6310"/>
+                </a:solidFill>
+                <a:latin typeface="Arial" pitchFamily="34" charset="0"/>
+                <a:ea typeface="Arial" pitchFamily="34" charset="-122"/>
+                <a:cs typeface="Arial" pitchFamily="34" charset="-120"/>
+              </a:rPr>
+              <a:t>▸   </a:t>
+            </a:r>
+            <a:pPr indent="0" marL="0">
+              <a:lnSpc>
+                <a:spcPct val="92000"/>
+              </a:lnSpc>
+              <a:spcAft>
+                <a:spcPts val="900"/>
+              </a:spcAft>
+              <a:buNone/>
+            </a:pPr>
+            <a:r>
+              <a:rPr lang="en-US" sz="1250" dirty="0">
+                <a:solidFill>
+                  <a:srgbClr val="434A63"/>
+                </a:solidFill>
+                <a:latin typeface="Arial" pitchFamily="34" charset="0"/>
+                <a:ea typeface="Arial" pitchFamily="34" charset="-122"/>
+                <a:cs typeface="Arial" pitchFamily="34" charset="-120"/>
+              </a:rPr>
+              <a:t>Kommt ihr nicht in die Sandbox: Die Übung läuft genauso auf jeder anderen Linux-VM (Multipass-Anleitung ist verlinkt).</a:t>
+            </a:r>
+            <a:endParaRPr lang="en-US" sz="1250" dirty="0"/>
+          </a:p>
+          <a:p>
+            <a:pPr indent="0" marL="0">
+              <a:lnSpc>
+                <a:spcPct val="92000"/>
+              </a:lnSpc>
+              <a:buNone/>
+            </a:pPr>
+            <a:r>
+              <a:rPr lang="en-US" sz="1250" b="1" dirty="0">
+                <a:solidFill>
+                  <a:srgbClr val="9A6310"/>
+                </a:solidFill>
+                <a:latin typeface="Arial" pitchFamily="34" charset="0"/>
+                <a:ea typeface="Arial" pitchFamily="34" charset="-122"/>
+                <a:cs typeface="Arial" pitchFamily="34" charset="-120"/>
+              </a:rPr>
+              <a:t>▸   </a:t>
+            </a:r>
+            <a:pPr indent="0" marL="0">
+              <a:lnSpc>
+                <a:spcPct val="92000"/>
+              </a:lnSpc>
+              <a:spcAft>
+                <a:spcPts val="900"/>
+              </a:spcAft>
+              <a:buNone/>
+            </a:pPr>
+            <a:r>
+              <a:rPr lang="en-US" sz="1250" dirty="0">
+                <a:solidFill>
+                  <a:srgbClr val="434A63"/>
+                </a:solidFill>
+                <a:latin typeface="Arial" pitchFamily="34" charset="0"/>
+                <a:ea typeface="Arial" pitchFamily="34" charset="-122"/>
+                <a:cs typeface="Arial" pitchFamily="34" charset="-120"/>
+              </a:rPr>
+              <a:t>Wenn es klemmt: Hilfekarten auf der Seite, dann „Um Hilfe bitten“.</a:t>
+            </a:r>
+            <a:endParaRPr lang="en-US" sz="1250" dirty="0"/>
+          </a:p>
+        </p:txBody>
+      </p:sp>
+      <p:sp>
+        <p:nvSpPr>
+          <p:cNvPr id="6" name="Shape 4"/>
+          <p:cNvSpPr/>
+          <p:nvPr/>
+        </p:nvSpPr>
+        <p:spPr>
+          <a:xfrm>
+            <a:off x="566928" y="3602736"/>
+            <a:ext cx="8010144" cy="822960"/>
           </a:xfrm>
           <a:prstGeom prst="rect">
             <a:avLst/>
@@ -4917,69 +4552,92 @@
       </p:sp>
       <p:sp>
         <p:nvSpPr>
-          <p:cNvPr id="6" name="Text 4"/>
-          <p:cNvSpPr/>
-          <p:nvPr/>
-        </p:nvSpPr>
-        <p:spPr>
-          <a:xfrm>
-            <a:off x="566928" y="1810512"/>
-            <a:ext cx="548640" cy="365760"/>
-          </a:xfrm>
-          <a:prstGeom prst="rect">
-            <a:avLst/>
-          </a:prstGeom>
-          <a:noFill/>
-          <a:ln/>
-        </p:spPr>
-        <p:txBody>
-          <a:bodyPr wrap="square" lIns="0" tIns="0" rIns="0" bIns="0" rtlCol="0" anchor="ctr"/>
-          <a:lstStyle/>
-          <a:p>
-            <a:pPr indent="0" marL="0">
-              <a:buNone/>
-            </a:pPr>
-            <a:r>
-              <a:rPr lang="en-US" sz="1200" b="1" dirty="0">
-                <a:solidFill>
-                  <a:srgbClr val="3843AF"/>
-                </a:solidFill>
-                <a:latin typeface="Courier New" pitchFamily="34" charset="0"/>
-                <a:ea typeface="Courier New" pitchFamily="34" charset="-122"/>
-                <a:cs typeface="Courier New" pitchFamily="34" charset="-120"/>
-              </a:rPr>
-              <a:t>1</a:t>
-            </a:r>
-            <a:endParaRPr lang="en-US" sz="1200" dirty="0"/>
-          </a:p>
-        </p:txBody>
-      </p:sp>
-      <p:sp>
-        <p:nvSpPr>
-          <p:cNvPr id="7" name="Text 5"/>
-          <p:cNvSpPr/>
-          <p:nvPr/>
-        </p:nvSpPr>
-        <p:spPr>
-          <a:xfrm>
-            <a:off x="1115568" y="1810512"/>
-            <a:ext cx="7461504" cy="365760"/>
-          </a:xfrm>
-          <a:prstGeom prst="rect">
-            <a:avLst/>
-          </a:prstGeom>
-          <a:noFill/>
-          <a:ln/>
-        </p:spPr>
-        <p:txBody>
-          <a:bodyPr wrap="square" lIns="0" tIns="0" rIns="0" bIns="0" rtlCol="0" anchor="ctr"/>
-          <a:lstStyle/>
-          <a:p>
-            <a:pPr indent="0" marL="0">
-              <a:buNone/>
-            </a:pPr>
-            <a:r>
-              <a:rPr lang="en-US" sz="1200" dirty="0">
+          <p:cNvPr id="7" name="Shape 5"/>
+          <p:cNvSpPr/>
+          <p:nvPr/>
+        </p:nvSpPr>
+        <p:spPr>
+          <a:xfrm>
+            <a:off x="566928" y="3602736"/>
+            <a:ext cx="41148" cy="822960"/>
+          </a:xfrm>
+          <a:prstGeom prst="rect">
+            <a:avLst/>
+          </a:prstGeom>
+          <a:solidFill>
+            <a:srgbClr val="9A6310"/>
+          </a:solidFill>
+          <a:ln/>
+        </p:spPr>
+      </p:sp>
+      <p:sp>
+        <p:nvSpPr>
+          <p:cNvPr id="8" name="Text 6"/>
+          <p:cNvSpPr/>
+          <p:nvPr/>
+        </p:nvSpPr>
+        <p:spPr>
+          <a:xfrm>
+            <a:off x="804672" y="3749040"/>
+            <a:ext cx="7607808" cy="242062"/>
+          </a:xfrm>
+          <a:prstGeom prst="rect">
+            <a:avLst/>
+          </a:prstGeom>
+          <a:noFill/>
+          <a:ln/>
+        </p:spPr>
+        <p:txBody>
+          <a:bodyPr wrap="square" lIns="0" tIns="0" rIns="0" bIns="0" rtlCol="0" anchor="t"/>
+          <a:lstStyle/>
+          <a:p>
+            <a:pPr indent="0" marL="0">
+              <a:buNone/>
+            </a:pPr>
+            <a:r>
+              <a:rPr lang="en-US" sz="1300" b="1" dirty="0">
+                <a:solidFill>
+                  <a:srgbClr val="272E52"/>
+                </a:solidFill>
+                <a:latin typeface="Arial" pitchFamily="34" charset="0"/>
+                <a:ea typeface="Arial" pitchFamily="34" charset="-122"/>
+                <a:cs typeface="Arial" pitchFamily="34" charset="-120"/>
+              </a:rPr>
+              <a:t>Um 20:15 sind alle wieder hier</a:t>
+            </a:r>
+            <a:endParaRPr lang="en-US" sz="1300" dirty="0"/>
+          </a:p>
+        </p:txBody>
+      </p:sp>
+      <p:sp>
+        <p:nvSpPr>
+          <p:cNvPr id="9" name="Text 7"/>
+          <p:cNvSpPr/>
+          <p:nvPr/>
+        </p:nvSpPr>
+        <p:spPr>
+          <a:xfrm>
+            <a:off x="804672" y="4036822"/>
+            <a:ext cx="7607808" cy="270002"/>
+          </a:xfrm>
+          <a:prstGeom prst="rect">
+            <a:avLst/>
+          </a:prstGeom>
+          <a:noFill/>
+          <a:ln/>
+        </p:spPr>
+        <p:txBody>
+          <a:bodyPr wrap="square" lIns="0" tIns="0" rIns="0" bIns="0" rtlCol="0" anchor="t"/>
+          <a:lstStyle/>
+          <a:p>
+            <a:pPr indent="0" marL="0">
+              <a:lnSpc>
+                <a:spcPct val="92000"/>
+              </a:lnSpc>
+              <a:buNone/>
+            </a:pPr>
+            <a:r>
+              <a:rPr lang="en-US" sz="1150" dirty="0">
                 <a:solidFill>
                   <a:srgbClr val="434A63"/>
                 </a:solidFill>
@@ -4987,328 +4645,15 @@
                 <a:ea typeface="Arial" pitchFamily="34" charset="-122"/>
                 <a:cs typeface="Arial" pitchFamily="34" charset="-120"/>
               </a:rPr>
-              <a:t>Jede Gruppe: multipass list zeigen – wie viele VMs, welcher Zustand?</a:t>
-            </a:r>
-            <a:endParaRPr lang="en-US" sz="1200" dirty="0"/>
-          </a:p>
-        </p:txBody>
-      </p:sp>
-      <p:sp>
-        <p:nvSpPr>
-          <p:cNvPr id="8" name="Text 6"/>
-          <p:cNvSpPr/>
-          <p:nvPr/>
-        </p:nvSpPr>
-        <p:spPr>
-          <a:xfrm>
-            <a:off x="566928" y="2176272"/>
-            <a:ext cx="548640" cy="365760"/>
-          </a:xfrm>
-          <a:prstGeom prst="rect">
-            <a:avLst/>
-          </a:prstGeom>
-          <a:noFill/>
-          <a:ln/>
-        </p:spPr>
-        <p:txBody>
-          <a:bodyPr wrap="square" lIns="0" tIns="0" rIns="0" bIns="0" rtlCol="0" anchor="ctr"/>
-          <a:lstStyle/>
-          <a:p>
-            <a:pPr indent="0" marL="0">
-              <a:buNone/>
-            </a:pPr>
-            <a:r>
-              <a:rPr lang="en-US" sz="1200" b="1" dirty="0">
-                <a:solidFill>
-                  <a:srgbClr val="3843AF"/>
-                </a:solidFill>
-                <a:latin typeface="Courier New" pitchFamily="34" charset="0"/>
-                <a:ea typeface="Courier New" pitchFamily="34" charset="-122"/>
-                <a:cs typeface="Courier New" pitchFamily="34" charset="-120"/>
-              </a:rPr>
-              <a:t>2</a:t>
-            </a:r>
-            <a:endParaRPr lang="en-US" sz="1200" dirty="0"/>
-          </a:p>
-        </p:txBody>
-      </p:sp>
-      <p:sp>
-        <p:nvSpPr>
-          <p:cNvPr id="9" name="Text 7"/>
-          <p:cNvSpPr/>
-          <p:nvPr/>
-        </p:nvSpPr>
-        <p:spPr>
-          <a:xfrm>
-            <a:off x="1115568" y="2176272"/>
-            <a:ext cx="7461504" cy="365760"/>
-          </a:xfrm>
-          <a:prstGeom prst="rect">
-            <a:avLst/>
-          </a:prstGeom>
-          <a:noFill/>
-          <a:ln/>
-        </p:spPr>
-        <p:txBody>
-          <a:bodyPr wrap="square" lIns="0" tIns="0" rIns="0" bIns="0" rtlCol="0" anchor="ctr"/>
-          <a:lstStyle/>
-          <a:p>
-            <a:pPr indent="0" marL="0">
-              <a:buNone/>
-            </a:pPr>
-            <a:r>
-              <a:rPr lang="en-US" sz="1200" dirty="0">
-                <a:solidFill>
-                  <a:srgbClr val="434A63"/>
-                </a:solidFill>
-                <a:latin typeface="Arial" pitchFamily="34" charset="0"/>
-                <a:ea typeface="Arial" pitchFamily="34" charset="-122"/>
-                <a:cs typeface="Arial" pitchFamily="34" charset="-120"/>
-              </a:rPr>
-              <a:t>Die Adressen-Frage: Welche IP hat eure VM – und aus welchem Netz stammt sie?</a:t>
-            </a:r>
-            <a:endParaRPr lang="en-US" sz="1200" dirty="0"/>
+              <a:t>Jede Gruppe bringt mit: Netzadresse und Gateway ihrer VM – und den Satz, wessen Hardware das eigentlich ist.</a:t>
+            </a:r>
+            <a:endParaRPr lang="en-US" sz="1150" dirty="0"/>
           </a:p>
         </p:txBody>
       </p:sp>
       <p:sp>
         <p:nvSpPr>
           <p:cNvPr id="10" name="Shape 8"/>
-          <p:cNvSpPr/>
-          <p:nvPr/>
-        </p:nvSpPr>
-        <p:spPr>
-          <a:xfrm>
-            <a:off x="438912" y="2542032"/>
-            <a:ext cx="8266176" cy="365760"/>
-          </a:xfrm>
-          <a:prstGeom prst="rect">
-            <a:avLst/>
-          </a:prstGeom>
-          <a:solidFill>
-            <a:srgbClr val="F5F6FC"/>
-          </a:solidFill>
-          <a:ln/>
-        </p:spPr>
-      </p:sp>
-      <p:sp>
-        <p:nvSpPr>
-          <p:cNvPr id="11" name="Text 9"/>
-          <p:cNvSpPr/>
-          <p:nvPr/>
-        </p:nvSpPr>
-        <p:spPr>
-          <a:xfrm>
-            <a:off x="566928" y="2542032"/>
-            <a:ext cx="548640" cy="365760"/>
-          </a:xfrm>
-          <a:prstGeom prst="rect">
-            <a:avLst/>
-          </a:prstGeom>
-          <a:noFill/>
-          <a:ln/>
-        </p:spPr>
-        <p:txBody>
-          <a:bodyPr wrap="square" lIns="0" tIns="0" rIns="0" bIns="0" rtlCol="0" anchor="ctr"/>
-          <a:lstStyle/>
-          <a:p>
-            <a:pPr indent="0" marL="0">
-              <a:buNone/>
-            </a:pPr>
-            <a:r>
-              <a:rPr lang="en-US" sz="1200" b="1" dirty="0">
-                <a:solidFill>
-                  <a:srgbClr val="3843AF"/>
-                </a:solidFill>
-                <a:latin typeface="Courier New" pitchFamily="34" charset="0"/>
-                <a:ea typeface="Courier New" pitchFamily="34" charset="-122"/>
-                <a:cs typeface="Courier New" pitchFamily="34" charset="-120"/>
-              </a:rPr>
-              <a:t>3</a:t>
-            </a:r>
-            <a:endParaRPr lang="en-US" sz="1200" dirty="0"/>
-          </a:p>
-        </p:txBody>
-      </p:sp>
-      <p:sp>
-        <p:nvSpPr>
-          <p:cNvPr id="12" name="Text 10"/>
-          <p:cNvSpPr/>
-          <p:nvPr/>
-        </p:nvSpPr>
-        <p:spPr>
-          <a:xfrm>
-            <a:off x="1115568" y="2542032"/>
-            <a:ext cx="7461504" cy="365760"/>
-          </a:xfrm>
-          <a:prstGeom prst="rect">
-            <a:avLst/>
-          </a:prstGeom>
-          <a:noFill/>
-          <a:ln/>
-        </p:spPr>
-        <p:txBody>
-          <a:bodyPr wrap="square" lIns="0" tIns="0" rIns="0" bIns="0" rtlCol="0" anchor="ctr"/>
-          <a:lstStyle/>
-          <a:p>
-            <a:pPr indent="0" marL="0">
-              <a:buNone/>
-            </a:pPr>
-            <a:r>
-              <a:rPr lang="en-US" sz="1200" dirty="0">
-                <a:solidFill>
-                  <a:srgbClr val="434A63"/>
-                </a:solidFill>
-                <a:latin typeface="Arial" pitchFamily="34" charset="0"/>
-                <a:ea typeface="Arial" pitchFamily="34" charset="-122"/>
-                <a:cs typeface="Arial" pitchFamily="34" charset="-120"/>
-              </a:rPr>
-              <a:t>Überraschungen: Was war anders als erwartet?</a:t>
-            </a:r>
-            <a:endParaRPr lang="en-US" sz="1200" dirty="0"/>
-          </a:p>
-        </p:txBody>
-      </p:sp>
-      <p:sp>
-        <p:nvSpPr>
-          <p:cNvPr id="13" name="Text 11"/>
-          <p:cNvSpPr/>
-          <p:nvPr/>
-        </p:nvSpPr>
-        <p:spPr>
-          <a:xfrm>
-            <a:off x="566928" y="2907792"/>
-            <a:ext cx="548640" cy="365760"/>
-          </a:xfrm>
-          <a:prstGeom prst="rect">
-            <a:avLst/>
-          </a:prstGeom>
-          <a:noFill/>
-          <a:ln/>
-        </p:spPr>
-        <p:txBody>
-          <a:bodyPr wrap="square" lIns="0" tIns="0" rIns="0" bIns="0" rtlCol="0" anchor="ctr"/>
-          <a:lstStyle/>
-          <a:p>
-            <a:pPr indent="0" marL="0">
-              <a:buNone/>
-            </a:pPr>
-            <a:r>
-              <a:rPr lang="en-US" sz="1200" b="1" dirty="0">
-                <a:solidFill>
-                  <a:srgbClr val="3843AF"/>
-                </a:solidFill>
-                <a:latin typeface="Courier New" pitchFamily="34" charset="0"/>
-                <a:ea typeface="Courier New" pitchFamily="34" charset="-122"/>
-                <a:cs typeface="Courier New" pitchFamily="34" charset="-120"/>
-              </a:rPr>
-              <a:t>4</a:t>
-            </a:r>
-            <a:endParaRPr lang="en-US" sz="1200" dirty="0"/>
-          </a:p>
-        </p:txBody>
-      </p:sp>
-      <p:sp>
-        <p:nvSpPr>
-          <p:cNvPr id="14" name="Text 12"/>
-          <p:cNvSpPr/>
-          <p:nvPr/>
-        </p:nvSpPr>
-        <p:spPr>
-          <a:xfrm>
-            <a:off x="1115568" y="2907792"/>
-            <a:ext cx="7461504" cy="365760"/>
-          </a:xfrm>
-          <a:prstGeom prst="rect">
-            <a:avLst/>
-          </a:prstGeom>
-          <a:noFill/>
-          <a:ln/>
-        </p:spPr>
-        <p:txBody>
-          <a:bodyPr wrap="square" lIns="0" tIns="0" rIns="0" bIns="0" rtlCol="0" anchor="ctr"/>
-          <a:lstStyle/>
-          <a:p>
-            <a:pPr indent="0" marL="0">
-              <a:buNone/>
-            </a:pPr>
-            <a:r>
-              <a:rPr lang="en-US" sz="1200" dirty="0">
-                <a:solidFill>
-                  <a:srgbClr val="434A63"/>
-                </a:solidFill>
-                <a:latin typeface="Arial" pitchFamily="34" charset="0"/>
-                <a:ea typeface="Arial" pitchFamily="34" charset="-122"/>
-                <a:cs typeface="Arial" pitchFamily="34" charset="-120"/>
-              </a:rPr>
-              <a:t>Aufräum-Check: Kür-VM weg, „demo“ gestoppt – und wessen Platte ist trotzdem noch voll?</a:t>
-            </a:r>
-            <a:endParaRPr lang="en-US" sz="1200" dirty="0"/>
-          </a:p>
-        </p:txBody>
-      </p:sp>
-      <p:sp>
-        <p:nvSpPr>
-          <p:cNvPr id="15" name="Shape 13"/>
-          <p:cNvSpPr/>
-          <p:nvPr/>
-        </p:nvSpPr>
-        <p:spPr>
-          <a:xfrm>
-            <a:off x="566928" y="4069080"/>
-            <a:ext cx="32004" cy="256032"/>
-          </a:xfrm>
-          <a:prstGeom prst="rect">
-            <a:avLst/>
-          </a:prstGeom>
-          <a:solidFill>
-            <a:srgbClr val="3843AF"/>
-          </a:solidFill>
-          <a:ln/>
-        </p:spPr>
-      </p:sp>
-      <p:sp>
-        <p:nvSpPr>
-          <p:cNvPr id="16" name="Text 14"/>
-          <p:cNvSpPr/>
-          <p:nvPr/>
-        </p:nvSpPr>
-        <p:spPr>
-          <a:xfrm>
-            <a:off x="749808" y="4023360"/>
-            <a:ext cx="7827264" cy="402336"/>
-          </a:xfrm>
-          <a:prstGeom prst="rect">
-            <a:avLst/>
-          </a:prstGeom>
-          <a:noFill/>
-          <a:ln/>
-        </p:spPr>
-        <p:txBody>
-          <a:bodyPr wrap="square" lIns="0" tIns="0" rIns="0" bIns="0" rtlCol="0" anchor="ctr"/>
-          <a:lstStyle/>
-          <a:p>
-            <a:pPr indent="0" marL="0">
-              <a:buNone/>
-            </a:pPr>
-            <a:r>
-              <a:rPr lang="en-US" sz="1200" b="1" dirty="0">
-                <a:solidFill>
-                  <a:srgbClr val="434A63"/>
-                </a:solidFill>
-                <a:latin typeface="Arial" pitchFamily="34" charset="0"/>
-                <a:ea typeface="Arial" pitchFamily="34" charset="-122"/>
-                <a:cs typeface="Arial" pitchFamily="34" charset="-120"/>
-              </a:rPr>
-              <a:t>Die Adressen-Frage ist kein Zufall: eure VM hängt in einem privaten NAT-Netz – Mittwoch schauen wir genau da hinein.</a:t>
-            </a:r>
-            <a:endParaRPr lang="en-US" sz="1200" dirty="0"/>
-          </a:p>
-        </p:txBody>
-      </p:sp>
-      <p:sp>
-        <p:nvSpPr>
-          <p:cNvPr id="17" name="Shape 15"/>
           <p:cNvSpPr/>
           <p:nvPr/>
         </p:nvSpPr>
@@ -5331,7 +4676,7 @@
       </p:sp>
       <p:sp>
         <p:nvSpPr>
-          <p:cNvPr id="18" name="Text 16"/>
+          <p:cNvPr id="11" name="Text 9"/>
           <p:cNvSpPr/>
           <p:nvPr/>
         </p:nvSpPr>
@@ -5362,7 +4707,7 @@
                 <a:ea typeface="Arial" pitchFamily="34" charset="-122"/>
                 <a:cs typeface="Arial" pitchFamily="34" charset="-120"/>
               </a:rPr>
-              <a:t>Auswertung</a:t>
+              <a:t>Breakout</a:t>
             </a:r>
             <a:endParaRPr lang="en-US" sz="1050" dirty="0"/>
           </a:p>
@@ -5370,7 +4715,7 @@
       </p:sp>
       <p:sp>
         <p:nvSpPr>
-          <p:cNvPr id="19" name="Text 17"/>
+          <p:cNvPr id="12" name="Text 10"/>
           <p:cNvSpPr/>
           <p:nvPr/>
         </p:nvSpPr>
@@ -5401,7 +4746,7 @@
                 <a:ea typeface="Arial" pitchFamily="34" charset="-122"/>
                 <a:cs typeface="Arial" pitchFamily="34" charset="-120"/>
               </a:rPr>
-              <a:t>10/12</a:t>
+              <a:t>10/13</a:t>
             </a:r>
             <a:endParaRPr lang="en-US" sz="1050" dirty="0"/>
           </a:p>
@@ -5492,7 +4837,7 @@
                 <a:ea typeface="Arial" pitchFamily="34" charset="-122"/>
                 <a:cs typeface="Arial" pitchFamily="34" charset="-120"/>
               </a:rPr>
-              <a:t>VM IM ALLTAG</a:t>
+              <a:t>AUSWERTUNG · 25 MINUTEN</a:t>
             </a:r>
             <a:endParaRPr lang="en-US" sz="1150" dirty="0"/>
           </a:p>
@@ -5531,7 +4876,7 @@
                 <a:ea typeface="Arial" pitchFamily="34" charset="-122"/>
                 <a:cs typeface="Arial" pitchFamily="34" charset="-120"/>
               </a:rPr>
-              <a:t>Wo euch VMs ab jetzt begegnen</a:t>
+              <a:t>Eure Funde</a:t>
             </a:r>
             <a:endParaRPr lang="en-US" sz="2600" dirty="0"/>
           </a:p>
@@ -5545,8 +4890,8 @@
         </p:nvSpPr>
         <p:spPr>
           <a:xfrm>
-            <a:off x="566928" y="1828800"/>
-            <a:ext cx="2523744" cy="1737360"/>
+            <a:off x="438912" y="1810512"/>
+            <a:ext cx="8266176" cy="365760"/>
           </a:xfrm>
           <a:prstGeom prst="rect">
             <a:avLst/>
@@ -5559,14 +4904,346 @@
       </p:sp>
       <p:sp>
         <p:nvSpPr>
-          <p:cNvPr id="6" name="Shape 4"/>
-          <p:cNvSpPr/>
-          <p:nvPr/>
-        </p:nvSpPr>
-        <p:spPr>
-          <a:xfrm>
-            <a:off x="566928" y="1828800"/>
-            <a:ext cx="41148" cy="1737360"/>
+          <p:cNvPr id="6" name="Text 4"/>
+          <p:cNvSpPr/>
+          <p:nvPr/>
+        </p:nvSpPr>
+        <p:spPr>
+          <a:xfrm>
+            <a:off x="566928" y="1810512"/>
+            <a:ext cx="548640" cy="365760"/>
+          </a:xfrm>
+          <a:prstGeom prst="rect">
+            <a:avLst/>
+          </a:prstGeom>
+          <a:noFill/>
+          <a:ln/>
+        </p:spPr>
+        <p:txBody>
+          <a:bodyPr wrap="square" lIns="0" tIns="0" rIns="0" bIns="0" rtlCol="0" anchor="ctr"/>
+          <a:lstStyle/>
+          <a:p>
+            <a:pPr indent="0" marL="0">
+              <a:buNone/>
+            </a:pPr>
+            <a:r>
+              <a:rPr lang="en-US" sz="1200" b="1" dirty="0">
+                <a:solidFill>
+                  <a:srgbClr val="3843AF"/>
+                </a:solidFill>
+                <a:latin typeface="Courier New" pitchFamily="34" charset="0"/>
+                <a:ea typeface="Courier New" pitchFamily="34" charset="-122"/>
+                <a:cs typeface="Courier New" pitchFamily="34" charset="-120"/>
+              </a:rPr>
+              <a:t>1</a:t>
+            </a:r>
+            <a:endParaRPr lang="en-US" sz="1200" dirty="0"/>
+          </a:p>
+        </p:txBody>
+      </p:sp>
+      <p:sp>
+        <p:nvSpPr>
+          <p:cNvPr id="7" name="Text 5"/>
+          <p:cNvSpPr/>
+          <p:nvPr/>
+        </p:nvSpPr>
+        <p:spPr>
+          <a:xfrm>
+            <a:off x="1115568" y="1810512"/>
+            <a:ext cx="7461504" cy="365760"/>
+          </a:xfrm>
+          <a:prstGeom prst="rect">
+            <a:avLst/>
+          </a:prstGeom>
+          <a:noFill/>
+          <a:ln/>
+        </p:spPr>
+        <p:txBody>
+          <a:bodyPr wrap="square" lIns="0" tIns="0" rIns="0" bIns="0" rtlCol="0" anchor="ctr"/>
+          <a:lstStyle/>
+          <a:p>
+            <a:pPr indent="0" marL="0">
+              <a:buNone/>
+            </a:pPr>
+            <a:r>
+              <a:rPr lang="en-US" sz="1200" dirty="0">
+                <a:solidFill>
+                  <a:srgbClr val="434A63"/>
+                </a:solidFill>
+                <a:latin typeface="Arial" pitchFamily="34" charset="0"/>
+                <a:ea typeface="Arial" pitchFamily="34" charset="-122"/>
+                <a:cs typeface="Arial" pitchFamily="34" charset="-120"/>
+              </a:rPr>
+              <a:t>Netz-Detektiv: Welche Netze habt ihr gefunden – und wer ist das Gateway?</a:t>
+            </a:r>
+            <a:endParaRPr lang="en-US" sz="1200" dirty="0"/>
+          </a:p>
+        </p:txBody>
+      </p:sp>
+      <p:sp>
+        <p:nvSpPr>
+          <p:cNvPr id="8" name="Text 6"/>
+          <p:cNvSpPr/>
+          <p:nvPr/>
+        </p:nvSpPr>
+        <p:spPr>
+          <a:xfrm>
+            <a:off x="566928" y="2176272"/>
+            <a:ext cx="548640" cy="365760"/>
+          </a:xfrm>
+          <a:prstGeom prst="rect">
+            <a:avLst/>
+          </a:prstGeom>
+          <a:noFill/>
+          <a:ln/>
+        </p:spPr>
+        <p:txBody>
+          <a:bodyPr wrap="square" lIns="0" tIns="0" rIns="0" bIns="0" rtlCol="0" anchor="ctr"/>
+          <a:lstStyle/>
+          <a:p>
+            <a:pPr indent="0" marL="0">
+              <a:buNone/>
+            </a:pPr>
+            <a:r>
+              <a:rPr lang="en-US" sz="1200" b="1" dirty="0">
+                <a:solidFill>
+                  <a:srgbClr val="3843AF"/>
+                </a:solidFill>
+                <a:latin typeface="Courier New" pitchFamily="34" charset="0"/>
+                <a:ea typeface="Courier New" pitchFamily="34" charset="-122"/>
+                <a:cs typeface="Courier New" pitchFamily="34" charset="-120"/>
+              </a:rPr>
+              <a:t>2</a:t>
+            </a:r>
+            <a:endParaRPr lang="en-US" sz="1200" dirty="0"/>
+          </a:p>
+        </p:txBody>
+      </p:sp>
+      <p:sp>
+        <p:nvSpPr>
+          <p:cNvPr id="9" name="Text 7"/>
+          <p:cNvSpPr/>
+          <p:nvPr/>
+        </p:nvSpPr>
+        <p:spPr>
+          <a:xfrm>
+            <a:off x="1115568" y="2176272"/>
+            <a:ext cx="7461504" cy="365760"/>
+          </a:xfrm>
+          <a:prstGeom prst="rect">
+            <a:avLst/>
+          </a:prstGeom>
+          <a:noFill/>
+          <a:ln/>
+        </p:spPr>
+        <p:txBody>
+          <a:bodyPr wrap="square" lIns="0" tIns="0" rIns="0" bIns="0" rtlCol="0" anchor="ctr"/>
+          <a:lstStyle/>
+          <a:p>
+            <a:pPr indent="0" marL="0">
+              <a:buNone/>
+            </a:pPr>
+            <a:r>
+              <a:rPr lang="en-US" sz="1200" dirty="0">
+                <a:solidFill>
+                  <a:srgbClr val="434A63"/>
+                </a:solidFill>
+                <a:latin typeface="Arial" pitchFamily="34" charset="0"/>
+                <a:ea typeface="Arial" pitchFamily="34" charset="-122"/>
+                <a:cs typeface="Arial" pitchFamily="34" charset="-120"/>
+              </a:rPr>
+              <a:t>Zwei Gesichter: private Adresse innen, öffentliche außen – wer übersetzt da? (Montag!)</a:t>
+            </a:r>
+            <a:endParaRPr lang="en-US" sz="1200" dirty="0"/>
+          </a:p>
+        </p:txBody>
+      </p:sp>
+      <p:sp>
+        <p:nvSpPr>
+          <p:cNvPr id="10" name="Shape 8"/>
+          <p:cNvSpPr/>
+          <p:nvPr/>
+        </p:nvSpPr>
+        <p:spPr>
+          <a:xfrm>
+            <a:off x="438912" y="2542032"/>
+            <a:ext cx="8266176" cy="365760"/>
+          </a:xfrm>
+          <a:prstGeom prst="rect">
+            <a:avLst/>
+          </a:prstGeom>
+          <a:solidFill>
+            <a:srgbClr val="F5F6FC"/>
+          </a:solidFill>
+          <a:ln/>
+        </p:spPr>
+      </p:sp>
+      <p:sp>
+        <p:nvSpPr>
+          <p:cNvPr id="11" name="Text 9"/>
+          <p:cNvSpPr/>
+          <p:nvPr/>
+        </p:nvSpPr>
+        <p:spPr>
+          <a:xfrm>
+            <a:off x="566928" y="2542032"/>
+            <a:ext cx="548640" cy="365760"/>
+          </a:xfrm>
+          <a:prstGeom prst="rect">
+            <a:avLst/>
+          </a:prstGeom>
+          <a:noFill/>
+          <a:ln/>
+        </p:spPr>
+        <p:txBody>
+          <a:bodyPr wrap="square" lIns="0" tIns="0" rIns="0" bIns="0" rtlCol="0" anchor="ctr"/>
+          <a:lstStyle/>
+          <a:p>
+            <a:pPr indent="0" marL="0">
+              <a:buNone/>
+            </a:pPr>
+            <a:r>
+              <a:rPr lang="en-US" sz="1200" b="1" dirty="0">
+                <a:solidFill>
+                  <a:srgbClr val="3843AF"/>
+                </a:solidFill>
+                <a:latin typeface="Courier New" pitchFamily="34" charset="0"/>
+                <a:ea typeface="Courier New" pitchFamily="34" charset="-122"/>
+                <a:cs typeface="Courier New" pitchFamily="34" charset="-120"/>
+              </a:rPr>
+              <a:t>3</a:t>
+            </a:r>
+            <a:endParaRPr lang="en-US" sz="1200" dirty="0"/>
+          </a:p>
+        </p:txBody>
+      </p:sp>
+      <p:sp>
+        <p:nvSpPr>
+          <p:cNvPr id="12" name="Text 10"/>
+          <p:cNvSpPr/>
+          <p:nvPr/>
+        </p:nvSpPr>
+        <p:spPr>
+          <a:xfrm>
+            <a:off x="1115568" y="2542032"/>
+            <a:ext cx="7461504" cy="365760"/>
+          </a:xfrm>
+          <a:prstGeom prst="rect">
+            <a:avLst/>
+          </a:prstGeom>
+          <a:noFill/>
+          <a:ln/>
+        </p:spPr>
+        <p:txBody>
+          <a:bodyPr wrap="square" lIns="0" tIns="0" rIns="0" bIns="0" rtlCol="0" anchor="ctr"/>
+          <a:lstStyle/>
+          <a:p>
+            <a:pPr indent="0" marL="0">
+              <a:buNone/>
+            </a:pPr>
+            <a:r>
+              <a:rPr lang="en-US" sz="1200" dirty="0">
+                <a:solidFill>
+                  <a:srgbClr val="434A63"/>
+                </a:solidFill>
+                <a:latin typeface="Arial" pitchFamily="34" charset="0"/>
+                <a:ea typeface="Arial" pitchFamily="34" charset="-122"/>
+                <a:cs typeface="Arial" pitchFamily="34" charset="-120"/>
+              </a:rPr>
+              <a:t>Die Einordnung: Wessen Hardware, welcher Hypervisor-Typ – und woran erkennt man das?</a:t>
+            </a:r>
+            <a:endParaRPr lang="en-US" sz="1200" dirty="0"/>
+          </a:p>
+        </p:txBody>
+      </p:sp>
+      <p:sp>
+        <p:nvSpPr>
+          <p:cNvPr id="13" name="Text 11"/>
+          <p:cNvSpPr/>
+          <p:nvPr/>
+        </p:nvSpPr>
+        <p:spPr>
+          <a:xfrm>
+            <a:off x="566928" y="2907792"/>
+            <a:ext cx="548640" cy="365760"/>
+          </a:xfrm>
+          <a:prstGeom prst="rect">
+            <a:avLst/>
+          </a:prstGeom>
+          <a:noFill/>
+          <a:ln/>
+        </p:spPr>
+        <p:txBody>
+          <a:bodyPr wrap="square" lIns="0" tIns="0" rIns="0" bIns="0" rtlCol="0" anchor="ctr"/>
+          <a:lstStyle/>
+          <a:p>
+            <a:pPr indent="0" marL="0">
+              <a:buNone/>
+            </a:pPr>
+            <a:r>
+              <a:rPr lang="en-US" sz="1200" b="1" dirty="0">
+                <a:solidFill>
+                  <a:srgbClr val="3843AF"/>
+                </a:solidFill>
+                <a:latin typeface="Courier New" pitchFamily="34" charset="0"/>
+                <a:ea typeface="Courier New" pitchFamily="34" charset="-122"/>
+                <a:cs typeface="Courier New" pitchFamily="34" charset="-120"/>
+              </a:rPr>
+              <a:t>4</a:t>
+            </a:r>
+            <a:endParaRPr lang="en-US" sz="1200" dirty="0"/>
+          </a:p>
+        </p:txBody>
+      </p:sp>
+      <p:sp>
+        <p:nvSpPr>
+          <p:cNvPr id="14" name="Text 12"/>
+          <p:cNvSpPr/>
+          <p:nvPr/>
+        </p:nvSpPr>
+        <p:spPr>
+          <a:xfrm>
+            <a:off x="1115568" y="2907792"/>
+            <a:ext cx="7461504" cy="365760"/>
+          </a:xfrm>
+          <a:prstGeom prst="rect">
+            <a:avLst/>
+          </a:prstGeom>
+          <a:noFill/>
+          <a:ln/>
+        </p:spPr>
+        <p:txBody>
+          <a:bodyPr wrap="square" lIns="0" tIns="0" rIns="0" bIns="0" rtlCol="0" anchor="ctr"/>
+          <a:lstStyle/>
+          <a:p>
+            <a:pPr indent="0" marL="0">
+              <a:buNone/>
+            </a:pPr>
+            <a:r>
+              <a:rPr lang="en-US" sz="1200" dirty="0">
+                <a:solidFill>
+                  <a:srgbClr val="434A63"/>
+                </a:solidFill>
+                <a:latin typeface="Arial" pitchFamily="34" charset="0"/>
+                <a:ea typeface="Arial" pitchFamily="34" charset="-122"/>
+                <a:cs typeface="Arial" pitchFamily="34" charset="-120"/>
+              </a:rPr>
+              <a:t>Vergleich der Gruppen: Stecken alle Sandboxen im gleichen Netz-Muster?</a:t>
+            </a:r>
+            <a:endParaRPr lang="en-US" sz="1200" dirty="0"/>
+          </a:p>
+        </p:txBody>
+      </p:sp>
+      <p:sp>
+        <p:nvSpPr>
+          <p:cNvPr id="15" name="Shape 13"/>
+          <p:cNvSpPr/>
+          <p:nvPr/>
+        </p:nvSpPr>
+        <p:spPr>
+          <a:xfrm>
+            <a:off x="566928" y="4069080"/>
+            <a:ext cx="32004" cy="256032"/>
           </a:xfrm>
           <a:prstGeom prst="rect">
             <a:avLst/>
@@ -5579,350 +5256,7 @@
       </p:sp>
       <p:sp>
         <p:nvSpPr>
-          <p:cNvPr id="7" name="Text 5"/>
-          <p:cNvSpPr/>
-          <p:nvPr/>
-        </p:nvSpPr>
-        <p:spPr>
-          <a:xfrm>
-            <a:off x="804672" y="1975104"/>
-            <a:ext cx="2121408" cy="256032"/>
-          </a:xfrm>
-          <a:prstGeom prst="rect">
-            <a:avLst/>
-          </a:prstGeom>
-          <a:noFill/>
-          <a:ln/>
-        </p:spPr>
-        <p:txBody>
-          <a:bodyPr wrap="square" lIns="0" tIns="0" rIns="0" bIns="0" rtlCol="0" anchor="t"/>
-          <a:lstStyle/>
-          <a:p>
-            <a:pPr indent="0" marL="0">
-              <a:buNone/>
-            </a:pPr>
-            <a:r>
-              <a:rPr lang="en-US" sz="1300" b="1" dirty="0">
-                <a:solidFill>
-                  <a:srgbClr val="272E52"/>
-                </a:solidFill>
-                <a:latin typeface="Arial" pitchFamily="34" charset="0"/>
-                <a:ea typeface="Arial" pitchFamily="34" charset="-122"/>
-                <a:cs typeface="Arial" pitchFamily="34" charset="-120"/>
-              </a:rPr>
-              <a:t>In diesem Kurs</a:t>
-            </a:r>
-            <a:endParaRPr lang="en-US" sz="1300" dirty="0"/>
-          </a:p>
-        </p:txBody>
-      </p:sp>
-      <p:sp>
-        <p:nvSpPr>
-          <p:cNvPr id="8" name="Text 6"/>
-          <p:cNvSpPr/>
-          <p:nvPr/>
-        </p:nvSpPr>
-        <p:spPr>
-          <a:xfrm>
-            <a:off x="804672" y="2276856"/>
-            <a:ext cx="2121408" cy="1170432"/>
-          </a:xfrm>
-          <a:prstGeom prst="rect">
-            <a:avLst/>
-          </a:prstGeom>
-          <a:noFill/>
-          <a:ln/>
-        </p:spPr>
-        <p:txBody>
-          <a:bodyPr wrap="square" lIns="0" tIns="0" rIns="0" bIns="0" rtlCol="0" anchor="t"/>
-          <a:lstStyle/>
-          <a:p>
-            <a:pPr indent="0" marL="0">
-              <a:lnSpc>
-                <a:spcPct val="92000"/>
-              </a:lnSpc>
-              <a:buNone/>
-            </a:pPr>
-            <a:r>
-              <a:rPr lang="en-US" sz="1100" dirty="0">
-                <a:solidFill>
-                  <a:srgbClr val="434A63"/>
-                </a:solidFill>
-                <a:latin typeface="Arial" pitchFamily="34" charset="0"/>
-                <a:ea typeface="Arial" pitchFamily="34" charset="-122"/>
-                <a:cs typeface="Arial" pitchFamily="34" charset="-120"/>
-              </a:rPr>
-              <a:t>Docker Desktop nutzt intern eine VM. Kubernetes-Cluster zum Lernen: VMs. Die Cloud: VMs.</a:t>
-            </a:r>
-            <a:endParaRPr lang="en-US" sz="1100" dirty="0"/>
-          </a:p>
-        </p:txBody>
-      </p:sp>
-      <p:sp>
-        <p:nvSpPr>
-          <p:cNvPr id="9" name="Shape 7"/>
-          <p:cNvSpPr/>
-          <p:nvPr/>
-        </p:nvSpPr>
-        <p:spPr>
-          <a:xfrm>
-            <a:off x="3310128" y="1828800"/>
-            <a:ext cx="2523744" cy="1737360"/>
-          </a:xfrm>
-          <a:prstGeom prst="rect">
-            <a:avLst/>
-          </a:prstGeom>
-          <a:solidFill>
-            <a:srgbClr val="F5F6FC"/>
-          </a:solidFill>
-          <a:ln/>
-        </p:spPr>
-      </p:sp>
-      <p:sp>
-        <p:nvSpPr>
-          <p:cNvPr id="10" name="Shape 8"/>
-          <p:cNvSpPr/>
-          <p:nvPr/>
-        </p:nvSpPr>
-        <p:spPr>
-          <a:xfrm>
-            <a:off x="3310128" y="1828800"/>
-            <a:ext cx="41148" cy="1737360"/>
-          </a:xfrm>
-          <a:prstGeom prst="rect">
-            <a:avLst/>
-          </a:prstGeom>
-          <a:solidFill>
-            <a:srgbClr val="3843AF"/>
-          </a:solidFill>
-          <a:ln/>
-        </p:spPr>
-      </p:sp>
-      <p:sp>
-        <p:nvSpPr>
-          <p:cNvPr id="11" name="Text 9"/>
-          <p:cNvSpPr/>
-          <p:nvPr/>
-        </p:nvSpPr>
-        <p:spPr>
-          <a:xfrm>
-            <a:off x="3547872" y="1975104"/>
-            <a:ext cx="2121408" cy="256032"/>
-          </a:xfrm>
-          <a:prstGeom prst="rect">
-            <a:avLst/>
-          </a:prstGeom>
-          <a:noFill/>
-          <a:ln/>
-        </p:spPr>
-        <p:txBody>
-          <a:bodyPr wrap="square" lIns="0" tIns="0" rIns="0" bIns="0" rtlCol="0" anchor="t"/>
-          <a:lstStyle/>
-          <a:p>
-            <a:pPr indent="0" marL="0">
-              <a:buNone/>
-            </a:pPr>
-            <a:r>
-              <a:rPr lang="en-US" sz="1300" b="1" dirty="0">
-                <a:solidFill>
-                  <a:srgbClr val="272E52"/>
-                </a:solidFill>
-                <a:latin typeface="Arial" pitchFamily="34" charset="0"/>
-                <a:ea typeface="Arial" pitchFamily="34" charset="-122"/>
-                <a:cs typeface="Arial" pitchFamily="34" charset="-120"/>
-              </a:rPr>
-              <a:t>Im Betrieb</a:t>
-            </a:r>
-            <a:endParaRPr lang="en-US" sz="1300" dirty="0"/>
-          </a:p>
-        </p:txBody>
-      </p:sp>
-      <p:sp>
-        <p:nvSpPr>
-          <p:cNvPr id="12" name="Text 10"/>
-          <p:cNvSpPr/>
-          <p:nvPr/>
-        </p:nvSpPr>
-        <p:spPr>
-          <a:xfrm>
-            <a:off x="3547872" y="2276856"/>
-            <a:ext cx="2121408" cy="1170432"/>
-          </a:xfrm>
-          <a:prstGeom prst="rect">
-            <a:avLst/>
-          </a:prstGeom>
-          <a:noFill/>
-          <a:ln/>
-        </p:spPr>
-        <p:txBody>
-          <a:bodyPr wrap="square" lIns="0" tIns="0" rIns="0" bIns="0" rtlCol="0" anchor="t"/>
-          <a:lstStyle/>
-          <a:p>
-            <a:pPr indent="0" marL="0">
-              <a:lnSpc>
-                <a:spcPct val="92000"/>
-              </a:lnSpc>
-              <a:buNone/>
-            </a:pPr>
-            <a:r>
-              <a:rPr lang="en-US" sz="1100" dirty="0">
-                <a:solidFill>
-                  <a:srgbClr val="434A63"/>
-                </a:solidFill>
-                <a:latin typeface="Arial" pitchFamily="34" charset="0"/>
-                <a:ea typeface="Arial" pitchFamily="34" charset="-122"/>
-                <a:cs typeface="Arial" pitchFamily="34" charset="-120"/>
-              </a:rPr>
-              <a:t>Fast jeder Firmenserver läuft heute als VM auf einem Typ-1-Hypervisor – Umzug und Neustart in Minuten.</a:t>
-            </a:r>
-            <a:endParaRPr lang="en-US" sz="1100" dirty="0"/>
-          </a:p>
-        </p:txBody>
-      </p:sp>
-      <p:sp>
-        <p:nvSpPr>
-          <p:cNvPr id="13" name="Shape 11"/>
-          <p:cNvSpPr/>
-          <p:nvPr/>
-        </p:nvSpPr>
-        <p:spPr>
-          <a:xfrm>
-            <a:off x="6053328" y="1828800"/>
-            <a:ext cx="2523744" cy="1737360"/>
-          </a:xfrm>
-          <a:prstGeom prst="rect">
-            <a:avLst/>
-          </a:prstGeom>
-          <a:solidFill>
-            <a:srgbClr val="F5F6FC"/>
-          </a:solidFill>
-          <a:ln/>
-        </p:spPr>
-      </p:sp>
-      <p:sp>
-        <p:nvSpPr>
-          <p:cNvPr id="14" name="Shape 12"/>
-          <p:cNvSpPr/>
-          <p:nvPr/>
-        </p:nvSpPr>
-        <p:spPr>
-          <a:xfrm>
-            <a:off x="6053328" y="1828800"/>
-            <a:ext cx="41148" cy="1737360"/>
-          </a:xfrm>
-          <a:prstGeom prst="rect">
-            <a:avLst/>
-          </a:prstGeom>
-          <a:solidFill>
-            <a:srgbClr val="3843AF"/>
-          </a:solidFill>
-          <a:ln/>
-        </p:spPr>
-      </p:sp>
-      <p:sp>
-        <p:nvSpPr>
-          <p:cNvPr id="15" name="Text 13"/>
-          <p:cNvSpPr/>
-          <p:nvPr/>
-        </p:nvSpPr>
-        <p:spPr>
-          <a:xfrm>
-            <a:off x="6291072" y="1975104"/>
-            <a:ext cx="2121408" cy="256032"/>
-          </a:xfrm>
-          <a:prstGeom prst="rect">
-            <a:avLst/>
-          </a:prstGeom>
-          <a:noFill/>
-          <a:ln/>
-        </p:spPr>
-        <p:txBody>
-          <a:bodyPr wrap="square" lIns="0" tIns="0" rIns="0" bIns="0" rtlCol="0" anchor="t"/>
-          <a:lstStyle/>
-          <a:p>
-            <a:pPr indent="0" marL="0">
-              <a:buNone/>
-            </a:pPr>
-            <a:r>
-              <a:rPr lang="en-US" sz="1300" b="1" dirty="0">
-                <a:solidFill>
-                  <a:srgbClr val="272E52"/>
-                </a:solidFill>
-                <a:latin typeface="Arial" pitchFamily="34" charset="0"/>
-                <a:ea typeface="Arial" pitchFamily="34" charset="-122"/>
-                <a:cs typeface="Arial" pitchFamily="34" charset="-120"/>
-              </a:rPr>
-              <a:t>Am eigenen Rechner</a:t>
-            </a:r>
-            <a:endParaRPr lang="en-US" sz="1300" dirty="0"/>
-          </a:p>
-        </p:txBody>
-      </p:sp>
-      <p:sp>
-        <p:nvSpPr>
           <p:cNvPr id="16" name="Text 14"/>
-          <p:cNvSpPr/>
-          <p:nvPr/>
-        </p:nvSpPr>
-        <p:spPr>
-          <a:xfrm>
-            <a:off x="6291072" y="2276856"/>
-            <a:ext cx="2121408" cy="1170432"/>
-          </a:xfrm>
-          <a:prstGeom prst="rect">
-            <a:avLst/>
-          </a:prstGeom>
-          <a:noFill/>
-          <a:ln/>
-        </p:spPr>
-        <p:txBody>
-          <a:bodyPr wrap="square" lIns="0" tIns="0" rIns="0" bIns="0" rtlCol="0" anchor="t"/>
-          <a:lstStyle/>
-          <a:p>
-            <a:pPr indent="0" marL="0">
-              <a:lnSpc>
-                <a:spcPct val="92000"/>
-              </a:lnSpc>
-              <a:buNone/>
-            </a:pPr>
-            <a:r>
-              <a:rPr lang="en-US" sz="1100" dirty="0">
-                <a:solidFill>
-                  <a:srgbClr val="434A63"/>
-                </a:solidFill>
-                <a:latin typeface="Arial" pitchFamily="34" charset="0"/>
-                <a:ea typeface="Arial" pitchFamily="34" charset="-122"/>
-                <a:cs typeface="Arial" pitchFamily="34" charset="-120"/>
-              </a:rPr>
-              <a:t>Gefahrlos testen: eine VM kaputt spielen kostet nichts – löschen, neu starten, weiter.</a:t>
-            </a:r>
-            <a:endParaRPr lang="en-US" sz="1100" dirty="0"/>
-          </a:p>
-        </p:txBody>
-      </p:sp>
-      <p:sp>
-        <p:nvSpPr>
-          <p:cNvPr id="17" name="Shape 15"/>
-          <p:cNvSpPr/>
-          <p:nvPr/>
-        </p:nvSpPr>
-        <p:spPr>
-          <a:xfrm>
-            <a:off x="566928" y="4069080"/>
-            <a:ext cx="32004" cy="256032"/>
-          </a:xfrm>
-          <a:prstGeom prst="rect">
-            <a:avLst/>
-          </a:prstGeom>
-          <a:solidFill>
-            <a:srgbClr val="3843AF"/>
-          </a:solidFill>
-          <a:ln/>
-        </p:spPr>
-      </p:sp>
-      <p:sp>
-        <p:nvSpPr>
-          <p:cNvPr id="18" name="Text 16"/>
           <p:cNvSpPr/>
           <p:nvPr/>
         </p:nvSpPr>
@@ -5953,7 +5287,7 @@
                 <a:ea typeface="Arial" pitchFamily="34" charset="-122"/>
                 <a:cs typeface="Arial" pitchFamily="34" charset="-120"/>
               </a:rPr>
-              <a:t>Merksatz des Abends: Eine VM ist ein ganzer Rechner aus Software – und Wegwerfen ist erlaubt.</a:t>
+              <a:t>Merksatz: „Cloud-Server“ heißt fast immer – eine VM auf einem Typ-1-Hypervisor, den ihr nie zu Gesicht bekommt.</a:t>
             </a:r>
             <a:endParaRPr lang="en-US" sz="1200" dirty="0"/>
           </a:p>
@@ -5961,7 +5295,7 @@
       </p:sp>
       <p:sp>
         <p:nvSpPr>
-          <p:cNvPr id="19" name="Shape 17"/>
+          <p:cNvPr id="17" name="Shape 15"/>
           <p:cNvSpPr/>
           <p:nvPr/>
         </p:nvSpPr>
@@ -5984,7 +5318,7 @@
       </p:sp>
       <p:sp>
         <p:nvSpPr>
-          <p:cNvPr id="20" name="Text 18"/>
+          <p:cNvPr id="18" name="Text 16"/>
           <p:cNvSpPr/>
           <p:nvPr/>
         </p:nvSpPr>
@@ -6023,7 +5357,7 @@
       </p:sp>
       <p:sp>
         <p:nvSpPr>
-          <p:cNvPr id="21" name="Text 19"/>
+          <p:cNvPr id="19" name="Text 17"/>
           <p:cNvSpPr/>
           <p:nvPr/>
         </p:nvSpPr>
@@ -6054,7 +5388,7 @@
                 <a:ea typeface="Arial" pitchFamily="34" charset="-122"/>
                 <a:cs typeface="Arial" pitchFamily="34" charset="-120"/>
               </a:rPr>
-              <a:t>11/12</a:t>
+              <a:t>11/13</a:t>
             </a:r>
             <a:endParaRPr lang="en-US" sz="1050" dirty="0"/>
           </a:p>
@@ -6145,7 +5479,7 @@
                 <a:ea typeface="Arial" pitchFamily="34" charset="-122"/>
                 <a:cs typeface="Arial" pitchFamily="34" charset="-120"/>
               </a:rPr>
-              <a:t>AUSBLICK</a:t>
+              <a:t>STÄRKEN UND GRENZEN</a:t>
             </a:r>
             <a:endParaRPr lang="en-US" sz="1150" dirty="0"/>
           </a:p>
@@ -6184,81 +5518,46 @@
                 <a:ea typeface="Arial" pitchFamily="34" charset="-122"/>
                 <a:cs typeface="Arial" pitchFamily="34" charset="-120"/>
               </a:rPr>
-              <a:t>Bis Mittwoch</a:t>
+              <a:t>Wann VM – und wann nicht?</a:t>
             </a:r>
             <a:endParaRPr lang="en-US" sz="2600" dirty="0"/>
           </a:p>
         </p:txBody>
       </p:sp>
-      <p:sp>
-        <p:nvSpPr>
-          <p:cNvPr id="5" name="Text 3"/>
-          <p:cNvSpPr/>
-          <p:nvPr/>
-        </p:nvSpPr>
-        <p:spPr>
-          <a:xfrm>
-            <a:off x="566928" y="1444752"/>
-            <a:ext cx="8010144" cy="438912"/>
-          </a:xfrm>
-          <a:prstGeom prst="rect">
-            <a:avLst/>
-          </a:prstGeom>
-          <a:noFill/>
-          <a:ln/>
-        </p:spPr>
-        <p:txBody>
-          <a:bodyPr wrap="square" lIns="0" tIns="0" rIns="0" bIns="0" rtlCol="0" anchor="t"/>
-          <a:lstStyle/>
-          <a:p>
-            <a:pPr indent="0" marL="0">
-              <a:buNone/>
-            </a:pPr>
-            <a:r>
-              <a:rPr lang="en-US" sz="1300" dirty="0">
-                <a:solidFill>
-                  <a:srgbClr val="5C6377"/>
-                </a:solidFill>
-                <a:latin typeface="Arial" pitchFamily="34" charset="0"/>
-                <a:ea typeface="Arial" pitchFamily="34" charset="-122"/>
-                <a:cs typeface="Arial" pitchFamily="34" charset="-120"/>
-              </a:rPr>
-              <a:t>Mittwoch schauen wir in die VM hinein – und machen sie kaputt. Mit Absicht.</a:t>
-            </a:r>
-            <a:endParaRPr lang="en-US" sz="1300" dirty="0"/>
-          </a:p>
-        </p:txBody>
-      </p:sp>
-      <p:sp>
-        <p:nvSpPr>
-          <p:cNvPr id="6" name="Shape 4"/>
-          <p:cNvSpPr/>
-          <p:nvPr/>
-        </p:nvSpPr>
-        <p:spPr>
-          <a:xfrm>
-            <a:off x="566928" y="1975104"/>
-            <a:ext cx="2523744" cy="1920240"/>
-          </a:xfrm>
-          <a:prstGeom prst="rect">
-            <a:avLst/>
-          </a:prstGeom>
-          <a:solidFill>
-            <a:srgbClr val="F5F6FC"/>
-          </a:solidFill>
-          <a:ln/>
-        </p:spPr>
-      </p:sp>
-      <p:sp>
-        <p:nvSpPr>
-          <p:cNvPr id="7" name="Shape 5"/>
-          <p:cNvSpPr/>
-          <p:nvPr/>
-        </p:nvSpPr>
-        <p:spPr>
-          <a:xfrm>
-            <a:off x="566928" y="1975104"/>
-            <a:ext cx="41148" cy="1920240"/>
+      <p:pic>
+        <p:nvPicPr>
+          <p:cNvPr id="5" name="Image 0" descr="/Users/jacobmenge/Desktop/kurs-26.2b-orga/folienwerkstatt/assets/diagramme/virt-vor-nach.png">    </p:cNvPr>
+          <p:cNvPicPr>
+            <a:picLocks noChangeAspect="1"/>
+          </p:cNvPicPr>
+          <p:nvPr/>
+        </p:nvPicPr>
+        <p:blipFill>
+          <a:blip r:embed="rId1"/>
+          <a:stretch>
+            <a:fillRect/>
+          </a:stretch>
+        </p:blipFill>
+        <p:spPr>
+          <a:xfrm>
+            <a:off x="566928" y="1517904"/>
+            <a:ext cx="8010144" cy="2194560"/>
+          </a:xfrm>
+          <a:prstGeom prst="rect">
+            <a:avLst/>
+          </a:prstGeom>
+        </p:spPr>
+      </p:pic>
+      <p:sp>
+        <p:nvSpPr>
+          <p:cNvPr id="6" name="Shape 3"/>
+          <p:cNvSpPr/>
+          <p:nvPr/>
+        </p:nvSpPr>
+        <p:spPr>
+          <a:xfrm>
+            <a:off x="566928" y="4023360"/>
+            <a:ext cx="32004" cy="256032"/>
           </a:xfrm>
           <a:prstGeom prst="rect">
             <a:avLst/>
@@ -6271,72 +5570,30 @@
       </p:sp>
       <p:sp>
         <p:nvSpPr>
-          <p:cNvPr id="8" name="Text 6"/>
-          <p:cNvSpPr/>
-          <p:nvPr/>
-        </p:nvSpPr>
-        <p:spPr>
-          <a:xfrm>
-            <a:off x="804672" y="2121408"/>
-            <a:ext cx="2121408" cy="256032"/>
-          </a:xfrm>
-          <a:prstGeom prst="rect">
-            <a:avLst/>
-          </a:prstGeom>
-          <a:noFill/>
-          <a:ln/>
-        </p:spPr>
-        <p:txBody>
-          <a:bodyPr wrap="square" lIns="0" tIns="0" rIns="0" bIns="0" rtlCol="0" anchor="t"/>
-          <a:lstStyle/>
-          <a:p>
-            <a:pPr indent="0" marL="0">
-              <a:buNone/>
-            </a:pPr>
-            <a:r>
-              <a:rPr lang="en-US" sz="1300" b="1" dirty="0">
-                <a:solidFill>
-                  <a:srgbClr val="272E52"/>
-                </a:solidFill>
-                <a:latin typeface="Arial" pitchFamily="34" charset="0"/>
-                <a:ea typeface="Arial" pitchFamily="34" charset="-122"/>
-                <a:cs typeface="Arial" pitchFamily="34" charset="-120"/>
-              </a:rPr>
-              <a:t>Virtuelle Netze</a:t>
-            </a:r>
-            <a:endParaRPr lang="en-US" sz="1300" dirty="0"/>
-          </a:p>
-        </p:txBody>
-      </p:sp>
-      <p:sp>
-        <p:nvSpPr>
-          <p:cNvPr id="9" name="Text 7"/>
-          <p:cNvSpPr/>
-          <p:nvPr/>
-        </p:nvSpPr>
-        <p:spPr>
-          <a:xfrm>
-            <a:off x="804672" y="2423160"/>
-            <a:ext cx="2121408" cy="1353312"/>
-          </a:xfrm>
-          <a:prstGeom prst="rect">
-            <a:avLst/>
-          </a:prstGeom>
-          <a:noFill/>
-          <a:ln/>
-        </p:spPr>
-        <p:txBody>
-          <a:bodyPr wrap="square" lIns="0" tIns="0" rIns="0" bIns="0" rtlCol="0" anchor="t"/>
-          <a:lstStyle/>
-          <a:p>
-            <a:pPr indent="0" marL="0">
-              <a:lnSpc>
-                <a:spcPct val="92000"/>
-              </a:lnSpc>
-              <a:buNone/>
-            </a:pPr>
-            <a:r>
-              <a:rPr lang="en-US" sz="1150" dirty="0">
+          <p:cNvPr id="7" name="Text 4"/>
+          <p:cNvSpPr/>
+          <p:nvPr/>
+        </p:nvSpPr>
+        <p:spPr>
+          <a:xfrm>
+            <a:off x="749808" y="3977640"/>
+            <a:ext cx="7827264" cy="402336"/>
+          </a:xfrm>
+          <a:prstGeom prst="rect">
+            <a:avLst/>
+          </a:prstGeom>
+          <a:noFill/>
+          <a:ln/>
+        </p:spPr>
+        <p:txBody>
+          <a:bodyPr wrap="square" lIns="0" tIns="0" rIns="0" bIns="0" rtlCol="0" anchor="ctr"/>
+          <a:lstStyle/>
+          <a:p>
+            <a:pPr indent="0" marL="0">
+              <a:buNone/>
+            </a:pPr>
+            <a:r>
+              <a:rPr lang="en-US" sz="1200" b="1" dirty="0">
                 <a:solidFill>
                   <a:srgbClr val="434A63"/>
                 </a:solidFill>
@@ -6344,308 +5601,7 @@
                 <a:ea typeface="Arial" pitchFamily="34" charset="-122"/>
                 <a:cs typeface="Arial" pitchFamily="34" charset="-120"/>
               </a:rPr>
-              <a:t>Welche Adresse hat eure VM, warum genau diese – und wie kommt sie ins Netz? Euer Netzwerk-Wissen, eine Etage tiefer.</a:t>
-            </a:r>
-            <a:endParaRPr lang="en-US" sz="1150" dirty="0"/>
-          </a:p>
-        </p:txBody>
-      </p:sp>
-      <p:sp>
-        <p:nvSpPr>
-          <p:cNvPr id="10" name="Shape 8"/>
-          <p:cNvSpPr/>
-          <p:nvPr/>
-        </p:nvSpPr>
-        <p:spPr>
-          <a:xfrm>
-            <a:off x="3310128" y="1975104"/>
-            <a:ext cx="2523744" cy="1920240"/>
-          </a:xfrm>
-          <a:prstGeom prst="rect">
-            <a:avLst/>
-          </a:prstGeom>
-          <a:solidFill>
-            <a:srgbClr val="F5F6FC"/>
-          </a:solidFill>
-          <a:ln/>
-        </p:spPr>
-      </p:sp>
-      <p:sp>
-        <p:nvSpPr>
-          <p:cNvPr id="11" name="Shape 9"/>
-          <p:cNvSpPr/>
-          <p:nvPr/>
-        </p:nvSpPr>
-        <p:spPr>
-          <a:xfrm>
-            <a:off x="3310128" y="1975104"/>
-            <a:ext cx="41148" cy="1920240"/>
-          </a:xfrm>
-          <a:prstGeom prst="rect">
-            <a:avLst/>
-          </a:prstGeom>
-          <a:solidFill>
-            <a:srgbClr val="3843AF"/>
-          </a:solidFill>
-          <a:ln/>
-        </p:spPr>
-      </p:sp>
-      <p:sp>
-        <p:nvSpPr>
-          <p:cNvPr id="12" name="Text 10"/>
-          <p:cNvSpPr/>
-          <p:nvPr/>
-        </p:nvSpPr>
-        <p:spPr>
-          <a:xfrm>
-            <a:off x="3547872" y="2121408"/>
-            <a:ext cx="2121408" cy="256032"/>
-          </a:xfrm>
-          <a:prstGeom prst="rect">
-            <a:avLst/>
-          </a:prstGeom>
-          <a:noFill/>
-          <a:ln/>
-        </p:spPr>
-        <p:txBody>
-          <a:bodyPr wrap="square" lIns="0" tIns="0" rIns="0" bIns="0" rtlCol="0" anchor="t"/>
-          <a:lstStyle/>
-          <a:p>
-            <a:pPr indent="0" marL="0">
-              <a:buNone/>
-            </a:pPr>
-            <a:r>
-              <a:rPr lang="en-US" sz="1300" b="1" dirty="0">
-                <a:solidFill>
-                  <a:srgbClr val="272E52"/>
-                </a:solidFill>
-                <a:latin typeface="Arial" pitchFamily="34" charset="0"/>
-                <a:ea typeface="Arial" pitchFamily="34" charset="-122"/>
-                <a:cs typeface="Arial" pitchFamily="34" charset="-120"/>
-              </a:rPr>
-              <a:t>Snapshots</a:t>
-            </a:r>
-            <a:endParaRPr lang="en-US" sz="1300" dirty="0"/>
-          </a:p>
-        </p:txBody>
-      </p:sp>
-      <p:sp>
-        <p:nvSpPr>
-          <p:cNvPr id="13" name="Text 11"/>
-          <p:cNvSpPr/>
-          <p:nvPr/>
-        </p:nvSpPr>
-        <p:spPr>
-          <a:xfrm>
-            <a:off x="3547872" y="2423160"/>
-            <a:ext cx="2121408" cy="1353312"/>
-          </a:xfrm>
-          <a:prstGeom prst="rect">
-            <a:avLst/>
-          </a:prstGeom>
-          <a:noFill/>
-          <a:ln/>
-        </p:spPr>
-        <p:txBody>
-          <a:bodyPr wrap="square" lIns="0" tIns="0" rIns="0" bIns="0" rtlCol="0" anchor="t"/>
-          <a:lstStyle/>
-          <a:p>
-            <a:pPr indent="0" marL="0">
-              <a:lnSpc>
-                <a:spcPct val="92000"/>
-              </a:lnSpc>
-              <a:buNone/>
-            </a:pPr>
-            <a:r>
-              <a:rPr lang="en-US" sz="1150" dirty="0">
-                <a:solidFill>
-                  <a:srgbClr val="434A63"/>
-                </a:solidFill>
-                <a:latin typeface="Arial" pitchFamily="34" charset="0"/>
-                <a:ea typeface="Arial" pitchFamily="34" charset="-122"/>
-                <a:cs typeface="Arial" pitchFamily="34" charset="-120"/>
-              </a:rPr>
-              <a:t>Der Zustand der VM als Lesezeichen: kaputt machen, zurückspringen, weitermachen.</a:t>
-            </a:r>
-            <a:endParaRPr lang="en-US" sz="1150" dirty="0"/>
-          </a:p>
-        </p:txBody>
-      </p:sp>
-      <p:sp>
-        <p:nvSpPr>
-          <p:cNvPr id="14" name="Shape 12"/>
-          <p:cNvSpPr/>
-          <p:nvPr/>
-        </p:nvSpPr>
-        <p:spPr>
-          <a:xfrm>
-            <a:off x="6053328" y="1975104"/>
-            <a:ext cx="2523744" cy="1920240"/>
-          </a:xfrm>
-          <a:prstGeom prst="rect">
-            <a:avLst/>
-          </a:prstGeom>
-          <a:solidFill>
-            <a:srgbClr val="F5F6FC"/>
-          </a:solidFill>
-          <a:ln/>
-        </p:spPr>
-      </p:sp>
-      <p:sp>
-        <p:nvSpPr>
-          <p:cNvPr id="15" name="Shape 13"/>
-          <p:cNvSpPr/>
-          <p:nvPr/>
-        </p:nvSpPr>
-        <p:spPr>
-          <a:xfrm>
-            <a:off x="6053328" y="1975104"/>
-            <a:ext cx="41148" cy="1920240"/>
-          </a:xfrm>
-          <a:prstGeom prst="rect">
-            <a:avLst/>
-          </a:prstGeom>
-          <a:solidFill>
-            <a:srgbClr val="3843AF"/>
-          </a:solidFill>
-          <a:ln/>
-        </p:spPr>
-      </p:sp>
-      <p:sp>
-        <p:nvSpPr>
-          <p:cNvPr id="16" name="Text 14"/>
-          <p:cNvSpPr/>
-          <p:nvPr/>
-        </p:nvSpPr>
-        <p:spPr>
-          <a:xfrm>
-            <a:off x="6291072" y="2121408"/>
-            <a:ext cx="2121408" cy="256032"/>
-          </a:xfrm>
-          <a:prstGeom prst="rect">
-            <a:avLst/>
-          </a:prstGeom>
-          <a:noFill/>
-          <a:ln/>
-        </p:spPr>
-        <p:txBody>
-          <a:bodyPr wrap="square" lIns="0" tIns="0" rIns="0" bIns="0" rtlCol="0" anchor="t"/>
-          <a:lstStyle/>
-          <a:p>
-            <a:pPr indent="0" marL="0">
-              <a:buNone/>
-            </a:pPr>
-            <a:r>
-              <a:rPr lang="en-US" sz="1300" b="1" dirty="0">
-                <a:solidFill>
-                  <a:srgbClr val="272E52"/>
-                </a:solidFill>
-                <a:latin typeface="Arial" pitchFamily="34" charset="0"/>
-                <a:ea typeface="Arial" pitchFamily="34" charset="-122"/>
-                <a:cs typeface="Arial" pitchFamily="34" charset="-120"/>
-              </a:rPr>
-              <a:t>VM behalten!</a:t>
-            </a:r>
-            <a:endParaRPr lang="en-US" sz="1300" dirty="0"/>
-          </a:p>
-        </p:txBody>
-      </p:sp>
-      <p:sp>
-        <p:nvSpPr>
-          <p:cNvPr id="17" name="Text 15"/>
-          <p:cNvSpPr/>
-          <p:nvPr/>
-        </p:nvSpPr>
-        <p:spPr>
-          <a:xfrm>
-            <a:off x="6291072" y="2423160"/>
-            <a:ext cx="2121408" cy="1353312"/>
-          </a:xfrm>
-          <a:prstGeom prst="rect">
-            <a:avLst/>
-          </a:prstGeom>
-          <a:noFill/>
-          <a:ln/>
-        </p:spPr>
-        <p:txBody>
-          <a:bodyPr wrap="square" lIns="0" tIns="0" rIns="0" bIns="0" rtlCol="0" anchor="t"/>
-          <a:lstStyle/>
-          <a:p>
-            <a:pPr indent="0" marL="0">
-              <a:lnSpc>
-                <a:spcPct val="92000"/>
-              </a:lnSpc>
-              <a:buNone/>
-            </a:pPr>
-            <a:r>
-              <a:rPr lang="en-US" sz="1150" dirty="0">
-                <a:solidFill>
-                  <a:srgbClr val="434A63"/>
-                </a:solidFill>
-                <a:latin typeface="Arial" pitchFamily="34" charset="0"/>
-                <a:ea typeface="Arial" pitchFamily="34" charset="-122"/>
-                <a:cs typeface="Arial" pitchFamily="34" charset="-120"/>
-              </a:rPr>
-              <a:t>Löscht eure heutige VM nicht komplett – Mittwoch experimentieren wir an ihr weiter. Gestoppt ist okay.</a:t>
-            </a:r>
-            <a:endParaRPr lang="en-US" sz="1150" dirty="0"/>
-          </a:p>
-        </p:txBody>
-      </p:sp>
-      <p:sp>
-        <p:nvSpPr>
-          <p:cNvPr id="18" name="Shape 16"/>
-          <p:cNvSpPr/>
-          <p:nvPr/>
-        </p:nvSpPr>
-        <p:spPr>
-          <a:xfrm>
-            <a:off x="566928" y="4160520"/>
-            <a:ext cx="32004" cy="256032"/>
-          </a:xfrm>
-          <a:prstGeom prst="rect">
-            <a:avLst/>
-          </a:prstGeom>
-          <a:solidFill>
-            <a:srgbClr val="3843AF"/>
-          </a:solidFill>
-          <a:ln/>
-        </p:spPr>
-      </p:sp>
-      <p:sp>
-        <p:nvSpPr>
-          <p:cNvPr id="19" name="Text 17"/>
-          <p:cNvSpPr/>
-          <p:nvPr/>
-        </p:nvSpPr>
-        <p:spPr>
-          <a:xfrm>
-            <a:off x="749808" y="4114800"/>
-            <a:ext cx="7827264" cy="402336"/>
-          </a:xfrm>
-          <a:prstGeom prst="rect">
-            <a:avLst/>
-          </a:prstGeom>
-          <a:noFill/>
-          <a:ln/>
-        </p:spPr>
-        <p:txBody>
-          <a:bodyPr wrap="square" lIns="0" tIns="0" rIns="0" bIns="0" rtlCol="0" anchor="ctr"/>
-          <a:lstStyle/>
-          <a:p>
-            <a:pPr indent="0" marL="0">
-              <a:buNone/>
-            </a:pPr>
-            <a:r>
-              <a:rPr lang="en-US" sz="1200" b="1" dirty="0">
-                <a:solidFill>
-                  <a:srgbClr val="434A63"/>
-                </a:solidFill>
-                <a:latin typeface="Arial" pitchFamily="34" charset="0"/>
-                <a:ea typeface="Arial" pitchFamily="34" charset="-122"/>
-                <a:cs typeface="Arial" pitchFamily="34" charset="-120"/>
-              </a:rPr>
-              <a:t>Nächster Termin: Mittwoch, 9. September, 18:00 Uhr – virtuelle Netze, Speicher und Snapshots.</a:t>
+              <a:t>Diese Abwägung ist Prüfstein jeder Infrastruktur-Entscheidung – und die letzte Zeile ist der Cliffhanger für Mittwoch.</a:t>
             </a:r>
             <a:endParaRPr lang="en-US" sz="1200" dirty="0"/>
           </a:p>
@@ -6653,7 +5609,7 @@
       </p:sp>
       <p:sp>
         <p:nvSpPr>
-          <p:cNvPr id="20" name="Shape 18"/>
+          <p:cNvPr id="8" name="Shape 5"/>
           <p:cNvSpPr/>
           <p:nvPr/>
         </p:nvSpPr>
@@ -6676,7 +5632,7 @@
       </p:sp>
       <p:sp>
         <p:nvSpPr>
-          <p:cNvPr id="21" name="Text 19"/>
+          <p:cNvPr id="9" name="Text 6"/>
           <p:cNvSpPr/>
           <p:nvPr/>
         </p:nvSpPr>
@@ -6707,7 +5663,7 @@
                 <a:ea typeface="Arial" pitchFamily="34" charset="-122"/>
                 <a:cs typeface="Arial" pitchFamily="34" charset="-120"/>
               </a:rPr>
-              <a:t>Abschluss</a:t>
+              <a:t>Auswertung</a:t>
             </a:r>
             <a:endParaRPr lang="en-US" sz="1050" dirty="0"/>
           </a:p>
@@ -6715,7 +5671,7 @@
       </p:sp>
       <p:sp>
         <p:nvSpPr>
-          <p:cNvPr id="22" name="Text 20"/>
+          <p:cNvPr id="10" name="Text 7"/>
           <p:cNvSpPr/>
           <p:nvPr/>
         </p:nvSpPr>
@@ -6746,7 +5702,7 @@
                 <a:ea typeface="Arial" pitchFamily="34" charset="-122"/>
                 <a:cs typeface="Arial" pitchFamily="34" charset="-120"/>
               </a:rPr>
-              <a:t>12/12</a:t>
+              <a:t>12/13</a:t>
             </a:r>
             <a:endParaRPr lang="en-US" sz="1050" dirty="0"/>
           </a:p>
@@ -6763,6 +5719,698 @@
 <file path=ppt/slides/slide17.xml><?xml version="1.0" encoding="utf-8"?>
 <p:sld xmlns:a="http://schemas.openxmlformats.org/drawingml/2006/main" xmlns:r="http://schemas.openxmlformats.org/officeDocument/2006/relationships" xmlns:p="http://schemas.openxmlformats.org/presentationml/2006/main">
   <p:cSld name="Slide 17">
+    <p:bg>
+      <p:bgPr>
+        <a:solidFill>
+          <a:srgbClr val="FFFFFF"/>
+        </a:solidFill>
+      </p:bgPr>
+    </p:bg>
+    <p:spTree>
+      <p:nvGrpSpPr>
+        <p:cNvPr id="1" name=""/>
+        <p:cNvGrpSpPr/>
+        <p:nvPr/>
+      </p:nvGrpSpPr>
+      <p:grpSpPr>
+        <a:xfrm>
+          <a:off x="0" y="0"/>
+          <a:ext cx="0" cy="0"/>
+          <a:chOff x="0" y="0"/>
+          <a:chExt cx="0" cy="0"/>
+        </a:xfrm>
+      </p:grpSpPr>
+      <p:sp>
+        <p:nvSpPr>
+          <p:cNvPr id="2" name="Shape 0"/>
+          <p:cNvSpPr/>
+          <p:nvPr/>
+        </p:nvSpPr>
+        <p:spPr>
+          <a:xfrm>
+            <a:off x="566928" y="201168"/>
+            <a:ext cx="475488" cy="50292"/>
+          </a:xfrm>
+          <a:prstGeom prst="rect">
+            <a:avLst/>
+          </a:prstGeom>
+          <a:solidFill>
+            <a:srgbClr val="3843AF"/>
+          </a:solidFill>
+          <a:ln/>
+        </p:spPr>
+      </p:sp>
+      <p:sp>
+        <p:nvSpPr>
+          <p:cNvPr id="3" name="Text 1"/>
+          <p:cNvSpPr/>
+          <p:nvPr/>
+        </p:nvSpPr>
+        <p:spPr>
+          <a:xfrm>
+            <a:off x="566928" y="384048"/>
+            <a:ext cx="8010144" cy="237744"/>
+          </a:xfrm>
+          <a:prstGeom prst="rect">
+            <a:avLst/>
+          </a:prstGeom>
+          <a:noFill/>
+          <a:ln/>
+        </p:spPr>
+        <p:txBody>
+          <a:bodyPr wrap="square" lIns="0" tIns="0" rIns="0" bIns="0" rtlCol="0" anchor="ctr"/>
+          <a:lstStyle/>
+          <a:p>
+            <a:pPr indent="0" marL="0">
+              <a:buNone/>
+            </a:pPr>
+            <a:r>
+              <a:rPr lang="en-US" sz="1150" b="1" spc="180" kern="0" dirty="0">
+                <a:solidFill>
+                  <a:srgbClr val="3843AF"/>
+                </a:solidFill>
+                <a:latin typeface="Arial" pitchFamily="34" charset="0"/>
+                <a:ea typeface="Arial" pitchFamily="34" charset="-122"/>
+                <a:cs typeface="Arial" pitchFamily="34" charset="-120"/>
+              </a:rPr>
+              <a:t>AUSBLICK</a:t>
+            </a:r>
+            <a:endParaRPr lang="en-US" sz="1150" dirty="0"/>
+          </a:p>
+        </p:txBody>
+      </p:sp>
+      <p:sp>
+        <p:nvSpPr>
+          <p:cNvPr id="4" name="Text 2"/>
+          <p:cNvSpPr/>
+          <p:nvPr/>
+        </p:nvSpPr>
+        <p:spPr>
+          <a:xfrm>
+            <a:off x="566928" y="731520"/>
+            <a:ext cx="8010144" cy="603504"/>
+          </a:xfrm>
+          <a:prstGeom prst="rect">
+            <a:avLst/>
+          </a:prstGeom>
+          <a:noFill/>
+          <a:ln/>
+        </p:spPr>
+        <p:txBody>
+          <a:bodyPr wrap="square" lIns="0" tIns="0" rIns="0" bIns="0" rtlCol="0" anchor="t"/>
+          <a:lstStyle/>
+          <a:p>
+            <a:pPr indent="0" marL="0">
+              <a:buNone/>
+            </a:pPr>
+            <a:r>
+              <a:rPr lang="en-US" sz="2600" b="1" dirty="0">
+                <a:solidFill>
+                  <a:srgbClr val="272E52"/>
+                </a:solidFill>
+                <a:latin typeface="Arial" pitchFamily="34" charset="0"/>
+                <a:ea typeface="Arial" pitchFamily="34" charset="-122"/>
+                <a:cs typeface="Arial" pitchFamily="34" charset="-120"/>
+              </a:rPr>
+              <a:t>Bis Mittwoch</a:t>
+            </a:r>
+            <a:endParaRPr lang="en-US" sz="2600" dirty="0"/>
+          </a:p>
+        </p:txBody>
+      </p:sp>
+      <p:sp>
+        <p:nvSpPr>
+          <p:cNvPr id="5" name="Text 3"/>
+          <p:cNvSpPr/>
+          <p:nvPr/>
+        </p:nvSpPr>
+        <p:spPr>
+          <a:xfrm>
+            <a:off x="566928" y="1444752"/>
+            <a:ext cx="8010144" cy="438912"/>
+          </a:xfrm>
+          <a:prstGeom prst="rect">
+            <a:avLst/>
+          </a:prstGeom>
+          <a:noFill/>
+          <a:ln/>
+        </p:spPr>
+        <p:txBody>
+          <a:bodyPr wrap="square" lIns="0" tIns="0" rIns="0" bIns="0" rtlCol="0" anchor="t"/>
+          <a:lstStyle/>
+          <a:p>
+            <a:pPr indent="0" marL="0">
+              <a:buNone/>
+            </a:pPr>
+            <a:r>
+              <a:rPr lang="en-US" sz="1300" dirty="0">
+                <a:solidFill>
+                  <a:srgbClr val="5C6377"/>
+                </a:solidFill>
+                <a:latin typeface="Arial" pitchFamily="34" charset="0"/>
+                <a:ea typeface="Arial" pitchFamily="34" charset="-122"/>
+                <a:cs typeface="Arial" pitchFamily="34" charset="-120"/>
+              </a:rPr>
+              <a:t>Mittwoch wird das Kapseln schlanker: Docker – Container statt ganzer Maschinen.</a:t>
+            </a:r>
+            <a:endParaRPr lang="en-US" sz="1300" dirty="0"/>
+          </a:p>
+        </p:txBody>
+      </p:sp>
+      <p:sp>
+        <p:nvSpPr>
+          <p:cNvPr id="6" name="Shape 4"/>
+          <p:cNvSpPr/>
+          <p:nvPr/>
+        </p:nvSpPr>
+        <p:spPr>
+          <a:xfrm>
+            <a:off x="566928" y="1975104"/>
+            <a:ext cx="2523744" cy="1920240"/>
+          </a:xfrm>
+          <a:prstGeom prst="rect">
+            <a:avLst/>
+          </a:prstGeom>
+          <a:solidFill>
+            <a:srgbClr val="F5F6FC"/>
+          </a:solidFill>
+          <a:ln/>
+        </p:spPr>
+      </p:sp>
+      <p:sp>
+        <p:nvSpPr>
+          <p:cNvPr id="7" name="Shape 5"/>
+          <p:cNvSpPr/>
+          <p:nvPr/>
+        </p:nvSpPr>
+        <p:spPr>
+          <a:xfrm>
+            <a:off x="566928" y="1975104"/>
+            <a:ext cx="41148" cy="1920240"/>
+          </a:xfrm>
+          <a:prstGeom prst="rect">
+            <a:avLst/>
+          </a:prstGeom>
+          <a:solidFill>
+            <a:srgbClr val="3843AF"/>
+          </a:solidFill>
+          <a:ln/>
+        </p:spPr>
+      </p:sp>
+      <p:sp>
+        <p:nvSpPr>
+          <p:cNvPr id="8" name="Text 6"/>
+          <p:cNvSpPr/>
+          <p:nvPr/>
+        </p:nvSpPr>
+        <p:spPr>
+          <a:xfrm>
+            <a:off x="804672" y="2121408"/>
+            <a:ext cx="2121408" cy="256032"/>
+          </a:xfrm>
+          <a:prstGeom prst="rect">
+            <a:avLst/>
+          </a:prstGeom>
+          <a:noFill/>
+          <a:ln/>
+        </p:spPr>
+        <p:txBody>
+          <a:bodyPr wrap="square" lIns="0" tIns="0" rIns="0" bIns="0" rtlCol="0" anchor="t"/>
+          <a:lstStyle/>
+          <a:p>
+            <a:pPr indent="0" marL="0">
+              <a:buNone/>
+            </a:pPr>
+            <a:r>
+              <a:rPr lang="en-US" sz="1300" b="1" dirty="0">
+                <a:solidFill>
+                  <a:srgbClr val="272E52"/>
+                </a:solidFill>
+                <a:latin typeface="Arial" pitchFamily="34" charset="0"/>
+                <a:ea typeface="Arial" pitchFamily="34" charset="-122"/>
+                <a:cs typeface="Arial" pitchFamily="34" charset="-120"/>
+              </a:rPr>
+              <a:t>Docker – Einführung</a:t>
+            </a:r>
+            <a:endParaRPr lang="en-US" sz="1300" dirty="0"/>
+          </a:p>
+        </p:txBody>
+      </p:sp>
+      <p:sp>
+        <p:nvSpPr>
+          <p:cNvPr id="9" name="Text 7"/>
+          <p:cNvSpPr/>
+          <p:nvPr/>
+        </p:nvSpPr>
+        <p:spPr>
+          <a:xfrm>
+            <a:off x="804672" y="2423160"/>
+            <a:ext cx="2121408" cy="1353312"/>
+          </a:xfrm>
+          <a:prstGeom prst="rect">
+            <a:avLst/>
+          </a:prstGeom>
+          <a:noFill/>
+          <a:ln/>
+        </p:spPr>
+        <p:txBody>
+          <a:bodyPr wrap="square" lIns="0" tIns="0" rIns="0" bIns="0" rtlCol="0" anchor="t"/>
+          <a:lstStyle/>
+          <a:p>
+            <a:pPr indent="0" marL="0">
+              <a:lnSpc>
+                <a:spcPct val="92000"/>
+              </a:lnSpc>
+              <a:buNone/>
+            </a:pPr>
+            <a:r>
+              <a:rPr lang="en-US" sz="1150" dirty="0">
+                <a:solidFill>
+                  <a:srgbClr val="434A63"/>
+                </a:solidFill>
+                <a:latin typeface="Arial" pitchFamily="34" charset="0"/>
+                <a:ea typeface="Arial" pitchFamily="34" charset="-122"/>
+                <a:cs typeface="Arial" pitchFamily="34" charset="-120"/>
+              </a:rPr>
+              <a:t>Erster Container in Sekunden, dann ein eigenes Image – das Werkzeug richten wir gemeinsam ein.</a:t>
+            </a:r>
+            <a:endParaRPr lang="en-US" sz="1150" dirty="0"/>
+          </a:p>
+        </p:txBody>
+      </p:sp>
+      <p:sp>
+        <p:nvSpPr>
+          <p:cNvPr id="10" name="Shape 8"/>
+          <p:cNvSpPr/>
+          <p:nvPr/>
+        </p:nvSpPr>
+        <p:spPr>
+          <a:xfrm>
+            <a:off x="3310128" y="1975104"/>
+            <a:ext cx="2523744" cy="1920240"/>
+          </a:xfrm>
+          <a:prstGeom prst="rect">
+            <a:avLst/>
+          </a:prstGeom>
+          <a:solidFill>
+            <a:srgbClr val="F5F6FC"/>
+          </a:solidFill>
+          <a:ln/>
+        </p:spPr>
+      </p:sp>
+      <p:sp>
+        <p:nvSpPr>
+          <p:cNvPr id="11" name="Shape 9"/>
+          <p:cNvSpPr/>
+          <p:nvPr/>
+        </p:nvSpPr>
+        <p:spPr>
+          <a:xfrm>
+            <a:off x="3310128" y="1975104"/>
+            <a:ext cx="41148" cy="1920240"/>
+          </a:xfrm>
+          <a:prstGeom prst="rect">
+            <a:avLst/>
+          </a:prstGeom>
+          <a:solidFill>
+            <a:srgbClr val="3843AF"/>
+          </a:solidFill>
+          <a:ln/>
+        </p:spPr>
+      </p:sp>
+      <p:sp>
+        <p:nvSpPr>
+          <p:cNvPr id="12" name="Text 10"/>
+          <p:cNvSpPr/>
+          <p:nvPr/>
+        </p:nvSpPr>
+        <p:spPr>
+          <a:xfrm>
+            <a:off x="3547872" y="2121408"/>
+            <a:ext cx="2121408" cy="256032"/>
+          </a:xfrm>
+          <a:prstGeom prst="rect">
+            <a:avLst/>
+          </a:prstGeom>
+          <a:noFill/>
+          <a:ln/>
+        </p:spPr>
+        <p:txBody>
+          <a:bodyPr wrap="square" lIns="0" tIns="0" rIns="0" bIns="0" rtlCol="0" anchor="t"/>
+          <a:lstStyle/>
+          <a:p>
+            <a:pPr indent="0" marL="0">
+              <a:buNone/>
+            </a:pPr>
+            <a:r>
+              <a:rPr lang="en-US" sz="1300" b="1" dirty="0">
+                <a:solidFill>
+                  <a:srgbClr val="272E52"/>
+                </a:solidFill>
+                <a:latin typeface="Arial" pitchFamily="34" charset="0"/>
+                <a:ea typeface="Arial" pitchFamily="34" charset="-122"/>
+                <a:cs typeface="Arial" pitchFamily="34" charset="-120"/>
+              </a:rPr>
+              <a:t>Wer vorarbeiten mag</a:t>
+            </a:r>
+            <a:endParaRPr lang="en-US" sz="1300" dirty="0"/>
+          </a:p>
+        </p:txBody>
+      </p:sp>
+      <p:sp>
+        <p:nvSpPr>
+          <p:cNvPr id="13" name="Text 11"/>
+          <p:cNvSpPr/>
+          <p:nvPr/>
+        </p:nvSpPr>
+        <p:spPr>
+          <a:xfrm>
+            <a:off x="3547872" y="2423160"/>
+            <a:ext cx="2121408" cy="1353312"/>
+          </a:xfrm>
+          <a:prstGeom prst="rect">
+            <a:avLst/>
+          </a:prstGeom>
+          <a:noFill/>
+          <a:ln/>
+        </p:spPr>
+        <p:txBody>
+          <a:bodyPr wrap="square" lIns="0" tIns="0" rIns="0" bIns="0" rtlCol="0" anchor="t"/>
+          <a:lstStyle/>
+          <a:p>
+            <a:pPr indent="0" marL="0">
+              <a:lnSpc>
+                <a:spcPct val="92000"/>
+              </a:lnSpc>
+              <a:buNone/>
+            </a:pPr>
+            <a:r>
+              <a:rPr lang="en-US" sz="1150" dirty="0">
+                <a:solidFill>
+                  <a:srgbClr val="434A63"/>
+                </a:solidFill>
+                <a:latin typeface="Arial" pitchFamily="34" charset="0"/>
+                <a:ea typeface="Arial" pitchFamily="34" charset="-122"/>
+                <a:cs typeface="Arial" pitchFamily="34" charset="-120"/>
+              </a:rPr>
+              <a:t>Docker Desktop lässt sich vorab installieren – Anleitung auf der Kursseite unter „Docker → Installation“. Kein Muss.</a:t>
+            </a:r>
+            <a:endParaRPr lang="en-US" sz="1150" dirty="0"/>
+          </a:p>
+        </p:txBody>
+      </p:sp>
+      <p:sp>
+        <p:nvSpPr>
+          <p:cNvPr id="14" name="Shape 12"/>
+          <p:cNvSpPr/>
+          <p:nvPr/>
+        </p:nvSpPr>
+        <p:spPr>
+          <a:xfrm>
+            <a:off x="6053328" y="1975104"/>
+            <a:ext cx="2523744" cy="1920240"/>
+          </a:xfrm>
+          <a:prstGeom prst="rect">
+            <a:avLst/>
+          </a:prstGeom>
+          <a:solidFill>
+            <a:srgbClr val="F5F6FC"/>
+          </a:solidFill>
+          <a:ln/>
+        </p:spPr>
+      </p:sp>
+      <p:sp>
+        <p:nvSpPr>
+          <p:cNvPr id="15" name="Shape 13"/>
+          <p:cNvSpPr/>
+          <p:nvPr/>
+        </p:nvSpPr>
+        <p:spPr>
+          <a:xfrm>
+            <a:off x="6053328" y="1975104"/>
+            <a:ext cx="41148" cy="1920240"/>
+          </a:xfrm>
+          <a:prstGeom prst="rect">
+            <a:avLst/>
+          </a:prstGeom>
+          <a:solidFill>
+            <a:srgbClr val="3843AF"/>
+          </a:solidFill>
+          <a:ln/>
+        </p:spPr>
+      </p:sp>
+      <p:sp>
+        <p:nvSpPr>
+          <p:cNvPr id="16" name="Text 14"/>
+          <p:cNvSpPr/>
+          <p:nvPr/>
+        </p:nvSpPr>
+        <p:spPr>
+          <a:xfrm>
+            <a:off x="6291072" y="2121408"/>
+            <a:ext cx="2121408" cy="256032"/>
+          </a:xfrm>
+          <a:prstGeom prst="rect">
+            <a:avLst/>
+          </a:prstGeom>
+          <a:noFill/>
+          <a:ln/>
+        </p:spPr>
+        <p:txBody>
+          <a:bodyPr wrap="square" lIns="0" tIns="0" rIns="0" bIns="0" rtlCol="0" anchor="t"/>
+          <a:lstStyle/>
+          <a:p>
+            <a:pPr indent="0" marL="0">
+              <a:buNone/>
+            </a:pPr>
+            <a:r>
+              <a:rPr lang="en-US" sz="1300" b="1" dirty="0">
+                <a:solidFill>
+                  <a:srgbClr val="272E52"/>
+                </a:solidFill>
+                <a:latin typeface="Arial" pitchFamily="34" charset="0"/>
+                <a:ea typeface="Arial" pitchFamily="34" charset="-122"/>
+                <a:cs typeface="Arial" pitchFamily="34" charset="-120"/>
+              </a:rPr>
+              <a:t>Kür bis dahin</a:t>
+            </a:r>
+            <a:endParaRPr lang="en-US" sz="1300" dirty="0"/>
+          </a:p>
+        </p:txBody>
+      </p:sp>
+      <p:sp>
+        <p:nvSpPr>
+          <p:cNvPr id="17" name="Text 15"/>
+          <p:cNvSpPr/>
+          <p:nvPr/>
+        </p:nvSpPr>
+        <p:spPr>
+          <a:xfrm>
+            <a:off x="6291072" y="2423160"/>
+            <a:ext cx="2121408" cy="1353312"/>
+          </a:xfrm>
+          <a:prstGeom prst="rect">
+            <a:avLst/>
+          </a:prstGeom>
+          <a:noFill/>
+          <a:ln/>
+        </p:spPr>
+        <p:txBody>
+          <a:bodyPr wrap="square" lIns="0" tIns="0" rIns="0" bIns="0" rtlCol="0" anchor="t"/>
+          <a:lstStyle/>
+          <a:p>
+            <a:pPr indent="0" marL="0">
+              <a:lnSpc>
+                <a:spcPct val="92000"/>
+              </a:lnSpc>
+              <a:buNone/>
+            </a:pPr>
+            <a:r>
+              <a:rPr lang="en-US" sz="1150" dirty="0">
+                <a:solidFill>
+                  <a:srgbClr val="434A63"/>
+                </a:solidFill>
+                <a:latin typeface="Arial" pitchFamily="34" charset="0"/>
+                <a:ea typeface="Arial" pitchFamily="34" charset="-122"/>
+                <a:cs typeface="Arial" pitchFamily="34" charset="-120"/>
+              </a:rPr>
+              <a:t>Das Snapshot-Experiment von der Übungsseite selbst durchspielen – zehn Minuten mit Multipass, Anleitung steht dort.</a:t>
+            </a:r>
+            <a:endParaRPr lang="en-US" sz="1150" dirty="0"/>
+          </a:p>
+        </p:txBody>
+      </p:sp>
+      <p:sp>
+        <p:nvSpPr>
+          <p:cNvPr id="18" name="Shape 16"/>
+          <p:cNvSpPr/>
+          <p:nvPr/>
+        </p:nvSpPr>
+        <p:spPr>
+          <a:xfrm>
+            <a:off x="566928" y="4160520"/>
+            <a:ext cx="32004" cy="256032"/>
+          </a:xfrm>
+          <a:prstGeom prst="rect">
+            <a:avLst/>
+          </a:prstGeom>
+          <a:solidFill>
+            <a:srgbClr val="3843AF"/>
+          </a:solidFill>
+          <a:ln/>
+        </p:spPr>
+      </p:sp>
+      <p:sp>
+        <p:nvSpPr>
+          <p:cNvPr id="19" name="Text 17"/>
+          <p:cNvSpPr/>
+          <p:nvPr/>
+        </p:nvSpPr>
+        <p:spPr>
+          <a:xfrm>
+            <a:off x="749808" y="4114800"/>
+            <a:ext cx="7827264" cy="402336"/>
+          </a:xfrm>
+          <a:prstGeom prst="rect">
+            <a:avLst/>
+          </a:prstGeom>
+          <a:noFill/>
+          <a:ln/>
+        </p:spPr>
+        <p:txBody>
+          <a:bodyPr wrap="square" lIns="0" tIns="0" rIns="0" bIns="0" rtlCol="0" anchor="ctr"/>
+          <a:lstStyle/>
+          <a:p>
+            <a:pPr indent="0" marL="0">
+              <a:buNone/>
+            </a:pPr>
+            <a:r>
+              <a:rPr lang="en-US" sz="1200" b="1" dirty="0">
+                <a:solidFill>
+                  <a:srgbClr val="434A63"/>
+                </a:solidFill>
+                <a:latin typeface="Arial" pitchFamily="34" charset="0"/>
+                <a:ea typeface="Arial" pitchFamily="34" charset="-122"/>
+                <a:cs typeface="Arial" pitchFamily="34" charset="-120"/>
+              </a:rPr>
+              <a:t>Nächster Termin: Mittwoch, 9. September, 18:00 Uhr – Docker: Images, Container, Registry.</a:t>
+            </a:r>
+            <a:endParaRPr lang="en-US" sz="1200" dirty="0"/>
+          </a:p>
+        </p:txBody>
+      </p:sp>
+      <p:sp>
+        <p:nvSpPr>
+          <p:cNvPr id="20" name="Shape 18"/>
+          <p:cNvSpPr/>
+          <p:nvPr/>
+        </p:nvSpPr>
+        <p:spPr>
+          <a:xfrm>
+            <a:off x="566928" y="4631436"/>
+            <a:ext cx="8010144" cy="0"/>
+          </a:xfrm>
+          <a:prstGeom prst="line">
+            <a:avLst/>
+          </a:prstGeom>
+          <a:noFill/>
+          <a:ln w="9525">
+            <a:solidFill>
+              <a:srgbClr val="DFE3F0"/>
+            </a:solidFill>
+            <a:prstDash val="solid"/>
+          </a:ln>
+        </p:spPr>
+      </p:sp>
+      <p:sp>
+        <p:nvSpPr>
+          <p:cNvPr id="21" name="Text 19"/>
+          <p:cNvSpPr/>
+          <p:nvPr/>
+        </p:nvSpPr>
+        <p:spPr>
+          <a:xfrm>
+            <a:off x="566928" y="4722876"/>
+            <a:ext cx="5029200" cy="237744"/>
+          </a:xfrm>
+          <a:prstGeom prst="rect">
+            <a:avLst/>
+          </a:prstGeom>
+          <a:noFill/>
+          <a:ln/>
+        </p:spPr>
+        <p:txBody>
+          <a:bodyPr wrap="square" lIns="0" tIns="0" rIns="0" bIns="0" rtlCol="0" anchor="ctr"/>
+          <a:lstStyle/>
+          <a:p>
+            <a:pPr indent="0" marL="0">
+              <a:buNone/>
+            </a:pPr>
+            <a:r>
+              <a:rPr lang="en-US" sz="1050" spc="30" kern="0" dirty="0">
+                <a:solidFill>
+                  <a:srgbClr val="5C6377"/>
+                </a:solidFill>
+                <a:latin typeface="Arial" pitchFamily="34" charset="0"/>
+                <a:ea typeface="Arial" pitchFamily="34" charset="-122"/>
+                <a:cs typeface="Arial" pitchFamily="34" charset="-120"/>
+              </a:rPr>
+              <a:t>Abschluss</a:t>
+            </a:r>
+            <a:endParaRPr lang="en-US" sz="1050" dirty="0"/>
+          </a:p>
+        </p:txBody>
+      </p:sp>
+      <p:sp>
+        <p:nvSpPr>
+          <p:cNvPr id="22" name="Text 20"/>
+          <p:cNvSpPr/>
+          <p:nvPr/>
+        </p:nvSpPr>
+        <p:spPr>
+          <a:xfrm>
+            <a:off x="8028432" y="4722876"/>
+            <a:ext cx="548640" cy="237744"/>
+          </a:xfrm>
+          <a:prstGeom prst="rect">
+            <a:avLst/>
+          </a:prstGeom>
+          <a:noFill/>
+          <a:ln/>
+        </p:spPr>
+        <p:txBody>
+          <a:bodyPr wrap="square" lIns="0" tIns="0" rIns="0" bIns="0" rtlCol="0" anchor="ctr"/>
+          <a:lstStyle/>
+          <a:p>
+            <a:pPr algn="r" indent="0" marL="0">
+              <a:buNone/>
+            </a:pPr>
+            <a:r>
+              <a:rPr lang="en-US" sz="1050" dirty="0">
+                <a:solidFill>
+                  <a:srgbClr val="5C6377"/>
+                </a:solidFill>
+                <a:latin typeface="Arial" pitchFamily="34" charset="0"/>
+                <a:ea typeface="Arial" pitchFamily="34" charset="-122"/>
+                <a:cs typeface="Arial" pitchFamily="34" charset="-120"/>
+              </a:rPr>
+              <a:t>13/13</a:t>
+            </a:r>
+            <a:endParaRPr lang="en-US" sz="1050" dirty="0"/>
+          </a:p>
+        </p:txBody>
+      </p:sp>
+    </p:spTree>
+  </p:cSld>
+  <p:clrMapOvr>
+    <a:masterClrMapping/>
+  </p:clrMapOvr>
+</p:sld>
+</file>
+
+<file path=ppt/slides/slide18.xml><?xml version="1.0" encoding="utf-8"?>
+<p:sld xmlns:a="http://schemas.openxmlformats.org/drawingml/2006/main" xmlns:r="http://schemas.openxmlformats.org/officeDocument/2006/relationships" xmlns:p="http://schemas.openxmlformats.org/presentationml/2006/main">
+  <p:cSld name="Slide 18">
     <p:bg>
       <p:bgPr>
         <a:solidFill>
@@ -6837,7 +6485,7 @@
                 <a:ea typeface="Arial" pitchFamily="34" charset="-122"/>
                 <a:cs typeface="Arial" pitchFamily="34" charset="-120"/>
               </a:rPr>
-              <a:t>Eure erste eigene VM: läuft.</a:t>
+              <a:t>Virtualisierung: eingeordnet.</a:t>
             </a:r>
             <a:endParaRPr lang="en-US" sz="3200" dirty="0"/>
           </a:p>
@@ -6876,7 +6524,7 @@
                 <a:ea typeface="Arial" pitchFamily="34" charset="-122"/>
                 <a:cs typeface="Arial" pitchFamily="34" charset="-120"/>
               </a:rPr>
-              <a:t>Alle Befehle, die Anleitung und die Stolpersteine stehen zum Nachlesen auf der Kursseite.</a:t>
+              <a:t>Vom Blech bis zur Cloud-VM – Theorie, Übung und die Multipass-Kür stehen zum Nachlesen auf der Kursseite.</a:t>
             </a:r>
             <a:endParaRPr lang="en-US" sz="1400" dirty="0"/>
           </a:p>
@@ -6915,7 +6563,7 @@
                 <a:ea typeface="Arial" pitchFamily="34" charset="-122"/>
                 <a:cs typeface="Arial" pitchFamily="34" charset="-120"/>
               </a:rPr>
-              <a:t>Mittwoch, 9. September · Virtuelle Netze &amp; Snapshots</a:t>
+              <a:t>Mittwoch, 9. September · Docker – Einführung</a:t>
             </a:r>
             <a:endParaRPr lang="en-US" sz="1600" dirty="0"/>
           </a:p>
@@ -7143,7 +6791,7 @@
                 <a:ea typeface="Arial" pitchFamily="34" charset="-122"/>
                 <a:cs typeface="Arial" pitchFamily="34" charset="-120"/>
               </a:rPr>
-              <a:t>Wo wir stehen – und warum jetzt Virtualisierung kommt</a:t>
+              <a:t>Wo wir stehen – und warum ein Abend Virtualisierung reicht</a:t>
             </a:r>
             <a:endParaRPr lang="en-US" sz="1050" dirty="0"/>
           </a:p>
@@ -7221,7 +6869,7 @@
                 <a:ea typeface="Arial" pitchFamily="34" charset="-122"/>
                 <a:cs typeface="Arial" pitchFamily="34" charset="-120"/>
               </a:rPr>
-              <a:t>Warum virtualisieren? Das Problem und die Idee</a:t>
+              <a:t>Warum virtualisieren? Problem, Idee, Begriffe</a:t>
             </a:r>
             <a:endParaRPr lang="en-US" sz="1050" dirty="0"/>
           </a:p>
@@ -7319,7 +6967,7 @@
                 <a:ea typeface="Arial" pitchFamily="34" charset="-122"/>
                 <a:cs typeface="Arial" pitchFamily="34" charset="-120"/>
               </a:rPr>
-              <a:t>Hypervisor: Typ 1, Typ 2 – und VM gegen Container</a:t>
+              <a:t>Hypervisor Typ 1 und Typ 2</a:t>
             </a:r>
             <a:endParaRPr lang="en-US" sz="1050" dirty="0"/>
           </a:p>
@@ -7358,7 +7006,7 @@
                 <a:ea typeface="Courier New" pitchFamily="34" charset="-122"/>
                 <a:cs typeface="Courier New" pitchFamily="34" charset="-120"/>
               </a:rPr>
-              <a:t>18:45</a:t>
+              <a:t>18:35</a:t>
             </a:r>
             <a:endParaRPr lang="en-US" sz="1050" dirty="0"/>
           </a:p>
@@ -7397,7 +7045,7 @@
                 <a:ea typeface="Arial" pitchFamily="34" charset="-122"/>
                 <a:cs typeface="Arial" pitchFamily="34" charset="-120"/>
               </a:rPr>
-              <a:t>Pause</a:t>
+              <a:t>Wo das heute überall läuft: Rechenzentrum, Cloud, Arbeitsplatz</a:t>
             </a:r>
             <a:endParaRPr lang="en-US" sz="1050" dirty="0"/>
           </a:p>
@@ -7456,7 +7104,7 @@
                 <a:ea typeface="Courier New" pitchFamily="34" charset="-122"/>
                 <a:cs typeface="Courier New" pitchFamily="34" charset="-120"/>
               </a:rPr>
-              <a:t>18:55</a:t>
+              <a:t>18:50</a:t>
             </a:r>
             <a:endParaRPr lang="en-US" sz="1050" dirty="0"/>
           </a:p>
@@ -7495,7 +7143,7 @@
                 <a:ea typeface="Arial" pitchFamily="34" charset="-122"/>
                 <a:cs typeface="Arial" pitchFamily="34" charset="-120"/>
               </a:rPr>
-              <a:t>Werkzeug einrichten: Multipass – gemeinsam, Schritt für Schritt</a:t>
+              <a:t>Pause</a:t>
             </a:r>
             <a:endParaRPr lang="en-US" sz="1050" dirty="0"/>
           </a:p>
@@ -7534,7 +7182,7 @@
                 <a:ea typeface="Courier New" pitchFamily="34" charset="-122"/>
                 <a:cs typeface="Courier New" pitchFamily="34" charset="-120"/>
               </a:rPr>
-              <a:t>19:20</a:t>
+              <a:t>19:00</a:t>
             </a:r>
             <a:endParaRPr lang="en-US" sz="1050" dirty="0"/>
           </a:p>
@@ -7573,7 +7221,7 @@
                 <a:ea typeface="Arial" pitchFamily="34" charset="-122"/>
                 <a:cs typeface="Arial" pitchFamily="34" charset="-120"/>
               </a:rPr>
-              <a:t>Briefing für die Breakout-Übung</a:t>
+              <a:t>In die VM geschaut: ihr Netz – und Snapshots (Live-Demo)</a:t>
             </a:r>
             <a:endParaRPr lang="en-US" sz="1050" dirty="0"/>
           </a:p>
@@ -7632,7 +7280,7 @@
                 <a:ea typeface="Courier New" pitchFamily="34" charset="-122"/>
                 <a:cs typeface="Courier New" pitchFamily="34" charset="-120"/>
               </a:rPr>
-              <a:t>19:25</a:t>
+              <a:t>19:20</a:t>
             </a:r>
             <a:endParaRPr lang="en-US" sz="1050" dirty="0"/>
           </a:p>
@@ -7671,7 +7319,7 @@
                 <a:ea typeface="Arial" pitchFamily="34" charset="-122"/>
                 <a:cs typeface="Arial" pitchFamily="34" charset="-120"/>
               </a:rPr>
-              <a:t>Breakout: eure erste eigene VM</a:t>
+              <a:t>Briefing für die Breakout-Übung</a:t>
             </a:r>
             <a:endParaRPr lang="en-US" sz="1050" dirty="0"/>
           </a:p>
@@ -7710,7 +7358,7 @@
                 <a:ea typeface="Courier New" pitchFamily="34" charset="-122"/>
                 <a:cs typeface="Courier New" pitchFamily="34" charset="-120"/>
               </a:rPr>
-              <a:t>20:15</a:t>
+              <a:t>19:25</a:t>
             </a:r>
             <a:endParaRPr lang="en-US" sz="1050" dirty="0"/>
           </a:p>
@@ -7749,7 +7397,7 @@
                 <a:ea typeface="Arial" pitchFamily="34" charset="-122"/>
                 <a:cs typeface="Arial" pitchFamily="34" charset="-120"/>
               </a:rPr>
-              <a:t>Auswertung: Was habt ihr gebaut – und was lief schief?</a:t>
+              <a:t>Breakout: VM-Detektiv auf eurer Cloud-VM</a:t>
             </a:r>
             <a:endParaRPr lang="en-US" sz="1050" dirty="0"/>
           </a:p>
@@ -7808,7 +7456,7 @@
                 <a:ea typeface="Courier New" pitchFamily="34" charset="-122"/>
                 <a:cs typeface="Courier New" pitchFamily="34" charset="-120"/>
               </a:rPr>
-              <a:t>20:40</a:t>
+              <a:t>20:15</a:t>
             </a:r>
             <a:endParaRPr lang="en-US" sz="1050" dirty="0"/>
           </a:p>
@@ -7847,7 +7495,7 @@
                 <a:ea typeface="Arial" pitchFamily="34" charset="-122"/>
                 <a:cs typeface="Arial" pitchFamily="34" charset="-120"/>
               </a:rPr>
-              <a:t>VM im Alltag: wo euch das ab jetzt ständig begegnet</a:t>
+              <a:t>Auswertung: eure Funde</a:t>
             </a:r>
             <a:endParaRPr lang="en-US" sz="1050" dirty="0"/>
           </a:p>
@@ -7886,7 +7534,7 @@
                 <a:ea typeface="Courier New" pitchFamily="34" charset="-122"/>
                 <a:cs typeface="Courier New" pitchFamily="34" charset="-120"/>
               </a:rPr>
-              <a:t>20:55</a:t>
+              <a:t>20:40</a:t>
             </a:r>
             <a:endParaRPr lang="en-US" sz="1050" dirty="0"/>
           </a:p>
@@ -7925,7 +7573,7 @@
                 <a:ea typeface="Arial" pitchFamily="34" charset="-122"/>
                 <a:cs typeface="Arial" pitchFamily="34" charset="-120"/>
               </a:rPr>
-              <a:t>Ausblick auf Mittwoch</a:t>
+              <a:t>Wann VM, wann nicht – und der Ausblick auf Docker</a:t>
             </a:r>
             <a:endParaRPr lang="en-US" sz="1050" dirty="0"/>
           </a:p>
@@ -7984,7 +7632,7 @@
                 <a:ea typeface="Arial" pitchFamily="34" charset="-122"/>
                 <a:cs typeface="Arial" pitchFamily="34" charset="-120"/>
               </a:rPr>
-              <a:t>Ab heute wird gebaut – die Theorie bleibt kurz, die VM ist das Ziel.</a:t>
+              <a:t>Ihr habt alle schon VMs gebaut – heute geht es ums Einordnen: wo, wofür, und wo die Grenzen liegen.</a:t>
             </a:r>
             <a:endParaRPr lang="en-US" sz="1200" dirty="0"/>
           </a:p>
@@ -8085,7 +7733,7 @@
                 <a:ea typeface="Arial" pitchFamily="34" charset="-122"/>
                 <a:cs typeface="Arial" pitchFamily="34" charset="-120"/>
               </a:rPr>
-              <a:t>1/12</a:t>
+              <a:t>1/13</a:t>
             </a:r>
             <a:endParaRPr lang="en-US" sz="1050" dirty="0"/>
           </a:p>
@@ -8298,7 +7946,7 @@
                 <a:ea typeface="Arial" pitchFamily="34" charset="-122"/>
                 <a:cs typeface="Arial" pitchFamily="34" charset="-120"/>
               </a:rPr>
-              <a:t>Netzwerke sind geschafft. Heute lernt ihr, Systeme zu entkoppeln – die Grundlage für Container und alles danach.</a:t>
+              <a:t>Netzwerke sind geschafft. Heute ordnen wir das Kapseln ein – Mittwoch wird es mit Docker schlanker.</a:t>
             </a:r>
             <a:endParaRPr lang="en-US" sz="1200" dirty="0"/>
           </a:p>
@@ -8399,7 +8047,7 @@
                 <a:ea typeface="Arial" pitchFamily="34" charset="-122"/>
                 <a:cs typeface="Arial" pitchFamily="34" charset="-120"/>
               </a:rPr>
-              <a:t>2/12</a:t>
+              <a:t>2/13</a:t>
             </a:r>
             <a:endParaRPr lang="en-US" sz="1050" dirty="0"/>
           </a:p>
@@ -8883,7 +8531,7 @@
                 <a:ea typeface="Arial" pitchFamily="34" charset="-122"/>
                 <a:cs typeface="Arial" pitchFamily="34" charset="-120"/>
               </a:rPr>
-              <a:t>Warum virtualisieren?</a:t>
+              <a:t>Warum &amp; Begriffe</a:t>
             </a:r>
             <a:endParaRPr lang="en-US" sz="1050" dirty="0"/>
           </a:p>
@@ -8922,7 +8570,7 @@
                 <a:ea typeface="Arial" pitchFamily="34" charset="-122"/>
                 <a:cs typeface="Arial" pitchFamily="34" charset="-120"/>
               </a:rPr>
-              <a:t>3/12</a:t>
+              <a:t>3/13</a:t>
             </a:r>
             <a:endParaRPr lang="en-US" sz="1050" dirty="0"/>
           </a:p>
@@ -9052,7 +8700,7 @@
                 <a:ea typeface="Arial" pitchFamily="34" charset="-122"/>
                 <a:cs typeface="Arial" pitchFamily="34" charset="-120"/>
               </a:rPr>
-              <a:t>Die Begriffe des Abends</a:t>
+              <a:t>Die Begriffe, sauber sortiert</a:t>
             </a:r>
             <a:endParaRPr lang="en-US" sz="2600" dirty="0"/>
           </a:p>
@@ -9135,7 +8783,7 @@
                 <a:ea typeface="Arial" pitchFamily="34" charset="-122"/>
                 <a:cs typeface="Arial" pitchFamily="34" charset="-120"/>
               </a:rPr>
-              <a:t>Drei Begriffe reichen für heute – alles Weitere kommt beim Bauen von selbst.</a:t>
+              <a:t>Kurz und schmerzlos – ihr kennt das. Wichtig fürs Weitere: Die VM sieht nur, was der Hypervisor ihr baut.</a:t>
             </a:r>
             <a:endParaRPr lang="en-US" sz="1200" dirty="0"/>
           </a:p>
@@ -9197,7 +8845,7 @@
                 <a:ea typeface="Arial" pitchFamily="34" charset="-122"/>
                 <a:cs typeface="Arial" pitchFamily="34" charset="-120"/>
               </a:rPr>
-              <a:t>Warum virtualisieren?</a:t>
+              <a:t>Warum &amp; Begriffe</a:t>
             </a:r>
             <a:endParaRPr lang="en-US" sz="1050" dirty="0"/>
           </a:p>
@@ -9236,7 +8884,7 @@
                 <a:ea typeface="Arial" pitchFamily="34" charset="-122"/>
                 <a:cs typeface="Arial" pitchFamily="34" charset="-120"/>
               </a:rPr>
-              <a:t>4/12</a:t>
+              <a:t>4/13</a:t>
             </a:r>
             <a:endParaRPr lang="en-US" sz="1050" dirty="0"/>
           </a:p>
@@ -9449,7 +9097,7 @@
                 <a:ea typeface="Arial" pitchFamily="34" charset="-122"/>
                 <a:cs typeface="Arial" pitchFamily="34" charset="-120"/>
               </a:rPr>
-              <a:t>Heute nutzt ihr Typ 2 auf eurem Laptop – im Rechenzentrum steht Typ 1. Das Prinzip ist dasselbe.</a:t>
+              <a:t>Typ 2 kennt ihr vom eigenen Rechner. Der Rest des Abends spielt fast nur noch auf Typ 1 – ohne dass ihr ihn je seht.</a:t>
             </a:r>
             <a:endParaRPr lang="en-US" sz="1200" dirty="0"/>
           </a:p>
@@ -9511,7 +9159,7 @@
                 <a:ea typeface="Arial" pitchFamily="34" charset="-122"/>
                 <a:cs typeface="Arial" pitchFamily="34" charset="-120"/>
               </a:rPr>
-              <a:t>Warum virtualisieren?</a:t>
+              <a:t>Warum &amp; Begriffe</a:t>
             </a:r>
             <a:endParaRPr lang="en-US" sz="1050" dirty="0"/>
           </a:p>
@@ -9550,7 +9198,7 @@
                 <a:ea typeface="Arial" pitchFamily="34" charset="-122"/>
                 <a:cs typeface="Arial" pitchFamily="34" charset="-120"/>
               </a:rPr>
-              <a:t>5/12</a:t>
+              <a:t>5/13</a:t>
             </a:r>
             <a:endParaRPr lang="en-US" sz="1050" dirty="0"/>
           </a:p>
@@ -9596,67 +9244,107 @@
         </p:nvSpPr>
         <p:spPr>
           <a:xfrm>
-            <a:off x="566928" y="201168"/>
+            <a:off x="6355080" y="0"/>
+            <a:ext cx="2788920" cy="5143500"/>
+          </a:xfrm>
+          <a:prstGeom prst="rect">
+            <a:avLst/>
+          </a:prstGeom>
+          <a:solidFill>
+            <a:srgbClr val="E6F4F5"/>
+          </a:solidFill>
+          <a:ln/>
+        </p:spPr>
+      </p:sp>
+      <p:sp>
+        <p:nvSpPr>
+          <p:cNvPr id="3" name="Shape 1"/>
+          <p:cNvSpPr/>
+          <p:nvPr/>
+        </p:nvSpPr>
+        <p:spPr>
+          <a:xfrm>
+            <a:off x="6355080" y="0"/>
+            <a:ext cx="45720" cy="5143500"/>
+          </a:xfrm>
+          <a:prstGeom prst="rect">
+            <a:avLst/>
+          </a:prstGeom>
+          <a:solidFill>
+            <a:srgbClr val="0F7C86"/>
+          </a:solidFill>
+          <a:ln/>
+        </p:spPr>
+      </p:sp>
+      <p:sp>
+        <p:nvSpPr>
+          <p:cNvPr id="4" name="Text 2"/>
+          <p:cNvSpPr/>
+          <p:nvPr/>
+        </p:nvSpPr>
+        <p:spPr>
+          <a:xfrm>
+            <a:off x="6629400" y="1463040"/>
+            <a:ext cx="2194560" cy="1737360"/>
+          </a:xfrm>
+          <a:prstGeom prst="rect">
+            <a:avLst/>
+          </a:prstGeom>
+          <a:noFill/>
+          <a:ln/>
+        </p:spPr>
+        <p:txBody>
+          <a:bodyPr wrap="square" lIns="0" tIns="0" rIns="0" bIns="0" rtlCol="0" anchor="ctr"/>
+          <a:lstStyle/>
+          <a:p>
+            <a:pPr algn="ctr" indent="0" marL="0">
+              <a:buNone/>
+            </a:pPr>
+            <a:r>
+              <a:rPr lang="en-US" sz="8400" b="1" dirty="0">
+                <a:solidFill>
+                  <a:srgbClr val="0F7C86"/>
+                </a:solidFill>
+                <a:latin typeface="Arial" pitchFamily="34" charset="0"/>
+                <a:ea typeface="Arial" pitchFamily="34" charset="-122"/>
+                <a:cs typeface="Arial" pitchFamily="34" charset="-120"/>
+              </a:rPr>
+              <a:t>02</a:t>
+            </a:r>
+            <a:endParaRPr lang="en-US" sz="8400" dirty="0"/>
+          </a:p>
+        </p:txBody>
+      </p:sp>
+      <p:sp>
+        <p:nvSpPr>
+          <p:cNvPr id="5" name="Shape 3"/>
+          <p:cNvSpPr/>
+          <p:nvPr/>
+        </p:nvSpPr>
+        <p:spPr>
+          <a:xfrm>
+            <a:off x="566928" y="1883664"/>
             <a:ext cx="475488" cy="50292"/>
           </a:xfrm>
           <a:prstGeom prst="rect">
             <a:avLst/>
           </a:prstGeom>
           <a:solidFill>
-            <a:srgbClr val="3843AF"/>
+            <a:srgbClr val="0F7C86"/>
           </a:solidFill>
           <a:ln/>
         </p:spPr>
       </p:sp>
       <p:sp>
         <p:nvSpPr>
-          <p:cNvPr id="3" name="Text 1"/>
-          <p:cNvSpPr/>
-          <p:nvPr/>
-        </p:nvSpPr>
-        <p:spPr>
-          <a:xfrm>
-            <a:off x="566928" y="384048"/>
-            <a:ext cx="8010144" cy="237744"/>
-          </a:xfrm>
-          <a:prstGeom prst="rect">
-            <a:avLst/>
-          </a:prstGeom>
-          <a:noFill/>
-          <a:ln/>
-        </p:spPr>
-        <p:txBody>
-          <a:bodyPr wrap="square" lIns="0" tIns="0" rIns="0" bIns="0" rtlCol="0" anchor="ctr"/>
-          <a:lstStyle/>
-          <a:p>
-            <a:pPr indent="0" marL="0">
-              <a:buNone/>
-            </a:pPr>
-            <a:r>
-              <a:rPr lang="en-US" sz="1150" b="1" spc="180" kern="0" dirty="0">
-                <a:solidFill>
-                  <a:srgbClr val="3843AF"/>
-                </a:solidFill>
-                <a:latin typeface="Arial" pitchFamily="34" charset="0"/>
-                <a:ea typeface="Arial" pitchFamily="34" charset="-122"/>
-                <a:cs typeface="Arial" pitchFamily="34" charset="-120"/>
-              </a:rPr>
-              <a:t>DER BLICK VORAUS</a:t>
-            </a:r>
-            <a:endParaRPr lang="en-US" sz="1150" dirty="0"/>
-          </a:p>
-        </p:txBody>
-      </p:sp>
-      <p:sp>
-        <p:nvSpPr>
-          <p:cNvPr id="4" name="Text 2"/>
-          <p:cNvSpPr/>
-          <p:nvPr/>
-        </p:nvSpPr>
-        <p:spPr>
-          <a:xfrm>
-            <a:off x="566928" y="731520"/>
-            <a:ext cx="8010144" cy="603504"/>
+          <p:cNvPr id="6" name="Text 4"/>
+          <p:cNvSpPr/>
+          <p:nvPr/>
+        </p:nvSpPr>
+        <p:spPr>
+          <a:xfrm>
+            <a:off x="566928" y="2084832"/>
+            <a:ext cx="5394960" cy="868680"/>
           </a:xfrm>
           <a:prstGeom prst="rect">
             <a:avLst/>
@@ -9672,7 +9360,7 @@
               <a:buNone/>
             </a:pPr>
             <a:r>
-              <a:rPr lang="en-US" sz="2600" b="1" dirty="0">
+              <a:rPr lang="en-US" sz="3000" b="1" dirty="0">
                 <a:solidFill>
                   <a:srgbClr val="272E52"/>
                 </a:solidFill>
@@ -9680,144 +9368,38 @@
                 <a:ea typeface="Arial" pitchFamily="34" charset="-122"/>
                 <a:cs typeface="Arial" pitchFamily="34" charset="-120"/>
               </a:rPr>
-              <a:t>VM und Container</a:t>
-            </a:r>
-            <a:endParaRPr lang="en-US" sz="2600" dirty="0"/>
-          </a:p>
-        </p:txBody>
-      </p:sp>
-      <p:pic>
-        <p:nvPicPr>
-          <p:cNvPr id="5" name="Image 0" descr="/Users/jacobmenge/Desktop/kurs-26.2b-orga/folienwerkstatt/assets/diagramme/vm-vs-container.png">    </p:cNvPr>
-          <p:cNvPicPr>
-            <a:picLocks noChangeAspect="1"/>
-          </p:cNvPicPr>
-          <p:nvPr/>
-        </p:nvPicPr>
-        <p:blipFill>
-          <a:blip r:embed="rId1"/>
-          <a:stretch>
-            <a:fillRect/>
-          </a:stretch>
-        </p:blipFill>
-        <p:spPr>
-          <a:xfrm>
-            <a:off x="566928" y="1444752"/>
-            <a:ext cx="8010144" cy="2487168"/>
-          </a:xfrm>
-          <a:prstGeom prst="rect">
-            <a:avLst/>
-          </a:prstGeom>
-        </p:spPr>
-      </p:pic>
-      <p:sp>
-        <p:nvSpPr>
-          <p:cNvPr id="6" name="Shape 3"/>
-          <p:cNvSpPr/>
-          <p:nvPr/>
-        </p:nvSpPr>
-        <p:spPr>
-          <a:xfrm>
-            <a:off x="566928" y="4142232"/>
-            <a:ext cx="32004" cy="256032"/>
-          </a:xfrm>
-          <a:prstGeom prst="rect">
-            <a:avLst/>
-          </a:prstGeom>
-          <a:solidFill>
-            <a:srgbClr val="3843AF"/>
-          </a:solidFill>
-          <a:ln/>
-        </p:spPr>
-      </p:sp>
-      <p:sp>
-        <p:nvSpPr>
-          <p:cNvPr id="7" name="Text 4"/>
-          <p:cNvSpPr/>
-          <p:nvPr/>
-        </p:nvSpPr>
-        <p:spPr>
-          <a:xfrm>
-            <a:off x="749808" y="4096512"/>
-            <a:ext cx="7827264" cy="402336"/>
-          </a:xfrm>
-          <a:prstGeom prst="rect">
-            <a:avLst/>
-          </a:prstGeom>
-          <a:noFill/>
-          <a:ln/>
-        </p:spPr>
-        <p:txBody>
-          <a:bodyPr wrap="square" lIns="0" tIns="0" rIns="0" bIns="0" rtlCol="0" anchor="ctr"/>
-          <a:lstStyle/>
-          <a:p>
-            <a:pPr indent="0" marL="0">
-              <a:buNone/>
-            </a:pPr>
-            <a:r>
-              <a:rPr lang="en-US" sz="1200" b="1" dirty="0">
-                <a:solidFill>
-                  <a:srgbClr val="434A63"/>
-                </a:solidFill>
-                <a:latin typeface="Arial" pitchFamily="34" charset="0"/>
-                <a:ea typeface="Arial" pitchFamily="34" charset="-122"/>
-                <a:cs typeface="Arial" pitchFamily="34" charset="-120"/>
-              </a:rPr>
-              <a:t>Beides kapselt: die VM ein ganzes System, der Container nur die Anwendung. Ab nächster Woche baut ihr mit beidem.</a:t>
-            </a:r>
-            <a:endParaRPr lang="en-US" sz="1200" dirty="0"/>
-          </a:p>
-        </p:txBody>
-      </p:sp>
-      <p:sp>
-        <p:nvSpPr>
-          <p:cNvPr id="8" name="Shape 5"/>
-          <p:cNvSpPr/>
-          <p:nvPr/>
-        </p:nvSpPr>
-        <p:spPr>
-          <a:xfrm>
-            <a:off x="566928" y="4631436"/>
-            <a:ext cx="8010144" cy="0"/>
-          </a:xfrm>
-          <a:prstGeom prst="line">
-            <a:avLst/>
-          </a:prstGeom>
-          <a:noFill/>
-          <a:ln w="9525">
-            <a:solidFill>
-              <a:srgbClr val="DFE3F0"/>
-            </a:solidFill>
-            <a:prstDash val="solid"/>
-          </a:ln>
-        </p:spPr>
-      </p:sp>
-      <p:sp>
-        <p:nvSpPr>
-          <p:cNvPr id="9" name="Text 6"/>
-          <p:cNvSpPr/>
-          <p:nvPr/>
-        </p:nvSpPr>
-        <p:spPr>
-          <a:xfrm>
-            <a:off x="566928" y="4722876"/>
-            <a:ext cx="5029200" cy="237744"/>
-          </a:xfrm>
-          <a:prstGeom prst="rect">
-            <a:avLst/>
-          </a:prstGeom>
-          <a:noFill/>
-          <a:ln/>
-        </p:spPr>
-        <p:txBody>
-          <a:bodyPr wrap="square" lIns="0" tIns="0" rIns="0" bIns="0" rtlCol="0" anchor="ctr"/>
-          <a:lstStyle/>
-          <a:p>
-            <a:pPr indent="0" marL="0">
-              <a:buNone/>
-            </a:pPr>
-            <a:r>
-              <a:rPr lang="en-US" sz="1050" spc="30" kern="0" dirty="0">
+              <a:t>Wo läuft das heute überall?</a:t>
+            </a:r>
+            <a:endParaRPr lang="en-US" sz="3000" dirty="0"/>
+          </a:p>
+        </p:txBody>
+      </p:sp>
+      <p:sp>
+        <p:nvSpPr>
+          <p:cNvPr id="7" name="Text 5"/>
+          <p:cNvSpPr/>
+          <p:nvPr/>
+        </p:nvSpPr>
+        <p:spPr>
+          <a:xfrm>
+            <a:off x="566928" y="3017520"/>
+            <a:ext cx="5394960" cy="548640"/>
+          </a:xfrm>
+          <a:prstGeom prst="rect">
+            <a:avLst/>
+          </a:prstGeom>
+          <a:noFill/>
+          <a:ln/>
+        </p:spPr>
+        <p:txBody>
+          <a:bodyPr wrap="square" lIns="0" tIns="0" rIns="0" bIns="0" rtlCol="0" anchor="t"/>
+          <a:lstStyle/>
+          <a:p>
+            <a:pPr indent="0" marL="0">
+              <a:buNone/>
+            </a:pPr>
+            <a:r>
+              <a:rPr lang="en-US" sz="1350" dirty="0">
                 <a:solidFill>
                   <a:srgbClr val="5C6377"/>
                 </a:solidFill>
@@ -9825,48 +9407,9 @@
                 <a:ea typeface="Arial" pitchFamily="34" charset="-122"/>
                 <a:cs typeface="Arial" pitchFamily="34" charset="-120"/>
               </a:rPr>
-              <a:t>Warum virtualisieren?</a:t>
-            </a:r>
-            <a:endParaRPr lang="en-US" sz="1050" dirty="0"/>
-          </a:p>
-        </p:txBody>
-      </p:sp>
-      <p:sp>
-        <p:nvSpPr>
-          <p:cNvPr id="10" name="Text 7"/>
-          <p:cNvSpPr/>
-          <p:nvPr/>
-        </p:nvSpPr>
-        <p:spPr>
-          <a:xfrm>
-            <a:off x="8028432" y="4722876"/>
-            <a:ext cx="548640" cy="237744"/>
-          </a:xfrm>
-          <a:prstGeom prst="rect">
-            <a:avLst/>
-          </a:prstGeom>
-          <a:noFill/>
-          <a:ln/>
-        </p:spPr>
-        <p:txBody>
-          <a:bodyPr wrap="square" lIns="0" tIns="0" rIns="0" bIns="0" rtlCol="0" anchor="ctr"/>
-          <a:lstStyle/>
-          <a:p>
-            <a:pPr algn="r" indent="0" marL="0">
-              <a:buNone/>
-            </a:pPr>
-            <a:r>
-              <a:rPr lang="en-US" sz="1050" dirty="0">
-                <a:solidFill>
-                  <a:srgbClr val="5C6377"/>
-                </a:solidFill>
-                <a:latin typeface="Arial" pitchFamily="34" charset="0"/>
-                <a:ea typeface="Arial" pitchFamily="34" charset="-122"/>
-                <a:cs typeface="Arial" pitchFamily="34" charset="-120"/>
-              </a:rPr>
-              <a:t>6/12</a:t>
-            </a:r>
-            <a:endParaRPr lang="en-US" sz="1050" dirty="0"/>
+              <a:t>Rechenzentrum, Cloud, Arbeitsplatz</a:t>
+            </a:r>
+            <a:endParaRPr lang="en-US" sz="1350" dirty="0"/>
           </a:p>
         </p:txBody>
       </p:sp>
@@ -9910,28 +9453,8 @@
         </p:nvSpPr>
         <p:spPr>
           <a:xfrm>
-            <a:off x="6355080" y="0"/>
-            <a:ext cx="2788920" cy="5143500"/>
-          </a:xfrm>
-          <a:prstGeom prst="rect">
-            <a:avLst/>
-          </a:prstGeom>
-          <a:solidFill>
-            <a:srgbClr val="E6F4F5"/>
-          </a:solidFill>
-          <a:ln/>
-        </p:spPr>
-      </p:sp>
-      <p:sp>
-        <p:nvSpPr>
-          <p:cNvPr id="3" name="Shape 1"/>
-          <p:cNvSpPr/>
-          <p:nvPr/>
-        </p:nvSpPr>
-        <p:spPr>
-          <a:xfrm>
-            <a:off x="6355080" y="0"/>
-            <a:ext cx="45720" cy="5143500"/>
+            <a:off x="566928" y="201168"/>
+            <a:ext cx="475488" cy="50292"/>
           </a:xfrm>
           <a:prstGeom prst="rect">
             <a:avLst/>
@@ -9944,53 +9467,116 @@
       </p:sp>
       <p:sp>
         <p:nvSpPr>
+          <p:cNvPr id="3" name="Text 1"/>
+          <p:cNvSpPr/>
+          <p:nvPr/>
+        </p:nvSpPr>
+        <p:spPr>
+          <a:xfrm>
+            <a:off x="566928" y="384048"/>
+            <a:ext cx="8010144" cy="237744"/>
+          </a:xfrm>
+          <a:prstGeom prst="rect">
+            <a:avLst/>
+          </a:prstGeom>
+          <a:noFill/>
+          <a:ln/>
+        </p:spPr>
+        <p:txBody>
+          <a:bodyPr wrap="square" lIns="0" tIns="0" rIns="0" bIns="0" rtlCol="0" anchor="ctr"/>
+          <a:lstStyle/>
+          <a:p>
+            <a:pPr indent="0" marL="0">
+              <a:buNone/>
+            </a:pPr>
+            <a:r>
+              <a:rPr lang="en-US" sz="1150" b="1" spc="180" kern="0" dirty="0">
+                <a:solidFill>
+                  <a:srgbClr val="0F7C86"/>
+                </a:solidFill>
+                <a:latin typeface="Arial" pitchFamily="34" charset="0"/>
+                <a:ea typeface="Arial" pitchFamily="34" charset="-122"/>
+                <a:cs typeface="Arial" pitchFamily="34" charset="-120"/>
+              </a:rPr>
+              <a:t>DREI ORTE, EIN PRINZIP</a:t>
+            </a:r>
+            <a:endParaRPr lang="en-US" sz="1150" dirty="0"/>
+          </a:p>
+        </p:txBody>
+      </p:sp>
+      <p:sp>
+        <p:nvSpPr>
           <p:cNvPr id="4" name="Text 2"/>
           <p:cNvSpPr/>
           <p:nvPr/>
         </p:nvSpPr>
         <p:spPr>
           <a:xfrm>
-            <a:off x="6629400" y="1463040"/>
-            <a:ext cx="2194560" cy="1737360"/>
-          </a:xfrm>
-          <a:prstGeom prst="rect">
-            <a:avLst/>
-          </a:prstGeom>
-          <a:noFill/>
-          <a:ln/>
-        </p:spPr>
-        <p:txBody>
-          <a:bodyPr wrap="square" lIns="0" tIns="0" rIns="0" bIns="0" rtlCol="0" anchor="ctr"/>
-          <a:lstStyle/>
-          <a:p>
-            <a:pPr algn="ctr" indent="0" marL="0">
-              <a:buNone/>
-            </a:pPr>
-            <a:r>
-              <a:rPr lang="en-US" sz="8400" b="1" dirty="0">
-                <a:solidFill>
-                  <a:srgbClr val="0F7C86"/>
-                </a:solidFill>
-                <a:latin typeface="Arial" pitchFamily="34" charset="0"/>
-                <a:ea typeface="Arial" pitchFamily="34" charset="-122"/>
-                <a:cs typeface="Arial" pitchFamily="34" charset="-120"/>
-              </a:rPr>
-              <a:t>02</a:t>
-            </a:r>
-            <a:endParaRPr lang="en-US" sz="8400" dirty="0"/>
-          </a:p>
-        </p:txBody>
-      </p:sp>
-      <p:sp>
-        <p:nvSpPr>
-          <p:cNvPr id="5" name="Shape 3"/>
-          <p:cNvSpPr/>
-          <p:nvPr/>
-        </p:nvSpPr>
-        <p:spPr>
-          <a:xfrm>
-            <a:off x="566928" y="1883664"/>
-            <a:ext cx="475488" cy="50292"/>
+            <a:off x="566928" y="731520"/>
+            <a:ext cx="8010144" cy="603504"/>
+          </a:xfrm>
+          <a:prstGeom prst="rect">
+            <a:avLst/>
+          </a:prstGeom>
+          <a:noFill/>
+          <a:ln/>
+        </p:spPr>
+        <p:txBody>
+          <a:bodyPr wrap="square" lIns="0" tIns="0" rIns="0" bIns="0" rtlCol="0" anchor="t"/>
+          <a:lstStyle/>
+          <a:p>
+            <a:pPr indent="0" marL="0">
+              <a:buNone/>
+            </a:pPr>
+            <a:r>
+              <a:rPr lang="en-US" sz="2600" b="1" dirty="0">
+                <a:solidFill>
+                  <a:srgbClr val="272E52"/>
+                </a:solidFill>
+                <a:latin typeface="Arial" pitchFamily="34" charset="0"/>
+                <a:ea typeface="Arial" pitchFamily="34" charset="-122"/>
+                <a:cs typeface="Arial" pitchFamily="34" charset="-120"/>
+              </a:rPr>
+              <a:t>Wo Virtualisierung heute läuft</a:t>
+            </a:r>
+            <a:endParaRPr lang="en-US" sz="2600" dirty="0"/>
+          </a:p>
+        </p:txBody>
+      </p:sp>
+      <p:pic>
+        <p:nvPicPr>
+          <p:cNvPr id="5" name="Image 0" descr="/Users/jacobmenge/Desktop/kurs-26.2b-orga/folienwerkstatt/assets/diagramme/einsatz-orte.png">    </p:cNvPr>
+          <p:cNvPicPr>
+            <a:picLocks noChangeAspect="1"/>
+          </p:cNvPicPr>
+          <p:nvPr/>
+        </p:nvPicPr>
+        <p:blipFill>
+          <a:blip r:embed="rId1"/>
+          <a:stretch>
+            <a:fillRect/>
+          </a:stretch>
+        </p:blipFill>
+        <p:spPr>
+          <a:xfrm>
+            <a:off x="566928" y="1463040"/>
+            <a:ext cx="8010144" cy="2450592"/>
+          </a:xfrm>
+          <a:prstGeom prst="rect">
+            <a:avLst/>
+          </a:prstGeom>
+        </p:spPr>
+      </p:pic>
+      <p:sp>
+        <p:nvSpPr>
+          <p:cNvPr id="6" name="Shape 3"/>
+          <p:cNvSpPr/>
+          <p:nvPr/>
+        </p:nvSpPr>
+        <p:spPr>
+          <a:xfrm>
+            <a:off x="566928" y="4114800"/>
+            <a:ext cx="32004" cy="256032"/>
           </a:xfrm>
           <a:prstGeom prst="rect">
             <a:avLst/>
@@ -10003,69 +9589,92 @@
       </p:sp>
       <p:sp>
         <p:nvSpPr>
-          <p:cNvPr id="6" name="Text 4"/>
-          <p:cNvSpPr/>
-          <p:nvPr/>
-        </p:nvSpPr>
-        <p:spPr>
-          <a:xfrm>
-            <a:off x="566928" y="2084832"/>
-            <a:ext cx="5394960" cy="868680"/>
-          </a:xfrm>
-          <a:prstGeom prst="rect">
-            <a:avLst/>
-          </a:prstGeom>
-          <a:noFill/>
-          <a:ln/>
-        </p:spPr>
-        <p:txBody>
-          <a:bodyPr wrap="square" lIns="0" tIns="0" rIns="0" bIns="0" rtlCol="0" anchor="t"/>
-          <a:lstStyle/>
-          <a:p>
-            <a:pPr indent="0" marL="0">
-              <a:buNone/>
-            </a:pPr>
-            <a:r>
-              <a:rPr lang="en-US" sz="3000" b="1" dirty="0">
-                <a:solidFill>
-                  <a:srgbClr val="272E52"/>
-                </a:solidFill>
-                <a:latin typeface="Arial" pitchFamily="34" charset="0"/>
-                <a:ea typeface="Arial" pitchFamily="34" charset="-122"/>
-                <a:cs typeface="Arial" pitchFamily="34" charset="-120"/>
-              </a:rPr>
-              <a:t>Multipass</a:t>
-            </a:r>
-            <a:endParaRPr lang="en-US" sz="3000" dirty="0"/>
-          </a:p>
-        </p:txBody>
-      </p:sp>
-      <p:sp>
-        <p:nvSpPr>
-          <p:cNvPr id="7" name="Text 5"/>
-          <p:cNvSpPr/>
-          <p:nvPr/>
-        </p:nvSpPr>
-        <p:spPr>
-          <a:xfrm>
-            <a:off x="566928" y="3017520"/>
-            <a:ext cx="5394960" cy="548640"/>
-          </a:xfrm>
-          <a:prstGeom prst="rect">
-            <a:avLst/>
-          </a:prstGeom>
-          <a:noFill/>
-          <a:ln/>
-        </p:spPr>
-        <p:txBody>
-          <a:bodyPr wrap="square" lIns="0" tIns="0" rIns="0" bIns="0" rtlCol="0" anchor="t"/>
-          <a:lstStyle/>
-          <a:p>
-            <a:pPr indent="0" marL="0">
-              <a:buNone/>
-            </a:pPr>
-            <a:r>
-              <a:rPr lang="en-US" sz="1350" dirty="0">
+          <p:cNvPr id="7" name="Text 4"/>
+          <p:cNvSpPr/>
+          <p:nvPr/>
+        </p:nvSpPr>
+        <p:spPr>
+          <a:xfrm>
+            <a:off x="749808" y="4069080"/>
+            <a:ext cx="7827264" cy="402336"/>
+          </a:xfrm>
+          <a:prstGeom prst="rect">
+            <a:avLst/>
+          </a:prstGeom>
+          <a:noFill/>
+          <a:ln/>
+        </p:spPr>
+        <p:txBody>
+          <a:bodyPr wrap="square" lIns="0" tIns="0" rIns="0" bIns="0" rtlCol="0" anchor="ctr"/>
+          <a:lstStyle/>
+          <a:p>
+            <a:pPr indent="0" marL="0">
+              <a:buNone/>
+            </a:pPr>
+            <a:r>
+              <a:rPr lang="en-US" sz="1200" b="1" dirty="0">
+                <a:solidFill>
+                  <a:srgbClr val="434A63"/>
+                </a:solidFill>
+                <a:latin typeface="Arial" pitchFamily="34" charset="0"/>
+                <a:ea typeface="Arial" pitchFamily="34" charset="-122"/>
+                <a:cs typeface="Arial" pitchFamily="34" charset="-120"/>
+              </a:rPr>
+              <a:t>Die mittlere Säule ist der Grund für unsere heutige Übung: Ihr bekommt gleich so eine Cloud-VM in die Hand.</a:t>
+            </a:r>
+            <a:endParaRPr lang="en-US" sz="1200" dirty="0"/>
+          </a:p>
+        </p:txBody>
+      </p:sp>
+      <p:sp>
+        <p:nvSpPr>
+          <p:cNvPr id="8" name="Shape 5"/>
+          <p:cNvSpPr/>
+          <p:nvPr/>
+        </p:nvSpPr>
+        <p:spPr>
+          <a:xfrm>
+            <a:off x="566928" y="4631436"/>
+            <a:ext cx="8010144" cy="0"/>
+          </a:xfrm>
+          <a:prstGeom prst="line">
+            <a:avLst/>
+          </a:prstGeom>
+          <a:noFill/>
+          <a:ln w="9525">
+            <a:solidFill>
+              <a:srgbClr val="DFE3F0"/>
+            </a:solidFill>
+            <a:prstDash val="solid"/>
+          </a:ln>
+        </p:spPr>
+      </p:sp>
+      <p:sp>
+        <p:nvSpPr>
+          <p:cNvPr id="9" name="Text 6"/>
+          <p:cNvSpPr/>
+          <p:nvPr/>
+        </p:nvSpPr>
+        <p:spPr>
+          <a:xfrm>
+            <a:off x="566928" y="4722876"/>
+            <a:ext cx="5029200" cy="237744"/>
+          </a:xfrm>
+          <a:prstGeom prst="rect">
+            <a:avLst/>
+          </a:prstGeom>
+          <a:noFill/>
+          <a:ln/>
+        </p:spPr>
+        <p:txBody>
+          <a:bodyPr wrap="square" lIns="0" tIns="0" rIns="0" bIns="0" rtlCol="0" anchor="ctr"/>
+          <a:lstStyle/>
+          <a:p>
+            <a:pPr indent="0" marL="0">
+              <a:buNone/>
+            </a:pPr>
+            <a:r>
+              <a:rPr lang="en-US" sz="1050" spc="30" kern="0" dirty="0">
                 <a:solidFill>
                   <a:srgbClr val="5C6377"/>
                 </a:solidFill>
@@ -10073,9 +9682,48 @@
                 <a:ea typeface="Arial" pitchFamily="34" charset="-122"/>
                 <a:cs typeface="Arial" pitchFamily="34" charset="-120"/>
               </a:rPr>
-              <a:t>Ubuntu-VMs mit einem Befehl – unser Werkzeug für diese Woche</a:t>
-            </a:r>
-            <a:endParaRPr lang="en-US" sz="1350" dirty="0"/>
+              <a:t>Einsatz in der Praxis</a:t>
+            </a:r>
+            <a:endParaRPr lang="en-US" sz="1050" dirty="0"/>
+          </a:p>
+        </p:txBody>
+      </p:sp>
+      <p:sp>
+        <p:nvSpPr>
+          <p:cNvPr id="10" name="Text 7"/>
+          <p:cNvSpPr/>
+          <p:nvPr/>
+        </p:nvSpPr>
+        <p:spPr>
+          <a:xfrm>
+            <a:off x="8028432" y="4722876"/>
+            <a:ext cx="548640" cy="237744"/>
+          </a:xfrm>
+          <a:prstGeom prst="rect">
+            <a:avLst/>
+          </a:prstGeom>
+          <a:noFill/>
+          <a:ln/>
+        </p:spPr>
+        <p:txBody>
+          <a:bodyPr wrap="square" lIns="0" tIns="0" rIns="0" bIns="0" rtlCol="0" anchor="ctr"/>
+          <a:lstStyle/>
+          <a:p>
+            <a:pPr algn="r" indent="0" marL="0">
+              <a:buNone/>
+            </a:pPr>
+            <a:r>
+              <a:rPr lang="en-US" sz="1050" dirty="0">
+                <a:solidFill>
+                  <a:srgbClr val="5C6377"/>
+                </a:solidFill>
+                <a:latin typeface="Arial" pitchFamily="34" charset="0"/>
+                <a:ea typeface="Arial" pitchFamily="34" charset="-122"/>
+                <a:cs typeface="Arial" pitchFamily="34" charset="-120"/>
+              </a:rPr>
+              <a:t>6/13</a:t>
+            </a:r>
+            <a:endParaRPr lang="en-US" sz="1050" dirty="0"/>
           </a:p>
         </p:txBody>
       </p:sp>

--- a/folien/04-virtualisierung.pptx
+++ b/folien/04-virtualisierung.pptx
@@ -3010,7 +3010,7 @@
                 <a:ea typeface="Arial" pitchFamily="34" charset="-122"/>
                 <a:cs typeface="Arial" pitchFamily="34" charset="-120"/>
               </a:rPr>
-              <a:t>SNAPSHOTS – GLEICH ALS LIVE-DEMO</a:t>
+              <a:t>SNAPSHOTS</a:t>
             </a:r>
             <a:endParaRPr lang="en-US" sz="1150" dirty="0"/>
           </a:p>
@@ -3132,7 +3132,7 @@
                 <a:ea typeface="Arial" pitchFamily="34" charset="-122"/>
                 <a:cs typeface="Arial" pitchFamily="34" charset="-120"/>
               </a:rPr>
-              <a:t>Ich mache das jetzt einmal live kaputt und wieder heil – wer es selbst will: Kür-Teil der Übungsseite, zehn Minuten.</a:t>
+              <a:t>Snapshot vor jedem Experiment – dann kostet Mut nichts mehr. Zum Selbermachen: Kür-Teil der Übungsseite, zehn Minuten.</a:t>
             </a:r>
             <a:endParaRPr lang="en-US" sz="1200" dirty="0"/>
           </a:p>
@@ -3670,7 +3670,7 @@
                 <a:ea typeface="Arial" pitchFamily="34" charset="-122"/>
                 <a:cs typeface="Arial" pitchFamily="34" charset="-120"/>
               </a:rPr>
-              <a:t>Pluralsight → Cloud-Sandbox: einen Linux-Server starten, per Terminal verbinden</a:t>
+              <a:t>Pluralsight → Hands-on → Reiter „Cloud Servers“: Ubuntu 24.04, Zone Europe, Größe Micro</a:t>
             </a:r>
             <a:endParaRPr lang="en-US" sz="1150" dirty="0"/>
           </a:p>
@@ -4404,7 +4404,7 @@
                 <a:ea typeface="Arial" pitchFamily="34" charset="-122"/>
                 <a:cs typeface="Arial" pitchFamily="34" charset="-120"/>
               </a:rPr>
-              <a:t>Jeder startet seine eigene Sandbox – kaputt machen ist ausdrücklich erlaubt, sie ist wegwerfbar.</a:t>
+              <a:t>Jeder startet seinen eigenen Server – beim ersten Login verlangt er ein neues Passwort (Anleitung zeigt es).</a:t>
             </a:r>
             <a:endParaRPr lang="en-US" sz="1250" dirty="0"/>
           </a:p>
@@ -4484,7 +4484,7 @@
                 <a:ea typeface="Arial" pitchFamily="34" charset="-122"/>
                 <a:cs typeface="Arial" pitchFamily="34" charset="-120"/>
               </a:rPr>
-              <a:t>Kommt ihr nicht in die Sandbox: Die Übung läuft genauso auf jeder anderen Linux-VM (Multipass-Anleitung ist verlinkt).</a:t>
+              <a:t>Kommt ihr nicht hinein: Die Übung läuft genauso auf jeder anderen Linux-VM – der zweite Tab in der Anleitung zeigt den Weg.</a:t>
             </a:r>
             <a:endParaRPr lang="en-US" sz="1250" dirty="0"/>
           </a:p>
@@ -5228,7 +5228,7 @@
                 <a:ea typeface="Arial" pitchFamily="34" charset="-122"/>
                 <a:cs typeface="Arial" pitchFamily="34" charset="-120"/>
               </a:rPr>
-              <a:t>Vergleich der Gruppen: Stecken alle Sandboxen im gleichen Netz-Muster?</a:t>
+              <a:t>Vergleich der Gruppen: Stecken alle Server im gleichen Netz-Muster?</a:t>
             </a:r>
             <a:endParaRPr lang="en-US" sz="1200" dirty="0"/>
           </a:p>
@@ -7221,7 +7221,7 @@
                 <a:ea typeface="Arial" pitchFamily="34" charset="-122"/>
                 <a:cs typeface="Arial" pitchFamily="34" charset="-120"/>
               </a:rPr>
-              <a:t>In die VM geschaut: ihr Netz – und Snapshots (Live-Demo)</a:t>
+              <a:t>In die VM geschaut: ihr Netz – und Snapshots</a:t>
             </a:r>
             <a:endParaRPr lang="en-US" sz="1050" dirty="0"/>
           </a:p>
@@ -9620,7 +9620,7 @@
                 <a:ea typeface="Arial" pitchFamily="34" charset="-122"/>
                 <a:cs typeface="Arial" pitchFamily="34" charset="-120"/>
               </a:rPr>
-              <a:t>Die mittlere Säule ist der Grund für unsere heutige Übung: Ihr bekommt gleich so eine Cloud-VM in die Hand.</a:t>
+              <a:t>Die mittlere Säule ist der Grund für unsere heutige Übung: Ihr bekommt gleich so eine Cloud-VM in die Hand – über Pluralsight.</a:t>
             </a:r>
             <a:endParaRPr lang="en-US" sz="1200" dirty="0"/>
           </a:p>

--- a/folien/04-virtualisierung.pptx
+++ b/folien/04-virtualisierung.pptx
@@ -3748,7 +3748,7 @@
                 <a:ea typeface="Arial" pitchFamily="34" charset="-122"/>
                 <a:cs typeface="Arial" pitchFamily="34" charset="-120"/>
               </a:rPr>
-              <a:t>Netz-Detektiv: Adresse, Netz, Gateway ermitteln – privates vs. öffentliches Gesicht der VM</a:t>
+              <a:t>Netz-Detektiv: Adresse, Netz und Gateway ermitteln – dann private und öffentliche IP vergleichen</a:t>
             </a:r>
             <a:endParaRPr lang="en-US" sz="1150" dirty="0"/>
           </a:p>
@@ -6524,7 +6524,7 @@
                 <a:ea typeface="Arial" pitchFamily="34" charset="-122"/>
                 <a:cs typeface="Arial" pitchFamily="34" charset="-120"/>
               </a:rPr>
-              <a:t>Vom Blech bis zur Cloud-VM – Theorie, Übung und die Multipass-Kür stehen zum Nachlesen auf der Kursseite.</a:t>
+              <a:t>Vom eigenen Serverraum bis zur Cloud-VM – Theorie, Übung und die Multipass-Kür stehen zum Nachlesen auf der Kursseite.</a:t>
             </a:r>
             <a:endParaRPr lang="en-US" sz="1400" dirty="0"/>
           </a:p>

--- a/folien/04-virtualisierung.pptx
+++ b/folien/04-virtualisierung.pptx
@@ -3586,8 +3586,8 @@
         </p:nvSpPr>
         <p:spPr>
           <a:xfrm>
-            <a:off x="438912" y="1828800"/>
-            <a:ext cx="8266176" cy="365760"/>
+            <a:off x="438912" y="1792224"/>
+            <a:ext cx="8266176" cy="329184"/>
           </a:xfrm>
           <a:prstGeom prst="rect">
             <a:avLst/>
@@ -3606,8 +3606,8 @@
         </p:nvSpPr>
         <p:spPr>
           <a:xfrm>
-            <a:off x="566928" y="1828800"/>
-            <a:ext cx="914400" cy="365760"/>
+            <a:off x="566928" y="1792224"/>
+            <a:ext cx="914400" cy="329184"/>
           </a:xfrm>
           <a:prstGeom prst="rect">
             <a:avLst/>
@@ -3623,7 +3623,7 @@
               <a:buNone/>
             </a:pPr>
             <a:r>
-              <a:rPr lang="en-US" sz="1150" b="1" dirty="0">
+              <a:rPr lang="en-US" sz="1100" b="1" dirty="0">
                 <a:solidFill>
                   <a:srgbClr val="9A6310"/>
                 </a:solidFill>
@@ -3633,7 +3633,7 @@
               </a:rPr>
               <a:t>Start</a:t>
             </a:r>
-            <a:endParaRPr lang="en-US" sz="1150" dirty="0"/>
+            <a:endParaRPr lang="en-US" sz="1100" dirty="0"/>
           </a:p>
         </p:txBody>
       </p:sp>
@@ -3645,8 +3645,8 @@
         </p:nvSpPr>
         <p:spPr>
           <a:xfrm>
-            <a:off x="1481328" y="1828800"/>
-            <a:ext cx="7095744" cy="365760"/>
+            <a:off x="1481328" y="1792224"/>
+            <a:ext cx="7095744" cy="329184"/>
           </a:xfrm>
           <a:prstGeom prst="rect">
             <a:avLst/>
@@ -3662,7 +3662,7 @@
               <a:buNone/>
             </a:pPr>
             <a:r>
-              <a:rPr lang="en-US" sz="1150" dirty="0">
+              <a:rPr lang="en-US" sz="1100" dirty="0">
                 <a:solidFill>
                   <a:srgbClr val="434A63"/>
                 </a:solidFill>
@@ -3672,7 +3672,7 @@
               </a:rPr>
               <a:t>Pluralsight → Hands-on → Reiter „Cloud Servers“: Ubuntu 24.04, Zone Europe, Größe Micro</a:t>
             </a:r>
-            <a:endParaRPr lang="en-US" sz="1150" dirty="0"/>
+            <a:endParaRPr lang="en-US" sz="1100" dirty="0"/>
           </a:p>
         </p:txBody>
       </p:sp>
@@ -3684,8 +3684,8 @@
         </p:nvSpPr>
         <p:spPr>
           <a:xfrm>
-            <a:off x="566928" y="2194560"/>
-            <a:ext cx="914400" cy="365760"/>
+            <a:off x="566928" y="2121408"/>
+            <a:ext cx="914400" cy="329184"/>
           </a:xfrm>
           <a:prstGeom prst="rect">
             <a:avLst/>
@@ -3701,7 +3701,7 @@
               <a:buNone/>
             </a:pPr>
             <a:r>
-              <a:rPr lang="en-US" sz="1150" b="1" dirty="0">
+              <a:rPr lang="en-US" sz="1100" b="1" dirty="0">
                 <a:solidFill>
                   <a:srgbClr val="9A6310"/>
                 </a:solidFill>
@@ -3711,7 +3711,7 @@
               </a:rPr>
               <a:t>Teil A</a:t>
             </a:r>
-            <a:endParaRPr lang="en-US" sz="1150" dirty="0"/>
+            <a:endParaRPr lang="en-US" sz="1100" dirty="0"/>
           </a:p>
         </p:txBody>
       </p:sp>
@@ -3723,8 +3723,8 @@
         </p:nvSpPr>
         <p:spPr>
           <a:xfrm>
-            <a:off x="1481328" y="2194560"/>
-            <a:ext cx="7095744" cy="365760"/>
+            <a:off x="1481328" y="2121408"/>
+            <a:ext cx="7095744" cy="329184"/>
           </a:xfrm>
           <a:prstGeom prst="rect">
             <a:avLst/>
@@ -3740,7 +3740,7 @@
               <a:buNone/>
             </a:pPr>
             <a:r>
-              <a:rPr lang="en-US" sz="1150" dirty="0">
+              <a:rPr lang="en-US" sz="1100" dirty="0">
                 <a:solidFill>
                   <a:srgbClr val="434A63"/>
                 </a:solidFill>
@@ -3750,7 +3750,7 @@
               </a:rPr>
               <a:t>Netz-Detektiv: Adresse, Netz und Gateway ermitteln – dann private und öffentliche IP vergleichen</a:t>
             </a:r>
-            <a:endParaRPr lang="en-US" sz="1150" dirty="0"/>
+            <a:endParaRPr lang="en-US" sz="1100" dirty="0"/>
           </a:p>
         </p:txBody>
       </p:sp>
@@ -3762,8 +3762,8 @@
         </p:nvSpPr>
         <p:spPr>
           <a:xfrm>
-            <a:off x="438912" y="2560320"/>
-            <a:ext cx="8266176" cy="365760"/>
+            <a:off x="438912" y="2450592"/>
+            <a:ext cx="8266176" cy="329184"/>
           </a:xfrm>
           <a:prstGeom prst="rect">
             <a:avLst/>
@@ -3782,8 +3782,8 @@
         </p:nvSpPr>
         <p:spPr>
           <a:xfrm>
-            <a:off x="566928" y="2560320"/>
-            <a:ext cx="914400" cy="365760"/>
+            <a:off x="566928" y="2450592"/>
+            <a:ext cx="914400" cy="329184"/>
           </a:xfrm>
           <a:prstGeom prst="rect">
             <a:avLst/>
@@ -3799,7 +3799,7 @@
               <a:buNone/>
             </a:pPr>
             <a:r>
-              <a:rPr lang="en-US" sz="1150" b="1" dirty="0">
+              <a:rPr lang="en-US" sz="1100" b="1" dirty="0">
                 <a:solidFill>
                   <a:srgbClr val="9A6310"/>
                 </a:solidFill>
@@ -3809,7 +3809,7 @@
               </a:rPr>
               <a:t>Teil B</a:t>
             </a:r>
-            <a:endParaRPr lang="en-US" sz="1150" dirty="0"/>
+            <a:endParaRPr lang="en-US" sz="1100" dirty="0"/>
           </a:p>
         </p:txBody>
       </p:sp>
@@ -3821,8 +3821,8 @@
         </p:nvSpPr>
         <p:spPr>
           <a:xfrm>
-            <a:off x="1481328" y="2560320"/>
-            <a:ext cx="7095744" cy="365760"/>
+            <a:off x="1481328" y="2450592"/>
+            <a:ext cx="7095744" cy="329184"/>
           </a:xfrm>
           <a:prstGeom prst="rect">
             <a:avLst/>
@@ -3838,7 +3838,7 @@
               <a:buNone/>
             </a:pPr>
             <a:r>
-              <a:rPr lang="en-US" sz="1150" dirty="0">
+              <a:rPr lang="en-US" sz="1100" dirty="0">
                 <a:solidFill>
                   <a:srgbClr val="434A63"/>
                 </a:solidFill>
@@ -3848,7 +3848,7 @@
               </a:rPr>
               <a:t>Einordnung: Auf wessen Hardware läuft eure VM – und welcher Hypervisor-Typ ist das?</a:t>
             </a:r>
-            <a:endParaRPr lang="en-US" sz="1150" dirty="0"/>
+            <a:endParaRPr lang="en-US" sz="1100" dirty="0"/>
           </a:p>
         </p:txBody>
       </p:sp>
@@ -3860,8 +3860,8 @@
         </p:nvSpPr>
         <p:spPr>
           <a:xfrm>
-            <a:off x="566928" y="2926080"/>
-            <a:ext cx="914400" cy="365760"/>
+            <a:off x="566928" y="2779776"/>
+            <a:ext cx="914400" cy="329184"/>
           </a:xfrm>
           <a:prstGeom prst="rect">
             <a:avLst/>
@@ -3877,7 +3877,7 @@
               <a:buNone/>
             </a:pPr>
             <a:r>
-              <a:rPr lang="en-US" sz="1150" b="1" dirty="0">
+              <a:rPr lang="en-US" sz="1100" b="1" dirty="0">
                 <a:solidFill>
                   <a:srgbClr val="9A6310"/>
                 </a:solidFill>
@@ -3885,22 +3885,120 @@
                 <a:ea typeface="Courier New" pitchFamily="34" charset="-122"/>
                 <a:cs typeface="Courier New" pitchFamily="34" charset="-120"/>
               </a:rPr>
+              <a:t>Bonus</a:t>
+            </a:r>
+            <a:endParaRPr lang="en-US" sz="1100" dirty="0"/>
+          </a:p>
+        </p:txBody>
+      </p:sp>
+      <p:sp>
+        <p:nvSpPr>
+          <p:cNvPr id="14" name="Text 12"/>
+          <p:cNvSpPr/>
+          <p:nvPr/>
+        </p:nvSpPr>
+        <p:spPr>
+          <a:xfrm>
+            <a:off x="1481328" y="2779776"/>
+            <a:ext cx="7095744" cy="329184"/>
+          </a:xfrm>
+          <a:prstGeom prst="rect">
+            <a:avLst/>
+          </a:prstGeom>
+          <a:noFill/>
+          <a:ln/>
+        </p:spPr>
+        <p:txBody>
+          <a:bodyPr wrap="square" lIns="0" tIns="0" rIns="0" bIns="0" rtlCol="0" anchor="ctr"/>
+          <a:lstStyle/>
+          <a:p>
+            <a:pPr indent="0" marL="0">
+              <a:buNone/>
+            </a:pPr>
+            <a:r>
+              <a:rPr lang="en-US" sz="1100" dirty="0">
+                <a:solidFill>
+                  <a:srgbClr val="434A63"/>
+                </a:solidFill>
+                <a:latin typeface="Arial" pitchFamily="34" charset="0"/>
+                <a:ea typeface="Arial" pitchFamily="34" charset="-122"/>
+                <a:cs typeface="Arial" pitchFamily="34" charset="-120"/>
+              </a:rPr>
+              <a:t>Wer früher fertig ist: vier Experimente – Ressourcen, Hypervisor-Nachweis, Webserver</a:t>
+            </a:r>
+            <a:endParaRPr lang="en-US" sz="1100" dirty="0"/>
+          </a:p>
+        </p:txBody>
+      </p:sp>
+      <p:sp>
+        <p:nvSpPr>
+          <p:cNvPr id="15" name="Shape 13"/>
+          <p:cNvSpPr/>
+          <p:nvPr/>
+        </p:nvSpPr>
+        <p:spPr>
+          <a:xfrm>
+            <a:off x="438912" y="3108960"/>
+            <a:ext cx="8266176" cy="329184"/>
+          </a:xfrm>
+          <a:prstGeom prst="rect">
+            <a:avLst/>
+          </a:prstGeom>
+          <a:solidFill>
+            <a:srgbClr val="F5F6FC"/>
+          </a:solidFill>
+          <a:ln/>
+        </p:spPr>
+      </p:sp>
+      <p:sp>
+        <p:nvSpPr>
+          <p:cNvPr id="16" name="Text 14"/>
+          <p:cNvSpPr/>
+          <p:nvPr/>
+        </p:nvSpPr>
+        <p:spPr>
+          <a:xfrm>
+            <a:off x="566928" y="3108960"/>
+            <a:ext cx="914400" cy="329184"/>
+          </a:xfrm>
+          <a:prstGeom prst="rect">
+            <a:avLst/>
+          </a:prstGeom>
+          <a:noFill/>
+          <a:ln/>
+        </p:spPr>
+        <p:txBody>
+          <a:bodyPr wrap="square" lIns="0" tIns="0" rIns="0" bIns="0" rtlCol="0" anchor="ctr"/>
+          <a:lstStyle/>
+          <a:p>
+            <a:pPr indent="0" marL="0">
+              <a:buNone/>
+            </a:pPr>
+            <a:r>
+              <a:rPr lang="en-US" sz="1100" b="1" dirty="0">
+                <a:solidFill>
+                  <a:srgbClr val="9A6310"/>
+                </a:solidFill>
+                <a:latin typeface="Courier New" pitchFamily="34" charset="0"/>
+                <a:ea typeface="Courier New" pitchFamily="34" charset="-122"/>
+                <a:cs typeface="Courier New" pitchFamily="34" charset="-120"/>
+              </a:rPr>
               <a:t>Notieren</a:t>
             </a:r>
-            <a:endParaRPr lang="en-US" sz="1150" dirty="0"/>
-          </a:p>
-        </p:txBody>
-      </p:sp>
-      <p:sp>
-        <p:nvSpPr>
-          <p:cNvPr id="14" name="Text 12"/>
-          <p:cNvSpPr/>
-          <p:nvPr/>
-        </p:nvSpPr>
-        <p:spPr>
-          <a:xfrm>
-            <a:off x="1481328" y="2926080"/>
-            <a:ext cx="7095744" cy="365760"/>
+            <a:endParaRPr lang="en-US" sz="1100" dirty="0"/>
+          </a:p>
+        </p:txBody>
+      </p:sp>
+      <p:sp>
+        <p:nvSpPr>
+          <p:cNvPr id="17" name="Text 15"/>
+          <p:cNvSpPr/>
+          <p:nvPr/>
+        </p:nvSpPr>
+        <p:spPr>
+          <a:xfrm>
+            <a:off x="1481328" y="3108960"/>
+            <a:ext cx="7095744" cy="329184"/>
           </a:xfrm>
           <a:prstGeom prst="rect">
             <a:avLst/>
@@ -3916,7 +4014,7 @@
               <a:buNone/>
             </a:pPr>
             <a:r>
-              <a:rPr lang="en-US" sz="1150" dirty="0">
+              <a:rPr lang="en-US" sz="1100" dirty="0">
                 <a:solidFill>
                   <a:srgbClr val="434A63"/>
                 </a:solidFill>
@@ -3926,13 +4024,13 @@
               </a:rPr>
               <a:t>Die drei Netz-Antworten und euren Einordnungs-Satz</a:t>
             </a:r>
-            <a:endParaRPr lang="en-US" sz="1150" dirty="0"/>
-          </a:p>
-        </p:txBody>
-      </p:sp>
-      <p:sp>
-        <p:nvSpPr>
-          <p:cNvPr id="15" name="Shape 13"/>
+            <a:endParaRPr lang="en-US" sz="1100" dirty="0"/>
+          </a:p>
+        </p:txBody>
+      </p:sp>
+      <p:sp>
+        <p:nvSpPr>
+          <p:cNvPr id="18" name="Shape 16"/>
           <p:cNvSpPr/>
           <p:nvPr/>
         </p:nvSpPr>
@@ -3952,7 +4050,7 @@
       </p:sp>
       <p:sp>
         <p:nvSpPr>
-          <p:cNvPr id="16" name="Shape 14"/>
+          <p:cNvPr id="19" name="Shape 17"/>
           <p:cNvSpPr/>
           <p:nvPr/>
         </p:nvSpPr>
@@ -3972,7 +4070,7 @@
       </p:sp>
       <p:sp>
         <p:nvSpPr>
-          <p:cNvPr id="17" name="Text 15"/>
+          <p:cNvPr id="20" name="Text 18"/>
           <p:cNvSpPr/>
           <p:nvPr/>
         </p:nvSpPr>
@@ -4011,7 +4109,7 @@
       </p:sp>
       <p:sp>
         <p:nvSpPr>
-          <p:cNvPr id="18" name="Text 16"/>
+          <p:cNvPr id="21" name="Text 19"/>
           <p:cNvSpPr/>
           <p:nvPr/>
         </p:nvSpPr>
@@ -4079,7 +4177,7 @@
       </p:sp>
       <p:sp>
         <p:nvSpPr>
-          <p:cNvPr id="19" name="Shape 17"/>
+          <p:cNvPr id="22" name="Shape 20"/>
           <p:cNvSpPr/>
           <p:nvPr/>
         </p:nvSpPr>
@@ -4102,7 +4200,7 @@
       </p:sp>
       <p:sp>
         <p:nvSpPr>
-          <p:cNvPr id="20" name="Text 18"/>
+          <p:cNvPr id="23" name="Text 21"/>
           <p:cNvSpPr/>
           <p:nvPr/>
         </p:nvSpPr>
@@ -4141,7 +4239,7 @@
       </p:sp>
       <p:sp>
         <p:nvSpPr>
-          <p:cNvPr id="21" name="Text 19"/>
+          <p:cNvPr id="24" name="Text 22"/>
           <p:cNvSpPr/>
           <p:nvPr/>
         </p:nvSpPr>
@@ -4445,6 +4543,46 @@
                 <a:cs typeface="Arial" pitchFamily="34" charset="-120"/>
               </a:rPr>
               <a:t>Teil A ist Kopfarbeit mit Netzwerk-Wissen: erst rechnen, dann in den Lösungen nachsehen.</a:t>
+            </a:r>
+            <a:endParaRPr lang="en-US" sz="1250" dirty="0"/>
+          </a:p>
+          <a:p>
+            <a:pPr indent="0" marL="0">
+              <a:lnSpc>
+                <a:spcPct val="92000"/>
+              </a:lnSpc>
+              <a:buNone/>
+            </a:pPr>
+            <a:r>
+              <a:rPr lang="en-US" sz="1250" b="1" dirty="0">
+                <a:solidFill>
+                  <a:srgbClr val="9A6310"/>
+                </a:solidFill>
+                <a:latin typeface="Arial" pitchFamily="34" charset="0"/>
+                <a:ea typeface="Arial" pitchFamily="34" charset="-122"/>
+                <a:cs typeface="Arial" pitchFamily="34" charset="-120"/>
+              </a:rPr>
+              <a:t>▸   </a:t>
+            </a:r>
+            <a:pPr indent="0" marL="0">
+              <a:lnSpc>
+                <a:spcPct val="92000"/>
+              </a:lnSpc>
+              <a:spcAft>
+                <a:spcPts val="900"/>
+              </a:spcAft>
+              <a:buNone/>
+            </a:pPr>
+            <a:r>
+              <a:rPr lang="en-US" sz="1250" dirty="0">
+                <a:solidFill>
+                  <a:srgbClr val="434A63"/>
+                </a:solidFill>
+                <a:latin typeface="Arial" pitchFamily="34" charset="0"/>
+                <a:ea typeface="Arial" pitchFamily="34" charset="-122"/>
+                <a:cs typeface="Arial" pitchFamily="34" charset="-120"/>
+              </a:rPr>
+              <a:t>Schnell durch? Der Bonusteil auf der Seite hat vier Experimente – die VM verrät dort selbst, dass sie eine ist.</a:t>
             </a:r>
             <a:endParaRPr lang="en-US" sz="1250" dirty="0"/>
           </a:p>
